--- a/docs/job-hunt-midsemester-presentation.pptx
+++ b/docs/job-hunt-midsemester-presentation.pptx
@@ -6,15 +6,17 @@
   </p:sldMasterIdLst>
   <p:sldIdLst>
     <p:sldId id="256" r:id="rId7"/>
-    <p:sldId id="257" r:id="rId8"/>
     <p:sldId id="258" r:id="rId9"/>
     <p:sldId id="259" r:id="rId10"/>
     <p:sldId id="260" r:id="rId11"/>
     <p:sldId id="261" r:id="rId12"/>
     <p:sldId id="262" r:id="rId13"/>
+    <p:sldId id="265" r:id="rId16"/>
+    <p:sldId id="266" r:id="rId17"/>
+    <p:sldId id="264" r:id="rId15"/>
     <p:sldId id="263" r:id="rId14"/>
-    <p:sldId id="264" r:id="rId15"/>
-    <p:sldId id="265" r:id="rId16"/>
+    <p:sldId id="268" r:id="rId8"/>
+    <p:sldId id="267" r:id="rId18"/>
   </p:sldIdLst>
   <p:sldSz cx="12191695" cy="6858000" type="screen4x3"/>
   <p:notesSz cx="6858000" cy="9144000"/>
@@ -3158,8 +3160,8 @@
         </p:nvSpPr>
         <p:spPr>
           <a:xfrm>
-            <a:off x="0" y="6364224"/>
-            <a:ext cx="12191695" cy="493776"/>
+            <a:off x="0" y="6327648"/>
+            <a:ext cx="12191695" cy="530352"/>
           </a:xfrm>
           <a:prstGeom prst="rect">
             <a:avLst/>
@@ -3203,8 +3205,8 @@
         </p:nvSpPr>
         <p:spPr>
           <a:xfrm>
-            <a:off x="7818120" y="1097280"/>
-            <a:ext cx="3493008" cy="4069080"/>
+            <a:off x="7754112" y="1005840"/>
+            <a:ext cx="3566160" cy="4480560"/>
           </a:xfrm>
           <a:prstGeom prst="roundRect">
             <a:avLst/>
@@ -3248,8 +3250,8 @@
         </p:nvSpPr>
         <p:spPr>
           <a:xfrm>
-            <a:off x="713232" y="914400"/>
-            <a:ext cx="5029200" cy="320040"/>
+            <a:off x="713232" y="896112"/>
+            <a:ext cx="3931920" cy="274320"/>
           </a:xfrm>
           <a:prstGeom prst="rect">
             <a:avLst/>
@@ -3270,7 +3272,7 @@
                 </a:solidFill>
                 <a:latin typeface="Aptos"/>
               </a:rPr>
-              <a:t>COMP3901 Midsemester Presentation</a:t>
+              <a:t>COMP3901 - Capstone Project</a:t>
             </a:r>
           </a:p>
         </p:txBody>
@@ -3283,8 +3285,8 @@
         </p:nvSpPr>
         <p:spPr>
           <a:xfrm>
-            <a:off x="713232" y="1417320"/>
-            <a:ext cx="5029200" cy="822960"/>
+            <a:off x="713232" y="1325880"/>
+            <a:ext cx="5303520" cy="822960"/>
           </a:xfrm>
           <a:prstGeom prst="rect">
             <a:avLst/>
@@ -3299,7 +3301,7 @@
           <a:p>
             <a:pPr algn="l"/>
             <a:r>
-              <a:rPr sz="3000" b="1">
+              <a:rPr sz="3100" b="1">
                 <a:solidFill>
                   <a:srgbClr val="FFFFFF"/>
                 </a:solidFill>
@@ -3318,8 +3320,8 @@
         </p:nvSpPr>
         <p:spPr>
           <a:xfrm>
-            <a:off x="731520" y="2212848"/>
-            <a:ext cx="5715000" cy="914400"/>
+            <a:off x="731520" y="2084831"/>
+            <a:ext cx="5669280" cy="822960"/>
           </a:xfrm>
           <a:prstGeom prst="rect">
             <a:avLst/>
@@ -3334,13 +3336,13 @@
           <a:p>
             <a:pPr algn="l"/>
             <a:r>
-              <a:rPr sz="2000" b="0">
+              <a:rPr sz="2000" b="1">
                 <a:solidFill>
                   <a:srgbClr val="FFFFFF"/>
                 </a:solidFill>
                 <a:latin typeface="Aptos"/>
               </a:rPr>
-              <a:t>A job matching and qualification system for computing-related roles</a:t>
+              <a:t>Midsemester Presentation</a:t>
             </a:r>
           </a:p>
         </p:txBody>
@@ -3353,8 +3355,8 @@
         </p:nvSpPr>
         <p:spPr>
           <a:xfrm>
-            <a:off x="731520" y="3246120"/>
-            <a:ext cx="1828800" cy="274320"/>
+            <a:off x="731520" y="2907792"/>
+            <a:ext cx="5806440" cy="960120"/>
           </a:xfrm>
           <a:prstGeom prst="rect">
             <a:avLst/>
@@ -3369,13 +3371,13 @@
           <a:p>
             <a:pPr algn="l"/>
             <a:r>
-              <a:rPr sz="1200" b="1">
-                <a:solidFill>
-                  <a:srgbClr val="F7EBC7"/>
-                </a:solidFill>
-                <a:latin typeface="Aptos"/>
-              </a:rPr>
-              <a:t>Team Name</a:t>
+              <a:rPr sz="1800" b="0">
+                <a:solidFill>
+                  <a:srgbClr val="FFFFFF"/>
+                </a:solidFill>
+                <a:latin typeface="Aptos"/>
+              </a:rPr>
+              <a:t>A web-based job matching and qualification system for computing-related roles.</a:t>
             </a:r>
           </a:p>
         </p:txBody>
@@ -3388,8 +3390,8 @@
         </p:nvSpPr>
         <p:spPr>
           <a:xfrm>
-            <a:off x="731520" y="3529584"/>
-            <a:ext cx="2743200" cy="457200"/>
+            <a:off x="731520" y="4069080"/>
+            <a:ext cx="1828800" cy="228600"/>
           </a:xfrm>
           <a:prstGeom prst="rect">
             <a:avLst/>
@@ -3404,13 +3406,13 @@
           <a:p>
             <a:pPr algn="l"/>
             <a:r>
-              <a:rPr sz="2200" b="1">
-                <a:solidFill>
-                  <a:srgbClr val="FFFFFF"/>
-                </a:solidFill>
-                <a:latin typeface="Georgia"/>
-              </a:rPr>
-              <a:t>Free Labour</a:t>
+              <a:rPr sz="1200" b="1">
+                <a:solidFill>
+                  <a:srgbClr val="F7EBC7"/>
+                </a:solidFill>
+                <a:latin typeface="Aptos"/>
+              </a:rPr>
+              <a:t>Team Name</a:t>
             </a:r>
           </a:p>
         </p:txBody>
@@ -3423,8 +3425,8 @@
         </p:nvSpPr>
         <p:spPr>
           <a:xfrm>
-            <a:off x="8156448" y="1389888"/>
-            <a:ext cx="2560320" cy="274320"/>
+            <a:off x="731520" y="4297680"/>
+            <a:ext cx="2286000" cy="411480"/>
           </a:xfrm>
           <a:prstGeom prst="rect">
             <a:avLst/>
@@ -3439,13 +3441,13 @@
           <a:p>
             <a:pPr algn="l"/>
             <a:r>
-              <a:rPr sz="1200" b="1">
-                <a:solidFill>
-                  <a:srgbClr val="11213E"/>
-                </a:solidFill>
-                <a:latin typeface="Aptos"/>
-              </a:rPr>
-              <a:t>Presented by</a:t>
+              <a:rPr sz="2200" b="1">
+                <a:solidFill>
+                  <a:srgbClr val="FFFFFF"/>
+                </a:solidFill>
+                <a:latin typeface="Georgia"/>
+              </a:rPr>
+              <a:t>Free Labour</a:t>
             </a:r>
           </a:p>
         </p:txBody>
@@ -3458,8 +3460,43 @@
         </p:nvSpPr>
         <p:spPr>
           <a:xfrm>
-            <a:off x="8101583" y="1737360"/>
-            <a:ext cx="2743200" cy="2514600"/>
+            <a:off x="8083296" y="1298448"/>
+            <a:ext cx="2377440" cy="274320"/>
+          </a:xfrm>
+          <a:prstGeom prst="rect">
+            <a:avLst/>
+          </a:prstGeom>
+          <a:noFill/>
+        </p:spPr>
+        <p:txBody>
+          <a:bodyPr wrap="square" lIns="76200" rIns="76200" tIns="50800" bIns="50800" anchor="t">
+            <a:spAutoFit/>
+          </a:bodyPr>
+          <a:lstStyle/>
+          <a:p>
+            <a:pPr algn="l"/>
+            <a:r>
+              <a:rPr sz="1200" b="1">
+                <a:solidFill>
+                  <a:srgbClr val="11213E"/>
+                </a:solidFill>
+                <a:latin typeface="Aptos"/>
+              </a:rPr>
+              <a:t>Team Members</a:t>
+            </a:r>
+          </a:p>
+        </p:txBody>
+      </p:sp>
+      <p:sp>
+        <p:nvSpPr>
+          <p:cNvPr id="12" name="TextBox 11"/>
+          <p:cNvSpPr txBox="1"/>
+          <p:nvPr/>
+        </p:nvSpPr>
+        <p:spPr>
+          <a:xfrm>
+            <a:off x="8065008" y="1645920"/>
+            <a:ext cx="2743200" cy="3474720"/>
           </a:xfrm>
           <a:prstGeom prst="rect">
             <a:avLst/>
@@ -3555,77 +3592,7 @@
       </p:sp>
       <p:sp>
         <p:nvSpPr>
-          <p:cNvPr id="12" name="TextBox 11"/>
-          <p:cNvSpPr txBox="1"/>
-          <p:nvPr/>
-        </p:nvSpPr>
-        <p:spPr>
-          <a:xfrm>
-            <a:off x="8156448" y="4709160"/>
-            <a:ext cx="2560320" cy="274320"/>
-          </a:xfrm>
-          <a:prstGeom prst="rect">
-            <a:avLst/>
-          </a:prstGeom>
-          <a:noFill/>
-        </p:spPr>
-        <p:txBody>
-          <a:bodyPr wrap="square" lIns="76200" rIns="76200" tIns="50800" bIns="50800" anchor="t">
-            <a:spAutoFit/>
-          </a:bodyPr>
-          <a:lstStyle/>
-          <a:p>
-            <a:pPr algn="l"/>
-            <a:r>
-              <a:rPr sz="1100" b="1">
-                <a:solidFill>
-                  <a:srgbClr val="368A7F"/>
-                </a:solidFill>
-                <a:latin typeface="Aptos"/>
-              </a:rPr>
-              <a:t>Midsemester focus</a:t>
-            </a:r>
-          </a:p>
-        </p:txBody>
-      </p:sp>
-      <p:sp>
-        <p:nvSpPr>
           <p:cNvPr id="13" name="TextBox 12"/>
-          <p:cNvSpPr txBox="1"/>
-          <p:nvPr/>
-        </p:nvSpPr>
-        <p:spPr>
-          <a:xfrm>
-            <a:off x="8156448" y="4956048"/>
-            <a:ext cx="2651760" cy="731520"/>
-          </a:xfrm>
-          <a:prstGeom prst="rect">
-            <a:avLst/>
-          </a:prstGeom>
-          <a:noFill/>
-        </p:spPr>
-        <p:txBody>
-          <a:bodyPr wrap="square" lIns="76200" rIns="76200" tIns="50800" bIns="50800" anchor="t">
-            <a:spAutoFit/>
-          </a:bodyPr>
-          <a:lstStyle/>
-          <a:p>
-            <a:pPr algn="l"/>
-            <a:r>
-              <a:rPr sz="1400" b="0">
-                <a:solidFill>
-                  <a:srgbClr val="11213E"/>
-                </a:solidFill>
-                <a:latin typeface="Aptos"/>
-              </a:rPr>
-              <a:t>Problem definition, solution approach, scope, and progress to date</a:t>
-            </a:r>
-          </a:p>
-        </p:txBody>
-      </p:sp>
-      <p:sp>
-        <p:nvSpPr>
-          <p:cNvPr id="14" name="TextBox 13"/>
           <p:cNvSpPr txBox="1"/>
           <p:nvPr/>
         </p:nvSpPr>
@@ -3667,6 +3634,785 @@
 </file>
 
 <file path=ppt/slides/slide10.xml><?xml version="1.0" encoding="utf-8"?>
+<p:sld xmlns:a="http://schemas.openxmlformats.org/drawingml/2006/main" xmlns:p="http://schemas.openxmlformats.org/presentationml/2006/main" xmlns:r="http://schemas.openxmlformats.org/officeDocument/2006/relationships">
+  <p:cSld>
+    <p:bg>
+      <p:bgPr>
+        <a:solidFill>
+          <a:srgbClr val="FFFFFF"/>
+        </a:solidFill>
+        <a:effectLst/>
+      </p:bgPr>
+    </p:bg>
+    <p:spTree>
+      <p:nvGrpSpPr>
+        <p:cNvPr id="1" name=""/>
+        <p:cNvGrpSpPr/>
+        <p:nvPr/>
+      </p:nvGrpSpPr>
+      <p:grpSpPr/>
+      <p:sp>
+        <p:nvSpPr>
+          <p:cNvPr id="2" name="Rectangle 1"/>
+          <p:cNvSpPr/>
+          <p:nvPr/>
+        </p:nvSpPr>
+        <p:spPr>
+          <a:xfrm>
+            <a:off x="0" y="0"/>
+            <a:ext cx="12191695" cy="310896"/>
+          </a:xfrm>
+          <a:prstGeom prst="rect">
+            <a:avLst/>
+          </a:prstGeom>
+          <a:solidFill>
+            <a:srgbClr val="E0B44A"/>
+          </a:solidFill>
+          <a:ln>
+            <a:solidFill>
+              <a:srgbClr val="E0B44A"/>
+            </a:solidFill>
+          </a:ln>
+        </p:spPr>
+        <p:style>
+          <a:lnRef idx="1">
+            <a:schemeClr val="accent1"/>
+          </a:lnRef>
+          <a:fillRef idx="3">
+            <a:schemeClr val="accent1"/>
+          </a:fillRef>
+          <a:effectRef idx="2">
+            <a:schemeClr val="accent1"/>
+          </a:effectRef>
+          <a:fontRef idx="minor">
+            <a:schemeClr val="lt1"/>
+          </a:fontRef>
+        </p:style>
+        <p:txBody>
+          <a:bodyPr rtlCol="0" anchor="ctr"/>
+          <a:lstStyle/>
+          <a:p>
+            <a:pPr algn="ctr"/>
+          </a:p>
+        </p:txBody>
+      </p:sp>
+      <p:sp>
+        <p:nvSpPr>
+          <p:cNvPr id="3" name="TextBox 2"/>
+          <p:cNvSpPr txBox="1"/>
+          <p:nvPr/>
+        </p:nvSpPr>
+        <p:spPr>
+          <a:xfrm>
+            <a:off x="640080" y="502920"/>
+            <a:ext cx="8869680" cy="658368"/>
+          </a:xfrm>
+          <a:prstGeom prst="rect">
+            <a:avLst/>
+          </a:prstGeom>
+          <a:noFill/>
+        </p:spPr>
+        <p:txBody>
+          <a:bodyPr wrap="square" lIns="76200" rIns="76200" tIns="50800" bIns="50800" anchor="t">
+            <a:spAutoFit/>
+          </a:bodyPr>
+          <a:lstStyle/>
+          <a:p>
+            <a:pPr algn="l"/>
+            <a:r>
+              <a:rPr sz="2500" b="1">
+                <a:solidFill>
+                  <a:srgbClr val="11213E"/>
+                </a:solidFill>
+                <a:latin typeface="Georgia"/>
+              </a:rPr>
+              <a:t>Progress on Target and Well Organised</a:t>
+            </a:r>
+          </a:p>
+        </p:txBody>
+      </p:sp>
+      <p:sp>
+        <p:nvSpPr>
+          <p:cNvPr id="4" name="TextBox 3"/>
+          <p:cNvSpPr txBox="1"/>
+          <p:nvPr/>
+        </p:nvSpPr>
+        <p:spPr>
+          <a:xfrm>
+            <a:off x="658368" y="1078992"/>
+            <a:ext cx="8869680" cy="329184"/>
+          </a:xfrm>
+          <a:prstGeom prst="rect">
+            <a:avLst/>
+          </a:prstGeom>
+          <a:noFill/>
+        </p:spPr>
+        <p:txBody>
+          <a:bodyPr wrap="square" lIns="76200" rIns="76200" tIns="50800" bIns="50800" anchor="t">
+            <a:spAutoFit/>
+          </a:bodyPr>
+          <a:lstStyle/>
+          <a:p>
+            <a:pPr algn="l"/>
+            <a:r>
+              <a:rPr sz="1100" b="1">
+                <a:solidFill>
+                  <a:srgbClr val="368A7F"/>
+                </a:solidFill>
+                <a:latin typeface="Aptos"/>
+              </a:rPr>
+              <a:t>Progress so far has focused on planning, modelling, and implementation preparation</a:t>
+            </a:r>
+          </a:p>
+        </p:txBody>
+      </p:sp>
+      <p:sp>
+        <p:nvSpPr>
+          <p:cNvPr id="5" name="Rounded Rectangle 4"/>
+          <p:cNvSpPr/>
+          <p:nvPr/>
+        </p:nvSpPr>
+        <p:spPr>
+          <a:xfrm>
+            <a:off x="9710928" y="566928"/>
+            <a:ext cx="1783080" cy="329184"/>
+          </a:xfrm>
+          <a:prstGeom prst="roundRect">
+            <a:avLst/>
+          </a:prstGeom>
+          <a:solidFill>
+            <a:srgbClr val="368A7F"/>
+          </a:solidFill>
+          <a:ln>
+            <a:solidFill>
+              <a:srgbClr val="368A7F"/>
+            </a:solidFill>
+          </a:ln>
+        </p:spPr>
+        <p:style>
+          <a:lnRef idx="1">
+            <a:schemeClr val="accent1"/>
+          </a:lnRef>
+          <a:fillRef idx="3">
+            <a:schemeClr val="accent1"/>
+          </a:fillRef>
+          <a:effectRef idx="2">
+            <a:schemeClr val="accent1"/>
+          </a:effectRef>
+          <a:fontRef idx="minor">
+            <a:schemeClr val="lt1"/>
+          </a:fontRef>
+        </p:style>
+        <p:txBody>
+          <a:bodyPr rtlCol="0" anchor="ctr"/>
+          <a:lstStyle/>
+          <a:p>
+            <a:pPr algn="ctr"/>
+            <a:r>
+              <a:rPr sz="1100" b="1">
+                <a:solidFill>
+                  <a:srgbClr val="FFFFFF"/>
+                </a:solidFill>
+                <a:latin typeface="Aptos"/>
+              </a:rPr>
+              <a:t>Progress</a:t>
+            </a:r>
+          </a:p>
+        </p:txBody>
+      </p:sp>
+      <p:sp>
+        <p:nvSpPr>
+          <p:cNvPr id="6" name="Rounded Rectangle 5"/>
+          <p:cNvSpPr/>
+          <p:nvPr/>
+        </p:nvSpPr>
+        <p:spPr>
+          <a:xfrm>
+            <a:off x="566928" y="1554480"/>
+            <a:ext cx="3611880" cy="4480560"/>
+          </a:xfrm>
+          <a:prstGeom prst="roundRect">
+            <a:avLst/>
+          </a:prstGeom>
+          <a:solidFill>
+            <a:srgbClr val="E1EBF7"/>
+          </a:solidFill>
+          <a:ln>
+            <a:solidFill>
+              <a:srgbClr val="E1EBF7"/>
+            </a:solidFill>
+          </a:ln>
+        </p:spPr>
+        <p:style>
+          <a:lnRef idx="1">
+            <a:schemeClr val="accent1"/>
+          </a:lnRef>
+          <a:fillRef idx="3">
+            <a:schemeClr val="accent1"/>
+          </a:fillRef>
+          <a:effectRef idx="2">
+            <a:schemeClr val="accent1"/>
+          </a:effectRef>
+          <a:fontRef idx="minor">
+            <a:schemeClr val="lt1"/>
+          </a:fontRef>
+        </p:style>
+        <p:txBody>
+          <a:bodyPr rtlCol="0" anchor="ctr"/>
+          <a:lstStyle/>
+          <a:p>
+            <a:pPr algn="ctr"/>
+          </a:p>
+        </p:txBody>
+      </p:sp>
+      <p:sp>
+        <p:nvSpPr>
+          <p:cNvPr id="7" name="TextBox 6"/>
+          <p:cNvSpPr txBox="1"/>
+          <p:nvPr/>
+        </p:nvSpPr>
+        <p:spPr>
+          <a:xfrm>
+            <a:off x="676656" y="1645920"/>
+            <a:ext cx="3392424" cy="310896"/>
+          </a:xfrm>
+          <a:prstGeom prst="rect">
+            <a:avLst/>
+          </a:prstGeom>
+          <a:noFill/>
+        </p:spPr>
+        <p:txBody>
+          <a:bodyPr wrap="square" lIns="76200" rIns="76200" tIns="50800" bIns="50800" anchor="t">
+            <a:spAutoFit/>
+          </a:bodyPr>
+          <a:lstStyle/>
+          <a:p>
+            <a:pPr algn="l"/>
+            <a:r>
+              <a:rPr sz="1400" b="1">
+                <a:solidFill>
+                  <a:srgbClr val="11213E"/>
+                </a:solidFill>
+                <a:latin typeface="Georgia"/>
+              </a:rPr>
+              <a:t>What has been done so far</a:t>
+            </a:r>
+          </a:p>
+        </p:txBody>
+      </p:sp>
+      <p:sp>
+        <p:nvSpPr>
+          <p:cNvPr id="8" name="TextBox 7"/>
+          <p:cNvSpPr txBox="1"/>
+          <p:nvPr/>
+        </p:nvSpPr>
+        <p:spPr>
+          <a:xfrm>
+            <a:off x="640080" y="1975104"/>
+            <a:ext cx="3465576" cy="3986784"/>
+          </a:xfrm>
+          <a:prstGeom prst="rect">
+            <a:avLst/>
+          </a:prstGeom>
+          <a:noFill/>
+        </p:spPr>
+        <p:txBody>
+          <a:bodyPr wrap="square" lIns="101600" rIns="101600" tIns="50800" bIns="50800">
+            <a:spAutoFit/>
+          </a:bodyPr>
+          <a:lstStyle/>
+          <a:p>
+            <a:pPr>
+              <a:spcAft>
+                <a:spcPts val="700"/>
+              </a:spcAft>
+            </a:pPr>
+            <a:r>
+              <a:rPr sz="1150" b="0">
+                <a:solidFill>
+                  <a:srgbClr val="1F2A37"/>
+                </a:solidFill>
+                <a:latin typeface="Aptos"/>
+              </a:rPr>
+              <a:t>Problem definition and scope have been clarified.</a:t>
+            </a:r>
+          </a:p>
+          <a:p>
+            <a:pPr>
+              <a:spcAft>
+                <a:spcPts val="700"/>
+              </a:spcAft>
+            </a:pPr>
+            <a:r>
+              <a:rPr sz="1150" b="0">
+                <a:solidFill>
+                  <a:srgbClr val="1F2A37"/>
+                </a:solidFill>
+                <a:latin typeface="Aptos"/>
+              </a:rPr>
+              <a:t>The O*NET-based methodology has been outlined.</a:t>
+            </a:r>
+          </a:p>
+          <a:p>
+            <a:pPr>
+              <a:spcAft>
+                <a:spcPts val="700"/>
+              </a:spcAft>
+            </a:pPr>
+            <a:r>
+              <a:rPr sz="1150" b="0">
+                <a:solidFill>
+                  <a:srgbClr val="1F2A37"/>
+                </a:solidFill>
+                <a:latin typeface="Aptos"/>
+              </a:rPr>
+              <a:t>Functional requirements have been drafted.</a:t>
+            </a:r>
+          </a:p>
+          <a:p>
+            <a:pPr>
+              <a:spcAft>
+                <a:spcPts val="700"/>
+              </a:spcAft>
+            </a:pPr>
+            <a:r>
+              <a:rPr sz="1150" b="0">
+                <a:solidFill>
+                  <a:srgbClr val="1F2A37"/>
+                </a:solidFill>
+                <a:latin typeface="Aptos"/>
+              </a:rPr>
+              <a:t>Use case and sitemap artefacts have been prepared.</a:t>
+            </a:r>
+          </a:p>
+          <a:p>
+            <a:pPr>
+              <a:spcAft>
+                <a:spcPts val="700"/>
+              </a:spcAft>
+            </a:pPr>
+            <a:r>
+              <a:rPr sz="1150" b="0">
+                <a:solidFill>
+                  <a:srgbClr val="1F2A37"/>
+                </a:solidFill>
+                <a:latin typeface="Aptos"/>
+              </a:rPr>
+              <a:t>Initial presentation structure has been organised around the rubric.</a:t>
+            </a:r>
+          </a:p>
+        </p:txBody>
+      </p:sp>
+      <p:sp>
+        <p:nvSpPr>
+          <p:cNvPr id="9" name="Rounded Rectangle 8"/>
+          <p:cNvSpPr/>
+          <p:nvPr/>
+        </p:nvSpPr>
+        <p:spPr>
+          <a:xfrm>
+            <a:off x="4297680" y="1554480"/>
+            <a:ext cx="3611880" cy="4480560"/>
+          </a:xfrm>
+          <a:prstGeom prst="roundRect">
+            <a:avLst/>
+          </a:prstGeom>
+          <a:solidFill>
+            <a:srgbClr val="F7EBC7"/>
+          </a:solidFill>
+          <a:ln>
+            <a:solidFill>
+              <a:srgbClr val="F7EBC7"/>
+            </a:solidFill>
+          </a:ln>
+        </p:spPr>
+        <p:style>
+          <a:lnRef idx="1">
+            <a:schemeClr val="accent1"/>
+          </a:lnRef>
+          <a:fillRef idx="3">
+            <a:schemeClr val="accent1"/>
+          </a:fillRef>
+          <a:effectRef idx="2">
+            <a:schemeClr val="accent1"/>
+          </a:effectRef>
+          <a:fontRef idx="minor">
+            <a:schemeClr val="lt1"/>
+          </a:fontRef>
+        </p:style>
+        <p:txBody>
+          <a:bodyPr rtlCol="0" anchor="ctr"/>
+          <a:lstStyle/>
+          <a:p>
+            <a:pPr algn="ctr"/>
+          </a:p>
+        </p:txBody>
+      </p:sp>
+      <p:sp>
+        <p:nvSpPr>
+          <p:cNvPr id="10" name="TextBox 9"/>
+          <p:cNvSpPr txBox="1"/>
+          <p:nvPr/>
+        </p:nvSpPr>
+        <p:spPr>
+          <a:xfrm>
+            <a:off x="4407408" y="1645920"/>
+            <a:ext cx="3392424" cy="310896"/>
+          </a:xfrm>
+          <a:prstGeom prst="rect">
+            <a:avLst/>
+          </a:prstGeom>
+          <a:noFill/>
+        </p:spPr>
+        <p:txBody>
+          <a:bodyPr wrap="square" lIns="76200" rIns="76200" tIns="50800" bIns="50800" anchor="t">
+            <a:spAutoFit/>
+          </a:bodyPr>
+          <a:lstStyle/>
+          <a:p>
+            <a:pPr algn="l"/>
+            <a:r>
+              <a:rPr sz="1400" b="1">
+                <a:solidFill>
+                  <a:srgbClr val="11213E"/>
+                </a:solidFill>
+                <a:latin typeface="Georgia"/>
+              </a:rPr>
+              <a:t>What remains to be done</a:t>
+            </a:r>
+          </a:p>
+        </p:txBody>
+      </p:sp>
+      <p:sp>
+        <p:nvSpPr>
+          <p:cNvPr id="11" name="TextBox 10"/>
+          <p:cNvSpPr txBox="1"/>
+          <p:nvPr/>
+        </p:nvSpPr>
+        <p:spPr>
+          <a:xfrm>
+            <a:off x="4370832" y="1975104"/>
+            <a:ext cx="3465576" cy="3986784"/>
+          </a:xfrm>
+          <a:prstGeom prst="rect">
+            <a:avLst/>
+          </a:prstGeom>
+          <a:noFill/>
+        </p:spPr>
+        <p:txBody>
+          <a:bodyPr wrap="square" lIns="101600" rIns="101600" tIns="50800" bIns="50800">
+            <a:spAutoFit/>
+          </a:bodyPr>
+          <a:lstStyle/>
+          <a:p>
+            <a:pPr>
+              <a:spcAft>
+                <a:spcPts val="700"/>
+              </a:spcAft>
+            </a:pPr>
+            <a:r>
+              <a:rPr sz="1150" b="0">
+                <a:solidFill>
+                  <a:srgbClr val="1F2A37"/>
+                </a:solidFill>
+                <a:latin typeface="Aptos"/>
+              </a:rPr>
+              <a:t>Implement the system as a web application.</a:t>
+            </a:r>
+          </a:p>
+          <a:p>
+            <a:pPr>
+              <a:spcAft>
+                <a:spcPts val="700"/>
+              </a:spcAft>
+            </a:pPr>
+            <a:r>
+              <a:rPr sz="1150" b="0">
+                <a:solidFill>
+                  <a:srgbClr val="1F2A37"/>
+                </a:solidFill>
+                <a:latin typeface="Aptos"/>
+              </a:rPr>
+              <a:t>Complete frontend and backend integration.</a:t>
+            </a:r>
+          </a:p>
+          <a:p>
+            <a:pPr>
+              <a:spcAft>
+                <a:spcPts val="700"/>
+              </a:spcAft>
+            </a:pPr>
+            <a:r>
+              <a:rPr sz="1150" b="0">
+                <a:solidFill>
+                  <a:srgbClr val="1F2A37"/>
+                </a:solidFill>
+                <a:latin typeface="Aptos"/>
+              </a:rPr>
+              <a:t>Finish database design and setup.</a:t>
+            </a:r>
+          </a:p>
+          <a:p>
+            <a:pPr>
+              <a:spcAft>
+                <a:spcPts val="700"/>
+              </a:spcAft>
+            </a:pPr>
+            <a:r>
+              <a:rPr sz="1150" b="0">
+                <a:solidFill>
+                  <a:srgbClr val="1F2A37"/>
+                </a:solidFill>
+                <a:latin typeface="Aptos"/>
+              </a:rPr>
+              <a:t>Prepare datasets and carry out evaluation.</a:t>
+            </a:r>
+          </a:p>
+          <a:p>
+            <a:pPr>
+              <a:spcAft>
+                <a:spcPts val="700"/>
+              </a:spcAft>
+            </a:pPr>
+            <a:r>
+              <a:rPr sz="1150" b="0">
+                <a:solidFill>
+                  <a:srgbClr val="1F2A37"/>
+                </a:solidFill>
+                <a:latin typeface="Aptos"/>
+              </a:rPr>
+              <a:t>Use Visual Paradigm and StarUML for modelling and documentation support.</a:t>
+            </a:r>
+          </a:p>
+        </p:txBody>
+      </p:sp>
+      <p:sp>
+        <p:nvSpPr>
+          <p:cNvPr id="12" name="Rounded Rectangle 11"/>
+          <p:cNvSpPr/>
+          <p:nvPr/>
+        </p:nvSpPr>
+        <p:spPr>
+          <a:xfrm>
+            <a:off x="8028431" y="1554480"/>
+            <a:ext cx="3611880" cy="4480560"/>
+          </a:xfrm>
+          <a:prstGeom prst="roundRect">
+            <a:avLst/>
+          </a:prstGeom>
+          <a:solidFill>
+            <a:srgbClr val="E4F2EC"/>
+          </a:solidFill>
+          <a:ln>
+            <a:solidFill>
+              <a:srgbClr val="E4F2EC"/>
+            </a:solidFill>
+          </a:ln>
+        </p:spPr>
+        <p:style>
+          <a:lnRef idx="1">
+            <a:schemeClr val="accent1"/>
+          </a:lnRef>
+          <a:fillRef idx="3">
+            <a:schemeClr val="accent1"/>
+          </a:fillRef>
+          <a:effectRef idx="2">
+            <a:schemeClr val="accent1"/>
+          </a:effectRef>
+          <a:fontRef idx="minor">
+            <a:schemeClr val="lt1"/>
+          </a:fontRef>
+        </p:style>
+        <p:txBody>
+          <a:bodyPr rtlCol="0" anchor="ctr"/>
+          <a:lstStyle/>
+          <a:p>
+            <a:pPr algn="ctr"/>
+          </a:p>
+        </p:txBody>
+      </p:sp>
+      <p:sp>
+        <p:nvSpPr>
+          <p:cNvPr id="13" name="TextBox 12"/>
+          <p:cNvSpPr txBox="1"/>
+          <p:nvPr/>
+        </p:nvSpPr>
+        <p:spPr>
+          <a:xfrm>
+            <a:off x="8138159" y="1645920"/>
+            <a:ext cx="3392424" cy="310896"/>
+          </a:xfrm>
+          <a:prstGeom prst="rect">
+            <a:avLst/>
+          </a:prstGeom>
+          <a:noFill/>
+        </p:spPr>
+        <p:txBody>
+          <a:bodyPr wrap="square" lIns="76200" rIns="76200" tIns="50800" bIns="50800" anchor="t">
+            <a:spAutoFit/>
+          </a:bodyPr>
+          <a:lstStyle/>
+          <a:p>
+            <a:pPr algn="l"/>
+            <a:r>
+              <a:rPr sz="1400" b="1">
+                <a:solidFill>
+                  <a:srgbClr val="11213E"/>
+                </a:solidFill>
+                <a:latin typeface="Georgia"/>
+              </a:rPr>
+              <a:t>Work division</a:t>
+            </a:r>
+          </a:p>
+        </p:txBody>
+      </p:sp>
+      <p:sp>
+        <p:nvSpPr>
+          <p:cNvPr id="14" name="TextBox 13"/>
+          <p:cNvSpPr txBox="1"/>
+          <p:nvPr/>
+        </p:nvSpPr>
+        <p:spPr>
+          <a:xfrm>
+            <a:off x="8101583" y="1975104"/>
+            <a:ext cx="3465576" cy="3986784"/>
+          </a:xfrm>
+          <a:prstGeom prst="rect">
+            <a:avLst/>
+          </a:prstGeom>
+          <a:noFill/>
+        </p:spPr>
+        <p:txBody>
+          <a:bodyPr wrap="square" lIns="101600" rIns="101600" tIns="50800" bIns="50800">
+            <a:spAutoFit/>
+          </a:bodyPr>
+          <a:lstStyle/>
+          <a:p>
+            <a:pPr>
+              <a:spcAft>
+                <a:spcPts val="700"/>
+              </a:spcAft>
+            </a:pPr>
+            <a:r>
+              <a:rPr sz="1150" b="0">
+                <a:solidFill>
+                  <a:srgbClr val="1F2A37"/>
+                </a:solidFill>
+                <a:latin typeface="Aptos"/>
+              </a:rPr>
+              <a:t>Alwyn Sterling - backend development and database implementation</a:t>
+            </a:r>
+          </a:p>
+          <a:p>
+            <a:pPr>
+              <a:spcAft>
+                <a:spcPts val="700"/>
+              </a:spcAft>
+            </a:pPr>
+            <a:r>
+              <a:rPr sz="1150" b="0">
+                <a:solidFill>
+                  <a:srgbClr val="1F2A37"/>
+                </a:solidFill>
+                <a:latin typeface="Aptos"/>
+              </a:rPr>
+              <a:t>Dominic Scott - backend development and database implementation</a:t>
+            </a:r>
+          </a:p>
+          <a:p>
+            <a:pPr>
+              <a:spcAft>
+                <a:spcPts val="700"/>
+              </a:spcAft>
+            </a:pPr>
+            <a:r>
+              <a:rPr sz="1150" b="0">
+                <a:solidFill>
+                  <a:srgbClr val="1F2A37"/>
+                </a:solidFill>
+                <a:latin typeface="Aptos"/>
+              </a:rPr>
+              <a:t>Ron-Hugh Walters - documentation, modelling, data cleaning, and parsing</a:t>
+            </a:r>
+          </a:p>
+          <a:p>
+            <a:pPr>
+              <a:spcAft>
+                <a:spcPts val="700"/>
+              </a:spcAft>
+            </a:pPr>
+            <a:r>
+              <a:rPr sz="1150" b="0">
+                <a:solidFill>
+                  <a:srgbClr val="1F2A37"/>
+                </a:solidFill>
+                <a:latin typeface="Aptos"/>
+              </a:rPr>
+              <a:t>Leah-Jay Holness - user interface design</a:t>
+            </a:r>
+          </a:p>
+          <a:p>
+            <a:pPr>
+              <a:spcAft>
+                <a:spcPts val="700"/>
+              </a:spcAft>
+            </a:pPr>
+            <a:r>
+              <a:rPr sz="1150" b="0">
+                <a:solidFill>
+                  <a:srgbClr val="1F2A37"/>
+                </a:solidFill>
+                <a:latin typeface="Aptos"/>
+              </a:rPr>
+              <a:t>Tianna Bassaragh - user interface design</a:t>
+            </a:r>
+          </a:p>
+        </p:txBody>
+      </p:sp>
+      <p:sp>
+        <p:nvSpPr>
+          <p:cNvPr id="15" name="TextBox 14"/>
+          <p:cNvSpPr txBox="1"/>
+          <p:nvPr/>
+        </p:nvSpPr>
+        <p:spPr>
+          <a:xfrm>
+            <a:off x="11448288" y="6400800"/>
+            <a:ext cx="365760" cy="182880"/>
+          </a:xfrm>
+          <a:prstGeom prst="rect">
+            <a:avLst/>
+          </a:prstGeom>
+          <a:noFill/>
+        </p:spPr>
+        <p:txBody>
+          <a:bodyPr wrap="square" lIns="76200" rIns="76200" tIns="50800" bIns="50800" anchor="t">
+            <a:spAutoFit/>
+          </a:bodyPr>
+          <a:lstStyle/>
+          <a:p>
+            <a:pPr algn="r"/>
+            <a:r>
+              <a:rPr sz="1000" b="0">
+                <a:solidFill>
+                  <a:srgbClr val="2D3E54"/>
+                </a:solidFill>
+                <a:latin typeface="Aptos"/>
+              </a:rPr>
+              <a:t>8</a:t>
+            </a:r>
+          </a:p>
+        </p:txBody>
+      </p:sp>
+    </p:spTree>
+  </p:cSld>
+  <p:clrMapOvr>
+    <a:masterClrMapping/>
+  </p:clrMapOvr>
+</p:sld>
+</file>
+
+<file path=ppt/slides/slide11.xml><?xml version="1.0" encoding="utf-8"?>
 <p:sld xmlns:a="http://schemas.openxmlformats.org/drawingml/2006/main" xmlns:p="http://schemas.openxmlformats.org/presentationml/2006/main" xmlns:r="http://schemas.openxmlformats.org/officeDocument/2006/relationships">
   <p:cSld>
     <p:bg>
@@ -3738,7 +4484,7 @@
         <p:spPr>
           <a:xfrm>
             <a:off x="640080" y="502920"/>
-            <a:ext cx="8686800" cy="685800"/>
+            <a:ext cx="8869680" cy="658368"/>
           </a:xfrm>
           <a:prstGeom prst="rect">
             <a:avLst/>
@@ -3759,7 +4505,7 @@
                 </a:solidFill>
                 <a:latin typeface="Georgia"/>
               </a:rPr>
-              <a:t>Use Case Diagram</a:t>
+              <a:t>Knowledge From the Curriculum and Next Steps</a:t>
             </a:r>
           </a:p>
         </p:txBody>
@@ -3772,8 +4518,8 @@
         </p:nvSpPr>
         <p:spPr>
           <a:xfrm>
-            <a:off x="658368" y="1097280"/>
-            <a:ext cx="8869680" cy="347472"/>
+            <a:off x="658368" y="1078992"/>
+            <a:ext cx="8869680" cy="329184"/>
           </a:xfrm>
           <a:prstGeom prst="rect">
             <a:avLst/>
@@ -3794,7 +4540,7 @@
                 </a:solidFill>
                 <a:latin typeface="Aptos"/>
               </a:rPr>
-              <a:t>User-facing actions already identified by the team</a:t>
+              <a:t>How the project draws on coursework and where it goes next</a:t>
             </a:r>
           </a:p>
         </p:txBody>
@@ -3807,8 +4553,8 @@
         </p:nvSpPr>
         <p:spPr>
           <a:xfrm>
-            <a:off x="9802368" y="566928"/>
-            <a:ext cx="1645920" cy="329184"/>
+            <a:off x="9710928" y="566928"/>
+            <a:ext cx="1783080" cy="329184"/>
           </a:xfrm>
           <a:prstGeom prst="roundRect">
             <a:avLst/>
@@ -3848,7 +4594,7 @@
                 </a:solidFill>
                 <a:latin typeface="Aptos"/>
               </a:rPr>
-              <a:t>Use Cases</a:t>
+              <a:t>Close</a:t>
             </a:r>
           </a:p>
         </p:txBody>
@@ -3861,8 +4607,723 @@
         </p:nvSpPr>
         <p:spPr>
           <a:xfrm>
-            <a:off x="594360" y="1371600"/>
-            <a:ext cx="7406640" cy="4983480"/>
+            <a:off x="658368" y="1508760"/>
+            <a:ext cx="5532120" cy="4480560"/>
+          </a:xfrm>
+          <a:prstGeom prst="roundRect">
+            <a:avLst/>
+          </a:prstGeom>
+          <a:solidFill>
+            <a:srgbClr val="E1EBF7"/>
+          </a:solidFill>
+          <a:ln>
+            <a:solidFill>
+              <a:srgbClr val="E1EBF7"/>
+            </a:solidFill>
+          </a:ln>
+        </p:spPr>
+        <p:style>
+          <a:lnRef idx="1">
+            <a:schemeClr val="accent1"/>
+          </a:lnRef>
+          <a:fillRef idx="3">
+            <a:schemeClr val="accent1"/>
+          </a:fillRef>
+          <a:effectRef idx="2">
+            <a:schemeClr val="accent1"/>
+          </a:effectRef>
+          <a:fontRef idx="minor">
+            <a:schemeClr val="lt1"/>
+          </a:fontRef>
+        </p:style>
+        <p:txBody>
+          <a:bodyPr rtlCol="0" anchor="ctr"/>
+          <a:lstStyle/>
+          <a:p>
+            <a:pPr algn="ctr"/>
+          </a:p>
+        </p:txBody>
+      </p:sp>
+      <p:sp>
+        <p:nvSpPr>
+          <p:cNvPr id="7" name="TextBox 6"/>
+          <p:cNvSpPr txBox="1"/>
+          <p:nvPr/>
+        </p:nvSpPr>
+        <p:spPr>
+          <a:xfrm>
+            <a:off x="768096" y="1600200"/>
+            <a:ext cx="5312664" cy="310896"/>
+          </a:xfrm>
+          <a:prstGeom prst="rect">
+            <a:avLst/>
+          </a:prstGeom>
+          <a:noFill/>
+        </p:spPr>
+        <p:txBody>
+          <a:bodyPr wrap="square" lIns="76200" rIns="76200" tIns="50800" bIns="50800" anchor="t">
+            <a:spAutoFit/>
+          </a:bodyPr>
+          <a:lstStyle/>
+          <a:p>
+            <a:pPr algn="l"/>
+            <a:r>
+              <a:rPr sz="1400" b="1">
+                <a:solidFill>
+                  <a:srgbClr val="11213E"/>
+                </a:solidFill>
+                <a:latin typeface="Georgia"/>
+              </a:rPr>
+              <a:t>Curriculum knowledge used</a:t>
+            </a:r>
+          </a:p>
+        </p:txBody>
+      </p:sp>
+      <p:sp>
+        <p:nvSpPr>
+          <p:cNvPr id="8" name="TextBox 7"/>
+          <p:cNvSpPr txBox="1"/>
+          <p:nvPr/>
+        </p:nvSpPr>
+        <p:spPr>
+          <a:xfrm>
+            <a:off x="731520" y="1929384"/>
+            <a:ext cx="5385816" cy="3986784"/>
+          </a:xfrm>
+          <a:prstGeom prst="rect">
+            <a:avLst/>
+          </a:prstGeom>
+          <a:noFill/>
+        </p:spPr>
+        <p:txBody>
+          <a:bodyPr wrap="square" lIns="101600" rIns="101600" tIns="50800" bIns="50800">
+            <a:spAutoFit/>
+          </a:bodyPr>
+          <a:lstStyle/>
+          <a:p>
+            <a:pPr>
+              <a:spcAft>
+                <a:spcPts val="700"/>
+              </a:spcAft>
+            </a:pPr>
+            <a:r>
+              <a:rPr sz="1150" b="0">
+                <a:solidFill>
+                  <a:srgbClr val="1F2A37"/>
+                </a:solidFill>
+                <a:latin typeface="Aptos"/>
+              </a:rPr>
+              <a:t>COMP2171 and COMP2140 - documentation and system modelling</a:t>
+            </a:r>
+          </a:p>
+          <a:p>
+            <a:pPr>
+              <a:spcAft>
+                <a:spcPts val="700"/>
+              </a:spcAft>
+            </a:pPr>
+            <a:r>
+              <a:rPr sz="1150" b="0">
+                <a:solidFill>
+                  <a:srgbClr val="1F2A37"/>
+                </a:solidFill>
+                <a:latin typeface="Aptos"/>
+              </a:rPr>
+              <a:t>COMP3161 - database design and storage</a:t>
+            </a:r>
+          </a:p>
+          <a:p>
+            <a:pPr>
+              <a:spcAft>
+                <a:spcPts val="700"/>
+              </a:spcAft>
+            </a:pPr>
+            <a:r>
+              <a:rPr sz="1150" b="0">
+                <a:solidFill>
+                  <a:srgbClr val="1F2A37"/>
+                </a:solidFill>
+                <a:latin typeface="Aptos"/>
+              </a:rPr>
+              <a:t>COMP3162 - data cleaning and possible modelling</a:t>
+            </a:r>
+          </a:p>
+          <a:p>
+            <a:pPr>
+              <a:spcAft>
+                <a:spcPts val="700"/>
+              </a:spcAft>
+            </a:pPr>
+            <a:r>
+              <a:rPr sz="1150" b="0">
+                <a:solidFill>
+                  <a:srgbClr val="1F2A37"/>
+                </a:solidFill>
+                <a:latin typeface="Aptos"/>
+              </a:rPr>
+              <a:t>INFO2180 - web development and frontend design</a:t>
+            </a:r>
+          </a:p>
+          <a:p>
+            <a:pPr>
+              <a:spcAft>
+                <a:spcPts val="700"/>
+              </a:spcAft>
+            </a:pPr>
+            <a:r>
+              <a:rPr sz="1150" b="0">
+                <a:solidFill>
+                  <a:srgbClr val="1F2A37"/>
+                </a:solidFill>
+                <a:latin typeface="Aptos"/>
+              </a:rPr>
+              <a:t>COMP3220 - intelligent matching concepts</a:t>
+            </a:r>
+          </a:p>
+          <a:p>
+            <a:pPr>
+              <a:spcAft>
+                <a:spcPts val="700"/>
+              </a:spcAft>
+            </a:pPr>
+            <a:r>
+              <a:rPr sz="1150" b="0">
+                <a:solidFill>
+                  <a:srgbClr val="1F2A37"/>
+                </a:solidFill>
+                <a:latin typeface="Aptos"/>
+              </a:rPr>
+              <a:t>COMP1127 - Python implementation knowledge</a:t>
+            </a:r>
+          </a:p>
+          <a:p>
+            <a:pPr>
+              <a:spcAft>
+                <a:spcPts val="700"/>
+              </a:spcAft>
+            </a:pPr>
+            <a:r>
+              <a:rPr sz="1150" b="0">
+                <a:solidFill>
+                  <a:srgbClr val="1F2A37"/>
+                </a:solidFill>
+                <a:latin typeface="Aptos"/>
+              </a:rPr>
+              <a:t>COMP2211 - optimization ideas</a:t>
+            </a:r>
+          </a:p>
+        </p:txBody>
+      </p:sp>
+      <p:sp>
+        <p:nvSpPr>
+          <p:cNvPr id="9" name="Rounded Rectangle 8"/>
+          <p:cNvSpPr/>
+          <p:nvPr/>
+        </p:nvSpPr>
+        <p:spPr>
+          <a:xfrm>
+            <a:off x="6419088" y="1508760"/>
+            <a:ext cx="4709160" cy="1874519"/>
+          </a:xfrm>
+          <a:prstGeom prst="roundRect">
+            <a:avLst/>
+          </a:prstGeom>
+          <a:solidFill>
+            <a:srgbClr val="F7EBC7"/>
+          </a:solidFill>
+          <a:ln>
+            <a:solidFill>
+              <a:srgbClr val="F7EBC7"/>
+            </a:solidFill>
+          </a:ln>
+        </p:spPr>
+        <p:style>
+          <a:lnRef idx="1">
+            <a:schemeClr val="accent1"/>
+          </a:lnRef>
+          <a:fillRef idx="3">
+            <a:schemeClr val="accent1"/>
+          </a:fillRef>
+          <a:effectRef idx="2">
+            <a:schemeClr val="accent1"/>
+          </a:effectRef>
+          <a:fontRef idx="minor">
+            <a:schemeClr val="lt1"/>
+          </a:fontRef>
+        </p:style>
+        <p:txBody>
+          <a:bodyPr rtlCol="0" anchor="ctr"/>
+          <a:lstStyle/>
+          <a:p>
+            <a:pPr algn="ctr"/>
+          </a:p>
+        </p:txBody>
+      </p:sp>
+      <p:sp>
+        <p:nvSpPr>
+          <p:cNvPr id="10" name="TextBox 9"/>
+          <p:cNvSpPr txBox="1"/>
+          <p:nvPr/>
+        </p:nvSpPr>
+        <p:spPr>
+          <a:xfrm>
+            <a:off x="6528816" y="1600200"/>
+            <a:ext cx="4489704" cy="310896"/>
+          </a:xfrm>
+          <a:prstGeom prst="rect">
+            <a:avLst/>
+          </a:prstGeom>
+          <a:noFill/>
+        </p:spPr>
+        <p:txBody>
+          <a:bodyPr wrap="square" lIns="76200" rIns="76200" tIns="50800" bIns="50800" anchor="t">
+            <a:spAutoFit/>
+          </a:bodyPr>
+          <a:lstStyle/>
+          <a:p>
+            <a:pPr algn="l"/>
+            <a:r>
+              <a:rPr sz="1400" b="1">
+                <a:solidFill>
+                  <a:srgbClr val="11213E"/>
+                </a:solidFill>
+                <a:latin typeface="Georgia"/>
+              </a:rPr>
+              <a:t>Immediate next steps</a:t>
+            </a:r>
+          </a:p>
+        </p:txBody>
+      </p:sp>
+      <p:sp>
+        <p:nvSpPr>
+          <p:cNvPr id="11" name="TextBox 10"/>
+          <p:cNvSpPr txBox="1"/>
+          <p:nvPr/>
+        </p:nvSpPr>
+        <p:spPr>
+          <a:xfrm>
+            <a:off x="6492240" y="1929384"/>
+            <a:ext cx="4562856" cy="1380743"/>
+          </a:xfrm>
+          <a:prstGeom prst="rect">
+            <a:avLst/>
+          </a:prstGeom>
+          <a:noFill/>
+        </p:spPr>
+        <p:txBody>
+          <a:bodyPr wrap="square" lIns="101600" rIns="101600" tIns="50800" bIns="50800">
+            <a:spAutoFit/>
+          </a:bodyPr>
+          <a:lstStyle/>
+          <a:p>
+            <a:pPr>
+              <a:spcAft>
+                <a:spcPts val="700"/>
+              </a:spcAft>
+            </a:pPr>
+            <a:r>
+              <a:rPr sz="1150" b="0">
+                <a:solidFill>
+                  <a:srgbClr val="1F2A37"/>
+                </a:solidFill>
+                <a:latin typeface="Aptos"/>
+              </a:rPr>
+              <a:t>Implement the frontend and backend workflow.</a:t>
+            </a:r>
+          </a:p>
+          <a:p>
+            <a:pPr>
+              <a:spcAft>
+                <a:spcPts val="700"/>
+              </a:spcAft>
+            </a:pPr>
+            <a:r>
+              <a:rPr sz="1150" b="0">
+                <a:solidFill>
+                  <a:srgbClr val="1F2A37"/>
+                </a:solidFill>
+                <a:latin typeface="Aptos"/>
+              </a:rPr>
+              <a:t>Build the O*NET-based matching pipeline.</a:t>
+            </a:r>
+          </a:p>
+          <a:p>
+            <a:pPr>
+              <a:spcAft>
+                <a:spcPts val="700"/>
+              </a:spcAft>
+            </a:pPr>
+            <a:r>
+              <a:rPr sz="1150" b="0">
+                <a:solidFill>
+                  <a:srgbClr val="1F2A37"/>
+                </a:solidFill>
+                <a:latin typeface="Aptos"/>
+              </a:rPr>
+              <a:t>Prepare datasets for testing and evaluation.</a:t>
+            </a:r>
+          </a:p>
+        </p:txBody>
+      </p:sp>
+      <p:sp>
+        <p:nvSpPr>
+          <p:cNvPr id="12" name="Rounded Rectangle 11"/>
+          <p:cNvSpPr/>
+          <p:nvPr/>
+        </p:nvSpPr>
+        <p:spPr>
+          <a:xfrm>
+            <a:off x="6419088" y="3675887"/>
+            <a:ext cx="4709160" cy="1691640"/>
+          </a:xfrm>
+          <a:prstGeom prst="roundRect">
+            <a:avLst/>
+          </a:prstGeom>
+          <a:solidFill>
+            <a:srgbClr val="F6E1DC"/>
+          </a:solidFill>
+          <a:ln>
+            <a:solidFill>
+              <a:srgbClr val="F6E1DC"/>
+            </a:solidFill>
+          </a:ln>
+        </p:spPr>
+        <p:style>
+          <a:lnRef idx="1">
+            <a:schemeClr val="accent1"/>
+          </a:lnRef>
+          <a:fillRef idx="3">
+            <a:schemeClr val="accent1"/>
+          </a:fillRef>
+          <a:effectRef idx="2">
+            <a:schemeClr val="accent1"/>
+          </a:effectRef>
+          <a:fontRef idx="minor">
+            <a:schemeClr val="lt1"/>
+          </a:fontRef>
+        </p:style>
+        <p:txBody>
+          <a:bodyPr rtlCol="0" anchor="ctr"/>
+          <a:lstStyle/>
+          <a:p>
+            <a:pPr algn="ctr"/>
+          </a:p>
+        </p:txBody>
+      </p:sp>
+      <p:sp>
+        <p:nvSpPr>
+          <p:cNvPr id="13" name="TextBox 12"/>
+          <p:cNvSpPr txBox="1"/>
+          <p:nvPr/>
+        </p:nvSpPr>
+        <p:spPr>
+          <a:xfrm>
+            <a:off x="6528816" y="3767327"/>
+            <a:ext cx="4489704" cy="310896"/>
+          </a:xfrm>
+          <a:prstGeom prst="rect">
+            <a:avLst/>
+          </a:prstGeom>
+          <a:noFill/>
+        </p:spPr>
+        <p:txBody>
+          <a:bodyPr wrap="square" lIns="76200" rIns="76200" tIns="50800" bIns="50800" anchor="t">
+            <a:spAutoFit/>
+          </a:bodyPr>
+          <a:lstStyle/>
+          <a:p>
+            <a:pPr algn="l"/>
+            <a:r>
+              <a:rPr sz="1400" b="1">
+                <a:solidFill>
+                  <a:srgbClr val="11213E"/>
+                </a:solidFill>
+                <a:latin typeface="Georgia"/>
+              </a:rPr>
+              <a:t>Midsemester takeaway</a:t>
+            </a:r>
+          </a:p>
+        </p:txBody>
+      </p:sp>
+      <p:sp>
+        <p:nvSpPr>
+          <p:cNvPr id="14" name="TextBox 13"/>
+          <p:cNvSpPr txBox="1"/>
+          <p:nvPr/>
+        </p:nvSpPr>
+        <p:spPr>
+          <a:xfrm>
+            <a:off x="6492240" y="4096511"/>
+            <a:ext cx="4562856" cy="1197864"/>
+          </a:xfrm>
+          <a:prstGeom prst="rect">
+            <a:avLst/>
+          </a:prstGeom>
+          <a:noFill/>
+        </p:spPr>
+        <p:txBody>
+          <a:bodyPr wrap="square" lIns="101600" rIns="101600" tIns="50800" bIns="50800">
+            <a:spAutoFit/>
+          </a:bodyPr>
+          <a:lstStyle/>
+          <a:p>
+            <a:pPr>
+              <a:spcAft>
+                <a:spcPts val="700"/>
+              </a:spcAft>
+            </a:pPr>
+            <a:r>
+              <a:rPr sz="1150" b="0">
+                <a:solidFill>
+                  <a:srgbClr val="1F2A37"/>
+                </a:solidFill>
+                <a:latin typeface="Aptos"/>
+              </a:rPr>
+              <a:t>The project is clearly scoped, technically non-trivial, and organized around a realistic implementation plan.</a:t>
+            </a:r>
+          </a:p>
+        </p:txBody>
+      </p:sp>
+      <p:sp>
+        <p:nvSpPr>
+          <p:cNvPr id="15" name="TextBox 14"/>
+          <p:cNvSpPr txBox="1"/>
+          <p:nvPr/>
+        </p:nvSpPr>
+        <p:spPr>
+          <a:xfrm>
+            <a:off x="11448288" y="6400800"/>
+            <a:ext cx="365760" cy="182880"/>
+          </a:xfrm>
+          <a:prstGeom prst="rect">
+            <a:avLst/>
+          </a:prstGeom>
+          <a:noFill/>
+        </p:spPr>
+        <p:txBody>
+          <a:bodyPr wrap="square" lIns="76200" rIns="76200" tIns="50800" bIns="50800" anchor="t">
+            <a:spAutoFit/>
+          </a:bodyPr>
+          <a:lstStyle/>
+          <a:p>
+            <a:pPr algn="r"/>
+            <a:r>
+              <a:rPr sz="1000" b="0">
+                <a:solidFill>
+                  <a:srgbClr val="2D3E54"/>
+                </a:solidFill>
+                <a:latin typeface="Aptos"/>
+              </a:rPr>
+              <a:t>12</a:t>
+            </a:r>
+          </a:p>
+        </p:txBody>
+      </p:sp>
+    </p:spTree>
+  </p:cSld>
+  <p:clrMapOvr>
+    <a:masterClrMapping/>
+  </p:clrMapOvr>
+</p:sld>
+</file>
+
+<file path=ppt/slides/slide12.xml><?xml version="1.0" encoding="utf-8"?>
+<p:sld xmlns:a="http://schemas.openxmlformats.org/drawingml/2006/main" xmlns:p="http://schemas.openxmlformats.org/presentationml/2006/main" xmlns:r="http://schemas.openxmlformats.org/officeDocument/2006/relationships">
+  <p:cSld>
+    <p:bg>
+      <p:bgPr>
+        <a:solidFill>
+          <a:srgbClr val="FFFFFF"/>
+        </a:solidFill>
+        <a:effectLst/>
+      </p:bgPr>
+    </p:bg>
+    <p:spTree>
+      <p:nvGrpSpPr>
+        <p:cNvPr id="1" name=""/>
+        <p:cNvGrpSpPr/>
+        <p:nvPr/>
+      </p:nvGrpSpPr>
+      <p:grpSpPr/>
+      <p:sp>
+        <p:nvSpPr>
+          <p:cNvPr id="2" name="Rectangle 1"/>
+          <p:cNvSpPr/>
+          <p:nvPr/>
+        </p:nvSpPr>
+        <p:spPr>
+          <a:xfrm>
+            <a:off x="0" y="0"/>
+            <a:ext cx="12191695" cy="310896"/>
+          </a:xfrm>
+          <a:prstGeom prst="rect">
+            <a:avLst/>
+          </a:prstGeom>
+          <a:solidFill>
+            <a:srgbClr val="E0B44A"/>
+          </a:solidFill>
+          <a:ln>
+            <a:solidFill>
+              <a:srgbClr val="E0B44A"/>
+            </a:solidFill>
+          </a:ln>
+        </p:spPr>
+        <p:style>
+          <a:lnRef idx="1">
+            <a:schemeClr val="accent1"/>
+          </a:lnRef>
+          <a:fillRef idx="3">
+            <a:schemeClr val="accent1"/>
+          </a:fillRef>
+          <a:effectRef idx="2">
+            <a:schemeClr val="accent1"/>
+          </a:effectRef>
+          <a:fontRef idx="minor">
+            <a:schemeClr val="lt1"/>
+          </a:fontRef>
+        </p:style>
+        <p:txBody>
+          <a:bodyPr rtlCol="0" anchor="ctr"/>
+          <a:lstStyle/>
+          <a:p>
+            <a:pPr algn="ctr"/>
+          </a:p>
+        </p:txBody>
+      </p:sp>
+      <p:sp>
+        <p:nvSpPr>
+          <p:cNvPr id="3" name="TextBox 2"/>
+          <p:cNvSpPr txBox="1"/>
+          <p:nvPr/>
+        </p:nvSpPr>
+        <p:spPr>
+          <a:xfrm>
+            <a:off x="640080" y="502920"/>
+            <a:ext cx="8869680" cy="658368"/>
+          </a:xfrm>
+          <a:prstGeom prst="rect">
+            <a:avLst/>
+          </a:prstGeom>
+          <a:noFill/>
+        </p:spPr>
+        <p:txBody>
+          <a:bodyPr wrap="square" lIns="76200" rIns="76200" tIns="50800" bIns="50800" anchor="t">
+            <a:spAutoFit/>
+          </a:bodyPr>
+          <a:lstStyle/>
+          <a:p>
+            <a:pPr algn="l"/>
+            <a:r>
+              <a:rPr sz="2500" b="1">
+                <a:solidFill>
+                  <a:srgbClr val="11213E"/>
+                </a:solidFill>
+                <a:latin typeface="Georgia"/>
+              </a:rPr>
+              <a:t>Database Design Overview</a:t>
+            </a:r>
+          </a:p>
+        </p:txBody>
+      </p:sp>
+      <p:sp>
+        <p:nvSpPr>
+          <p:cNvPr id="4" name="TextBox 3"/>
+          <p:cNvSpPr txBox="1"/>
+          <p:nvPr/>
+        </p:nvSpPr>
+        <p:spPr>
+          <a:xfrm>
+            <a:off x="658368" y="1078992"/>
+            <a:ext cx="8869680" cy="329184"/>
+          </a:xfrm>
+          <a:prstGeom prst="rect">
+            <a:avLst/>
+          </a:prstGeom>
+          <a:noFill/>
+        </p:spPr>
+        <p:txBody>
+          <a:bodyPr wrap="square" lIns="76200" rIns="76200" tIns="50800" bIns="50800" anchor="t">
+            <a:spAutoFit/>
+          </a:bodyPr>
+          <a:lstStyle/>
+          <a:p>
+            <a:pPr algn="l"/>
+            <a:r>
+              <a:rPr sz="1100" b="1">
+                <a:solidFill>
+                  <a:srgbClr val="368A7F"/>
+                </a:solidFill>
+                <a:latin typeface="Aptos"/>
+              </a:rPr>
+              <a:t>Progress artefact for the proposed persistence layer</a:t>
+            </a:r>
+          </a:p>
+        </p:txBody>
+      </p:sp>
+      <p:sp>
+        <p:nvSpPr>
+          <p:cNvPr id="5" name="Rounded Rectangle 4"/>
+          <p:cNvSpPr/>
+          <p:nvPr/>
+        </p:nvSpPr>
+        <p:spPr>
+          <a:xfrm>
+            <a:off x="9710928" y="566928"/>
+            <a:ext cx="1783080" cy="329184"/>
+          </a:xfrm>
+          <a:prstGeom prst="roundRect">
+            <a:avLst/>
+          </a:prstGeom>
+          <a:solidFill>
+            <a:srgbClr val="368A7F"/>
+          </a:solidFill>
+          <a:ln>
+            <a:solidFill>
+              <a:srgbClr val="368A7F"/>
+            </a:solidFill>
+          </a:ln>
+        </p:spPr>
+        <p:style>
+          <a:lnRef idx="1">
+            <a:schemeClr val="accent1"/>
+          </a:lnRef>
+          <a:fillRef idx="3">
+            <a:schemeClr val="accent1"/>
+          </a:fillRef>
+          <a:effectRef idx="2">
+            <a:schemeClr val="accent1"/>
+          </a:effectRef>
+          <a:fontRef idx="minor">
+            <a:schemeClr val="lt1"/>
+          </a:fontRef>
+        </p:style>
+        <p:txBody>
+          <a:bodyPr rtlCol="0" anchor="ctr"/>
+          <a:lstStyle/>
+          <a:p>
+            <a:pPr algn="ctr"/>
+            <a:r>
+              <a:rPr sz="1100" b="1">
+                <a:solidFill>
+                  <a:srgbClr val="FFFFFF"/>
+                </a:solidFill>
+                <a:latin typeface="Aptos"/>
+              </a:rPr>
+              <a:t>Progress</a:t>
+            </a:r>
+          </a:p>
+        </p:txBody>
+      </p:sp>
+      <p:sp>
+        <p:nvSpPr>
+          <p:cNvPr id="6" name="Rounded Rectangle 5"/>
+          <p:cNvSpPr/>
+          <p:nvPr/>
+        </p:nvSpPr>
+        <p:spPr>
+          <a:xfrm>
+            <a:off x="566928" y="1417320"/>
+            <a:ext cx="7909560" cy="4800600"/>
           </a:xfrm>
           <a:prstGeom prst="roundRect">
             <a:avLst/>
@@ -3900,7 +5361,7 @@
       </p:sp>
       <p:pic>
         <p:nvPicPr>
-          <p:cNvPr id="7" name="Picture 6" descr="UseCaseDiagram7.png"/>
+          <p:cNvPr id="7" name="Picture 6" descr="ERD for schema.png"/>
           <p:cNvPicPr>
             <a:picLocks noChangeAspect="1"/>
           </p:cNvPicPr>
@@ -3914,8 +5375,8 @@
         </p:blipFill>
         <p:spPr>
           <a:xfrm>
-            <a:off x="749808" y="2009269"/>
-            <a:ext cx="7086600" cy="3616701"/>
+            <a:off x="908626" y="1627632"/>
+            <a:ext cx="7235306" cy="4343400"/>
           </a:xfrm>
           <a:prstGeom prst="rect">
             <a:avLst/>
@@ -3930,18 +5391,18 @@
         </p:nvSpPr>
         <p:spPr>
           <a:xfrm>
-            <a:off x="8229600" y="1691640"/>
-            <a:ext cx="3154680" cy="3566160"/>
+            <a:off x="8732520" y="1572768"/>
+            <a:ext cx="2697480" cy="3246120"/>
           </a:xfrm>
           <a:prstGeom prst="roundRect">
             <a:avLst/>
           </a:prstGeom>
           <a:solidFill>
-            <a:srgbClr val="F7EBC7"/>
+            <a:srgbClr val="E4F2EC"/>
           </a:solidFill>
           <a:ln>
             <a:solidFill>
-              <a:srgbClr val="F7EBC7"/>
+              <a:srgbClr val="E4F2EC"/>
             </a:solidFill>
           </a:ln>
         </p:spPr>
@@ -3975,8 +5436,8 @@
         </p:nvSpPr>
         <p:spPr>
           <a:xfrm>
-            <a:off x="8339328" y="1783080"/>
-            <a:ext cx="2935224" cy="310896"/>
+            <a:off x="8842248" y="1664208"/>
+            <a:ext cx="2478024" cy="310896"/>
           </a:xfrm>
           <a:prstGeom prst="rect">
             <a:avLst/>
@@ -3997,7 +5458,7 @@
                 </a:solidFill>
                 <a:latin typeface="Georgia"/>
               </a:rPr>
-              <a:t>Key interactions shown</a:t>
+              <a:t>Schema highlights</a:t>
             </a:r>
           </a:p>
         </p:txBody>
@@ -4010,8 +5471,8 @@
         </p:nvSpPr>
         <p:spPr>
           <a:xfrm>
-            <a:off x="8302752" y="2112264"/>
-            <a:ext cx="3008376" cy="3072384"/>
+            <a:off x="8805672" y="1993392"/>
+            <a:ext cx="2551176" cy="2752344"/>
           </a:xfrm>
           <a:prstGeom prst="rect">
             <a:avLst/>
@@ -4036,7 +5497,7 @@
                 </a:solidFill>
                 <a:latin typeface="Aptos"/>
               </a:rPr>
-              <a:t>Upload a resume or CV.</a:t>
+              <a:t>Supports candidate and employer data in the web application.</a:t>
             </a:r>
           </a:p>
           <a:p>
@@ -4052,7 +5513,7 @@
                 </a:solidFill>
                 <a:latin typeface="Aptos"/>
               </a:rPr>
-              <a:t>Upload a job description.</a:t>
+              <a:t>Stores job posts, resumes, and competencies as core entities.</a:t>
             </a:r>
           </a:p>
           <a:p>
@@ -4068,7 +5529,7 @@
                 </a:solidFill>
                 <a:latin typeface="Aptos"/>
               </a:rPr>
-              <a:t>View job lists and candidate lists.</a:t>
+              <a:t>Uses linking tables for many-to-many competency relationships.</a:t>
             </a:r>
           </a:p>
           <a:p>
@@ -4084,39 +5545,7 @@
                 </a:solidFill>
                 <a:latin typeface="Aptos"/>
               </a:rPr>
-              <a:t>Check process status.</a:t>
-            </a:r>
-          </a:p>
-          <a:p>
-            <a:pPr>
-              <a:spcAft>
-                <a:spcPts val="700"/>
-              </a:spcAft>
-            </a:pPr>
-            <a:r>
-              <a:rPr sz="1150" b="0">
-                <a:solidFill>
-                  <a:srgbClr val="1F2A37"/>
-                </a:solidFill>
-                <a:latin typeface="Aptos"/>
-              </a:rPr>
-              <a:t>View explanations and missing competencies.</a:t>
-            </a:r>
-          </a:p>
-          <a:p>
-            <a:pPr>
-              <a:spcAft>
-                <a:spcPts val="700"/>
-              </a:spcAft>
-            </a:pPr>
-            <a:r>
-              <a:rPr sz="1150" b="0">
-                <a:solidFill>
-                  <a:srgbClr val="1F2A37"/>
-                </a:solidFill>
-                <a:latin typeface="Aptos"/>
-              </a:rPr>
-              <a:t>Inspect competency profiles as part of transparency.</a:t>
+              <a:t>Stores match outcomes, qualification status, and match scores.</a:t>
             </a:r>
           </a:p>
         </p:txBody>
@@ -4129,8 +5558,8 @@
         </p:nvSpPr>
         <p:spPr>
           <a:xfrm>
-            <a:off x="8211312" y="5504688"/>
-            <a:ext cx="3154680" cy="457200"/>
+            <a:off x="804672" y="5998464"/>
+            <a:ext cx="7452360" cy="228600"/>
           </a:xfrm>
           <a:prstGeom prst="rect">
             <a:avLst/>
@@ -4147,11 +5576,11 @@
             <a:r>
               <a:rPr sz="1150" b="0">
                 <a:solidFill>
-                  <a:srgbClr val="11213E"/>
-                </a:solidFill>
-                <a:latin typeface="Aptos"/>
-              </a:rPr>
-              <a:t>These use cases support the functional requirements already drafted in the midsemester document.</a:t>
+                  <a:srgbClr val="2D3E54"/>
+                </a:solidFill>
+                <a:latin typeface="Aptos"/>
+              </a:rPr>
+              <a:t>Caption: This artefact defines the proposed database structure needed to support resumes, job postings, competencies, and match results.</a:t>
             </a:r>
           </a:p>
         </p:txBody>
@@ -4186,7 +5615,7 @@
                 </a:solidFill>
                 <a:latin typeface="Aptos"/>
               </a:rPr>
-              <a:t>10</a:t>
+              <a:t>11</a:t>
             </a:r>
           </a:p>
         </p:txBody>
@@ -4200,6 +5629,609 @@
 </file>
 
 <file path=ppt/slides/slide2.xml><?xml version="1.0" encoding="utf-8"?>
+<p:sld xmlns:a="http://schemas.openxmlformats.org/drawingml/2006/main" xmlns:p="http://schemas.openxmlformats.org/presentationml/2006/main" xmlns:r="http://schemas.openxmlformats.org/officeDocument/2006/relationships">
+  <p:cSld>
+    <p:bg>
+      <p:bgPr>
+        <a:solidFill>
+          <a:srgbClr val="FFFFFF"/>
+        </a:solidFill>
+        <a:effectLst/>
+      </p:bgPr>
+    </p:bg>
+    <p:spTree>
+      <p:nvGrpSpPr>
+        <p:cNvPr id="1" name=""/>
+        <p:cNvGrpSpPr/>
+        <p:nvPr/>
+      </p:nvGrpSpPr>
+      <p:grpSpPr/>
+      <p:sp>
+        <p:nvSpPr>
+          <p:cNvPr id="2" name="Rectangle 1"/>
+          <p:cNvSpPr/>
+          <p:nvPr/>
+        </p:nvSpPr>
+        <p:spPr>
+          <a:xfrm>
+            <a:off x="0" y="0"/>
+            <a:ext cx="12191695" cy="310896"/>
+          </a:xfrm>
+          <a:prstGeom prst="rect">
+            <a:avLst/>
+          </a:prstGeom>
+          <a:solidFill>
+            <a:srgbClr val="E0B44A"/>
+          </a:solidFill>
+          <a:ln>
+            <a:solidFill>
+              <a:srgbClr val="E0B44A"/>
+            </a:solidFill>
+          </a:ln>
+        </p:spPr>
+        <p:style>
+          <a:lnRef idx="1">
+            <a:schemeClr val="accent1"/>
+          </a:lnRef>
+          <a:fillRef idx="3">
+            <a:schemeClr val="accent1"/>
+          </a:fillRef>
+          <a:effectRef idx="2">
+            <a:schemeClr val="accent1"/>
+          </a:effectRef>
+          <a:fontRef idx="minor">
+            <a:schemeClr val="lt1"/>
+          </a:fontRef>
+        </p:style>
+        <p:txBody>
+          <a:bodyPr rtlCol="0" anchor="ctr"/>
+          <a:lstStyle/>
+          <a:p>
+            <a:pPr algn="ctr"/>
+          </a:p>
+        </p:txBody>
+      </p:sp>
+      <p:sp>
+        <p:nvSpPr>
+          <p:cNvPr id="3" name="TextBox 2"/>
+          <p:cNvSpPr txBox="1"/>
+          <p:nvPr/>
+        </p:nvSpPr>
+        <p:spPr>
+          <a:xfrm>
+            <a:off x="640080" y="502920"/>
+            <a:ext cx="8869680" cy="658368"/>
+          </a:xfrm>
+          <a:prstGeom prst="rect">
+            <a:avLst/>
+          </a:prstGeom>
+          <a:noFill/>
+        </p:spPr>
+        <p:txBody>
+          <a:bodyPr wrap="square" lIns="76200" rIns="76200" tIns="50800" bIns="50800" anchor="t">
+            <a:spAutoFit/>
+          </a:bodyPr>
+          <a:lstStyle/>
+          <a:p>
+            <a:pPr algn="l"/>
+            <a:r>
+              <a:rPr sz="2500" b="1">
+                <a:solidFill>
+                  <a:srgbClr val="11213E"/>
+                </a:solidFill>
+                <a:latin typeface="Georgia"/>
+              </a:rPr>
+              <a:t>Problem Background and Context</a:t>
+            </a:r>
+          </a:p>
+        </p:txBody>
+      </p:sp>
+      <p:sp>
+        <p:nvSpPr>
+          <p:cNvPr id="4" name="TextBox 3"/>
+          <p:cNvSpPr txBox="1"/>
+          <p:nvPr/>
+        </p:nvSpPr>
+        <p:spPr>
+          <a:xfrm>
+            <a:off x="658368" y="1078992"/>
+            <a:ext cx="8869680" cy="329184"/>
+          </a:xfrm>
+          <a:prstGeom prst="rect">
+            <a:avLst/>
+          </a:prstGeom>
+          <a:noFill/>
+        </p:spPr>
+        <p:txBody>
+          <a:bodyPr wrap="square" lIns="76200" rIns="76200" tIns="50800" bIns="50800" anchor="t">
+            <a:spAutoFit/>
+          </a:bodyPr>
+          <a:lstStyle/>
+          <a:p>
+            <a:pPr algn="l"/>
+            <a:r>
+              <a:rPr sz="1100" b="1">
+                <a:solidFill>
+                  <a:srgbClr val="368A7F"/>
+                </a:solidFill>
+                <a:latin typeface="Aptos"/>
+              </a:rPr>
+              <a:t>Why this problem is worth solving</a:t>
+            </a:r>
+          </a:p>
+        </p:txBody>
+      </p:sp>
+      <p:sp>
+        <p:nvSpPr>
+          <p:cNvPr id="5" name="Rounded Rectangle 4"/>
+          <p:cNvSpPr/>
+          <p:nvPr/>
+        </p:nvSpPr>
+        <p:spPr>
+          <a:xfrm>
+            <a:off x="9710928" y="566928"/>
+            <a:ext cx="1783080" cy="329184"/>
+          </a:xfrm>
+          <a:prstGeom prst="roundRect">
+            <a:avLst/>
+          </a:prstGeom>
+          <a:solidFill>
+            <a:srgbClr val="368A7F"/>
+          </a:solidFill>
+          <a:ln>
+            <a:solidFill>
+              <a:srgbClr val="368A7F"/>
+            </a:solidFill>
+          </a:ln>
+        </p:spPr>
+        <p:style>
+          <a:lnRef idx="1">
+            <a:schemeClr val="accent1"/>
+          </a:lnRef>
+          <a:fillRef idx="3">
+            <a:schemeClr val="accent1"/>
+          </a:fillRef>
+          <a:effectRef idx="2">
+            <a:schemeClr val="accent1"/>
+          </a:effectRef>
+          <a:fontRef idx="minor">
+            <a:schemeClr val="lt1"/>
+          </a:fontRef>
+        </p:style>
+        <p:txBody>
+          <a:bodyPr rtlCol="0" anchor="ctr"/>
+          <a:lstStyle/>
+          <a:p>
+            <a:pPr algn="ctr"/>
+            <a:r>
+              <a:rPr sz="1100" b="1">
+                <a:solidFill>
+                  <a:srgbClr val="FFFFFF"/>
+                </a:solidFill>
+                <a:latin typeface="Aptos"/>
+              </a:rPr>
+              <a:t>Context</a:t>
+            </a:r>
+          </a:p>
+        </p:txBody>
+      </p:sp>
+      <p:sp>
+        <p:nvSpPr>
+          <p:cNvPr id="6" name="TextBox 5"/>
+          <p:cNvSpPr txBox="1"/>
+          <p:nvPr/>
+        </p:nvSpPr>
+        <p:spPr>
+          <a:xfrm>
+            <a:off x="658368" y="1417320"/>
+            <a:ext cx="5760720" cy="4480560"/>
+          </a:xfrm>
+          <a:prstGeom prst="rect">
+            <a:avLst/>
+          </a:prstGeom>
+          <a:noFill/>
+        </p:spPr>
+        <p:txBody>
+          <a:bodyPr wrap="square" lIns="101600" rIns="101600" tIns="50800" bIns="50800">
+            <a:spAutoFit/>
+          </a:bodyPr>
+          <a:lstStyle/>
+          <a:p>
+            <a:pPr>
+              <a:spcAft>
+                <a:spcPts val="700"/>
+              </a:spcAft>
+            </a:pPr>
+            <a:r>
+              <a:rPr sz="1700" b="0">
+                <a:solidFill>
+                  <a:srgbClr val="1F2A37"/>
+                </a:solidFill>
+                <a:latin typeface="Aptos"/>
+              </a:rPr>
+              <a:t>Modern recruitment is inefficient for both employers and applicants.</a:t>
+            </a:r>
+          </a:p>
+          <a:p>
+            <a:pPr>
+              <a:spcAft>
+                <a:spcPts val="700"/>
+              </a:spcAft>
+            </a:pPr>
+            <a:r>
+              <a:rPr sz="1700" b="0">
+                <a:solidFill>
+                  <a:srgbClr val="1F2A37"/>
+                </a:solidFill>
+                <a:latin typeface="Aptos"/>
+              </a:rPr>
+              <a:t>Job descriptions and resumes are messy, unstructured documents.</a:t>
+            </a:r>
+          </a:p>
+          <a:p>
+            <a:pPr>
+              <a:spcAft>
+                <a:spcPts val="700"/>
+              </a:spcAft>
+            </a:pPr>
+            <a:r>
+              <a:rPr sz="1700" b="0">
+                <a:solidFill>
+                  <a:srgbClr val="1F2A37"/>
+                </a:solidFill>
+                <a:latin typeface="Aptos"/>
+              </a:rPr>
+              <a:t>Employers need a faster first-pass filter for candidate suitability.</a:t>
+            </a:r>
+          </a:p>
+          <a:p>
+            <a:pPr>
+              <a:spcAft>
+                <a:spcPts val="700"/>
+              </a:spcAft>
+            </a:pPr>
+            <a:r>
+              <a:rPr sz="1700" b="0">
+                <a:solidFill>
+                  <a:srgbClr val="1F2A37"/>
+                </a:solidFill>
+                <a:latin typeface="Aptos"/>
+              </a:rPr>
+              <a:t>Applicants benefit from clearer, more transparent matching outcomes.</a:t>
+            </a:r>
+          </a:p>
+          <a:p>
+            <a:pPr>
+              <a:spcAft>
+                <a:spcPts val="700"/>
+              </a:spcAft>
+            </a:pPr>
+            <a:r>
+              <a:rPr sz="1700" b="0">
+                <a:solidFill>
+                  <a:srgbClr val="1F2A37"/>
+                </a:solidFill>
+                <a:latin typeface="Aptos"/>
+              </a:rPr>
+              <a:t>The project focuses on computing-related roles to keep scope realistic.</a:t>
+            </a:r>
+          </a:p>
+        </p:txBody>
+      </p:sp>
+      <p:sp>
+        <p:nvSpPr>
+          <p:cNvPr id="7" name="Rounded Rectangle 6"/>
+          <p:cNvSpPr/>
+          <p:nvPr/>
+        </p:nvSpPr>
+        <p:spPr>
+          <a:xfrm>
+            <a:off x="6720840" y="1645920"/>
+            <a:ext cx="4663440" cy="1280160"/>
+          </a:xfrm>
+          <a:prstGeom prst="roundRect">
+            <a:avLst/>
+          </a:prstGeom>
+          <a:solidFill>
+            <a:srgbClr val="F7EBC7"/>
+          </a:solidFill>
+          <a:ln>
+            <a:solidFill>
+              <a:srgbClr val="F7EBC7"/>
+            </a:solidFill>
+          </a:ln>
+        </p:spPr>
+        <p:style>
+          <a:lnRef idx="1">
+            <a:schemeClr val="accent1"/>
+          </a:lnRef>
+          <a:fillRef idx="3">
+            <a:schemeClr val="accent1"/>
+          </a:fillRef>
+          <a:effectRef idx="2">
+            <a:schemeClr val="accent1"/>
+          </a:effectRef>
+          <a:fontRef idx="minor">
+            <a:schemeClr val="lt1"/>
+          </a:fontRef>
+        </p:style>
+        <p:txBody>
+          <a:bodyPr rtlCol="0" anchor="ctr"/>
+          <a:lstStyle/>
+          <a:p>
+            <a:pPr algn="ctr"/>
+          </a:p>
+        </p:txBody>
+      </p:sp>
+      <p:sp>
+        <p:nvSpPr>
+          <p:cNvPr id="8" name="TextBox 7"/>
+          <p:cNvSpPr txBox="1"/>
+          <p:nvPr/>
+        </p:nvSpPr>
+        <p:spPr>
+          <a:xfrm>
+            <a:off x="6830568" y="1737360"/>
+            <a:ext cx="4443984" cy="310896"/>
+          </a:xfrm>
+          <a:prstGeom prst="rect">
+            <a:avLst/>
+          </a:prstGeom>
+          <a:noFill/>
+        </p:spPr>
+        <p:txBody>
+          <a:bodyPr wrap="square" lIns="76200" rIns="76200" tIns="50800" bIns="50800" anchor="t">
+            <a:spAutoFit/>
+          </a:bodyPr>
+          <a:lstStyle/>
+          <a:p>
+            <a:pPr algn="l"/>
+            <a:r>
+              <a:rPr sz="1400" b="1">
+                <a:solidFill>
+                  <a:srgbClr val="11213E"/>
+                </a:solidFill>
+                <a:latin typeface="Georgia"/>
+              </a:rPr>
+              <a:t>Problem framing</a:t>
+            </a:r>
+          </a:p>
+        </p:txBody>
+      </p:sp>
+      <p:sp>
+        <p:nvSpPr>
+          <p:cNvPr id="9" name="TextBox 8"/>
+          <p:cNvSpPr txBox="1"/>
+          <p:nvPr/>
+        </p:nvSpPr>
+        <p:spPr>
+          <a:xfrm>
+            <a:off x="6793992" y="2066544"/>
+            <a:ext cx="4517136" cy="786384"/>
+          </a:xfrm>
+          <a:prstGeom prst="rect">
+            <a:avLst/>
+          </a:prstGeom>
+          <a:noFill/>
+        </p:spPr>
+        <p:txBody>
+          <a:bodyPr wrap="square" lIns="101600" rIns="101600" tIns="50800" bIns="50800">
+            <a:spAutoFit/>
+          </a:bodyPr>
+          <a:lstStyle/>
+          <a:p>
+            <a:pPr>
+              <a:spcAft>
+                <a:spcPts val="700"/>
+              </a:spcAft>
+            </a:pPr>
+            <a:r>
+              <a:rPr sz="1150" b="0">
+                <a:solidFill>
+                  <a:srgbClr val="1F2A37"/>
+                </a:solidFill>
+                <a:latin typeface="Aptos"/>
+              </a:rPr>
+              <a:t>We are formalising comparison between job requirements and candidate competencies.</a:t>
+            </a:r>
+          </a:p>
+          <a:p>
+            <a:pPr>
+              <a:spcAft>
+                <a:spcPts val="700"/>
+              </a:spcAft>
+            </a:pPr>
+            <a:r>
+              <a:rPr sz="1150" b="0">
+                <a:solidFill>
+                  <a:srgbClr val="1F2A37"/>
+                </a:solidFill>
+                <a:latin typeface="Aptos"/>
+              </a:rPr>
+              <a:t>The system acts as an initial matching and recommendation stage.</a:t>
+            </a:r>
+          </a:p>
+        </p:txBody>
+      </p:sp>
+      <p:sp>
+        <p:nvSpPr>
+          <p:cNvPr id="10" name="Rounded Rectangle 9"/>
+          <p:cNvSpPr/>
+          <p:nvPr/>
+        </p:nvSpPr>
+        <p:spPr>
+          <a:xfrm>
+            <a:off x="6720840" y="3246120"/>
+            <a:ext cx="4663440" cy="1417320"/>
+          </a:xfrm>
+          <a:prstGeom prst="roundRect">
+            <a:avLst/>
+          </a:prstGeom>
+          <a:solidFill>
+            <a:srgbClr val="F6E1DC"/>
+          </a:solidFill>
+          <a:ln>
+            <a:solidFill>
+              <a:srgbClr val="F6E1DC"/>
+            </a:solidFill>
+          </a:ln>
+        </p:spPr>
+        <p:style>
+          <a:lnRef idx="1">
+            <a:schemeClr val="accent1"/>
+          </a:lnRef>
+          <a:fillRef idx="3">
+            <a:schemeClr val="accent1"/>
+          </a:fillRef>
+          <a:effectRef idx="2">
+            <a:schemeClr val="accent1"/>
+          </a:effectRef>
+          <a:fontRef idx="minor">
+            <a:schemeClr val="lt1"/>
+          </a:fontRef>
+        </p:style>
+        <p:txBody>
+          <a:bodyPr rtlCol="0" anchor="ctr"/>
+          <a:lstStyle/>
+          <a:p>
+            <a:pPr algn="ctr"/>
+          </a:p>
+        </p:txBody>
+      </p:sp>
+      <p:sp>
+        <p:nvSpPr>
+          <p:cNvPr id="11" name="TextBox 10"/>
+          <p:cNvSpPr txBox="1"/>
+          <p:nvPr/>
+        </p:nvSpPr>
+        <p:spPr>
+          <a:xfrm>
+            <a:off x="6830568" y="3337560"/>
+            <a:ext cx="4443984" cy="310896"/>
+          </a:xfrm>
+          <a:prstGeom prst="rect">
+            <a:avLst/>
+          </a:prstGeom>
+          <a:noFill/>
+        </p:spPr>
+        <p:txBody>
+          <a:bodyPr wrap="square" lIns="76200" rIns="76200" tIns="50800" bIns="50800" anchor="t">
+            <a:spAutoFit/>
+          </a:bodyPr>
+          <a:lstStyle/>
+          <a:p>
+            <a:pPr algn="l"/>
+            <a:r>
+              <a:rPr sz="1400" b="1">
+                <a:solidFill>
+                  <a:srgbClr val="11213E"/>
+                </a:solidFill>
+                <a:latin typeface="Georgia"/>
+              </a:rPr>
+              <a:t>Not the goal</a:t>
+            </a:r>
+          </a:p>
+        </p:txBody>
+      </p:sp>
+      <p:sp>
+        <p:nvSpPr>
+          <p:cNvPr id="12" name="TextBox 11"/>
+          <p:cNvSpPr txBox="1"/>
+          <p:nvPr/>
+        </p:nvSpPr>
+        <p:spPr>
+          <a:xfrm>
+            <a:off x="6793992" y="3666744"/>
+            <a:ext cx="4517136" cy="923544"/>
+          </a:xfrm>
+          <a:prstGeom prst="rect">
+            <a:avLst/>
+          </a:prstGeom>
+          <a:noFill/>
+        </p:spPr>
+        <p:txBody>
+          <a:bodyPr wrap="square" lIns="101600" rIns="101600" tIns="50800" bIns="50800">
+            <a:spAutoFit/>
+          </a:bodyPr>
+          <a:lstStyle/>
+          <a:p>
+            <a:pPr>
+              <a:spcAft>
+                <a:spcPts val="700"/>
+              </a:spcAft>
+            </a:pPr>
+            <a:r>
+              <a:rPr sz="1150" b="0">
+                <a:solidFill>
+                  <a:srgbClr val="1F2A37"/>
+                </a:solidFill>
+                <a:latin typeface="Aptos"/>
+              </a:rPr>
+              <a:t>This is not a full hiring platform.</a:t>
+            </a:r>
+          </a:p>
+          <a:p>
+            <a:pPr>
+              <a:spcAft>
+                <a:spcPts val="700"/>
+              </a:spcAft>
+            </a:pPr>
+            <a:r>
+              <a:rPr sz="1150" b="0">
+                <a:solidFill>
+                  <a:srgbClr val="1F2A37"/>
+                </a:solidFill>
+                <a:latin typeface="Aptos"/>
+              </a:rPr>
+              <a:t>We are not predicting final hiring outcomes or job performance.</a:t>
+            </a:r>
+          </a:p>
+        </p:txBody>
+      </p:sp>
+      <p:sp>
+        <p:nvSpPr>
+          <p:cNvPr id="13" name="TextBox 12"/>
+          <p:cNvSpPr txBox="1"/>
+          <p:nvPr/>
+        </p:nvSpPr>
+        <p:spPr>
+          <a:xfrm>
+            <a:off x="11448288" y="6400800"/>
+            <a:ext cx="365760" cy="182880"/>
+          </a:xfrm>
+          <a:prstGeom prst="rect">
+            <a:avLst/>
+          </a:prstGeom>
+          <a:noFill/>
+        </p:spPr>
+        <p:txBody>
+          <a:bodyPr wrap="square" lIns="76200" rIns="76200" tIns="50800" bIns="50800" anchor="t">
+            <a:spAutoFit/>
+          </a:bodyPr>
+          <a:lstStyle/>
+          <a:p>
+            <a:pPr algn="r"/>
+            <a:r>
+              <a:rPr sz="1000" b="0">
+                <a:solidFill>
+                  <a:srgbClr val="2D3E54"/>
+                </a:solidFill>
+                <a:latin typeface="Aptos"/>
+              </a:rPr>
+              <a:t>2</a:t>
+            </a:r>
+          </a:p>
+        </p:txBody>
+      </p:sp>
+    </p:spTree>
+  </p:cSld>
+  <p:clrMapOvr>
+    <a:masterClrMapping/>
+  </p:clrMapOvr>
+</p:sld>
+</file>
+
+<file path=ppt/slides/slide3.xml><?xml version="1.0" encoding="utf-8"?>
 <p:sld xmlns:a="http://schemas.openxmlformats.org/drawingml/2006/main" xmlns:p="http://schemas.openxmlformats.org/presentationml/2006/main" xmlns:r="http://schemas.openxmlformats.org/officeDocument/2006/relationships">
   <p:cSld>
     <p:bg>
@@ -4271,7 +6303,7 @@
         <p:spPr>
           <a:xfrm>
             <a:off x="640080" y="502920"/>
-            <a:ext cx="8686800" cy="685800"/>
+            <a:ext cx="8869680" cy="658368"/>
           </a:xfrm>
           <a:prstGeom prst="rect">
             <a:avLst/>
@@ -4292,7 +6324,7 @@
                 </a:solidFill>
                 <a:latin typeface="Georgia"/>
               </a:rPr>
-              <a:t>Objectives Clearly Defined</a:t>
+              <a:t>Solution Overview</a:t>
             </a:r>
           </a:p>
         </p:txBody>
@@ -4305,8 +6337,8 @@
         </p:nvSpPr>
         <p:spPr>
           <a:xfrm>
-            <a:off x="658368" y="1097280"/>
-            <a:ext cx="8869680" cy="347472"/>
+            <a:off x="658368" y="1078992"/>
+            <a:ext cx="8869680" cy="329184"/>
           </a:xfrm>
           <a:prstGeom prst="rect">
             <a:avLst/>
@@ -4327,7 +6359,7 @@
                 </a:solidFill>
                 <a:latin typeface="Aptos"/>
               </a:rPr>
-              <a:t>Background and context for the project</a:t>
+              <a:t>A web-based Job Matching and Qualification System for computing-related roles</a:t>
             </a:r>
           </a:p>
         </p:txBody>
@@ -4340,8 +6372,8 @@
         </p:nvSpPr>
         <p:spPr>
           <a:xfrm>
-            <a:off x="9802368" y="566928"/>
-            <a:ext cx="1645920" cy="329184"/>
+            <a:off x="9710928" y="566928"/>
+            <a:ext cx="1783080" cy="329184"/>
           </a:xfrm>
           <a:prstGeom prst="roundRect">
             <a:avLst/>
@@ -4381,7 +6413,7 @@
                 </a:solidFill>
                 <a:latin typeface="Aptos"/>
               </a:rPr>
-              <a:t>Context</a:t>
+              <a:t>Solution</a:t>
             </a:r>
           </a:p>
         </p:txBody>
@@ -4394,8 +6426,123 @@
         </p:nvSpPr>
         <p:spPr>
           <a:xfrm>
-            <a:off x="658368" y="1417320"/>
-            <a:ext cx="5897880" cy="4480560"/>
+            <a:off x="713232" y="1417320"/>
+            <a:ext cx="10698480" cy="384048"/>
+          </a:xfrm>
+          <a:prstGeom prst="rect">
+            <a:avLst/>
+          </a:prstGeom>
+          <a:noFill/>
+        </p:spPr>
+        <p:txBody>
+          <a:bodyPr wrap="square" lIns="76200" rIns="76200" tIns="50800" bIns="50800" anchor="t">
+            <a:spAutoFit/>
+          </a:bodyPr>
+          <a:lstStyle/>
+          <a:p>
+            <a:pPr algn="l"/>
+            <a:r>
+              <a:rPr sz="1500" b="1">
+                <a:solidFill>
+                  <a:srgbClr val="11213E"/>
+                </a:solidFill>
+                <a:latin typeface="Aptos"/>
+              </a:rPr>
+              <a:t>The system operates as an initial matching and recommendation stage, not a full hiring platform.</a:t>
+            </a:r>
+          </a:p>
+        </p:txBody>
+      </p:sp>
+      <p:sp>
+        <p:nvSpPr>
+          <p:cNvPr id="7" name="Rounded Rectangle 6"/>
+          <p:cNvSpPr/>
+          <p:nvPr/>
+        </p:nvSpPr>
+        <p:spPr>
+          <a:xfrm>
+            <a:off x="658368" y="1920240"/>
+            <a:ext cx="3429000" cy="3154680"/>
+          </a:xfrm>
+          <a:prstGeom prst="roundRect">
+            <a:avLst/>
+          </a:prstGeom>
+          <a:solidFill>
+            <a:srgbClr val="E1EBF7"/>
+          </a:solidFill>
+          <a:ln>
+            <a:solidFill>
+              <a:srgbClr val="E1EBF7"/>
+            </a:solidFill>
+          </a:ln>
+        </p:spPr>
+        <p:style>
+          <a:lnRef idx="1">
+            <a:schemeClr val="accent1"/>
+          </a:lnRef>
+          <a:fillRef idx="3">
+            <a:schemeClr val="accent1"/>
+          </a:fillRef>
+          <a:effectRef idx="2">
+            <a:schemeClr val="accent1"/>
+          </a:effectRef>
+          <a:fontRef idx="minor">
+            <a:schemeClr val="lt1"/>
+          </a:fontRef>
+        </p:style>
+        <p:txBody>
+          <a:bodyPr rtlCol="0" anchor="ctr"/>
+          <a:lstStyle/>
+          <a:p>
+            <a:pPr algn="ctr"/>
+          </a:p>
+        </p:txBody>
+      </p:sp>
+      <p:sp>
+        <p:nvSpPr>
+          <p:cNvPr id="8" name="TextBox 7"/>
+          <p:cNvSpPr txBox="1"/>
+          <p:nvPr/>
+        </p:nvSpPr>
+        <p:spPr>
+          <a:xfrm>
+            <a:off x="768096" y="2011680"/>
+            <a:ext cx="3209544" cy="310896"/>
+          </a:xfrm>
+          <a:prstGeom prst="rect">
+            <a:avLst/>
+          </a:prstGeom>
+          <a:noFill/>
+        </p:spPr>
+        <p:txBody>
+          <a:bodyPr wrap="square" lIns="76200" rIns="76200" tIns="50800" bIns="50800" anchor="t">
+            <a:spAutoFit/>
+          </a:bodyPr>
+          <a:lstStyle/>
+          <a:p>
+            <a:pPr algn="l"/>
+            <a:r>
+              <a:rPr sz="1400" b="1">
+                <a:solidFill>
+                  <a:srgbClr val="11213E"/>
+                </a:solidFill>
+                <a:latin typeface="Georgia"/>
+              </a:rPr>
+              <a:t>Candidate Web Interface</a:t>
+            </a:r>
+          </a:p>
+        </p:txBody>
+      </p:sp>
+      <p:sp>
+        <p:nvSpPr>
+          <p:cNvPr id="9" name="TextBox 8"/>
+          <p:cNvSpPr txBox="1"/>
+          <p:nvPr/>
+        </p:nvSpPr>
+        <p:spPr>
+          <a:xfrm>
+            <a:off x="731520" y="2340864"/>
+            <a:ext cx="3282696" cy="2660904"/>
           </a:xfrm>
           <a:prstGeom prst="rect">
             <a:avLst/>
@@ -4414,13 +6561,13 @@
               </a:spcAft>
             </a:pPr>
             <a:r>
-              <a:rPr sz="1600" b="0">
+              <a:rPr sz="1150" b="0">
                 <a:solidFill>
                   <a:srgbClr val="1F2A37"/>
                 </a:solidFill>
                 <a:latin typeface="Aptos"/>
               </a:rPr>
-              <a:t>Modern recruitment is often inefficient and opaque for both employers and applicants.</a:t>
+              <a:t>Upload resume</a:t>
             </a:r>
           </a:p>
           <a:p>
@@ -4430,13 +6577,13 @@
               </a:spcAft>
             </a:pPr>
             <a:r>
-              <a:rPr sz="1600" b="0">
+              <a:rPr sz="1150" b="0">
                 <a:solidFill>
                   <a:srgbClr val="1F2A37"/>
                 </a:solidFill>
                 <a:latin typeface="Aptos"/>
               </a:rPr>
-              <a:t>Employers sift through many applications of varying relevance, while applicants often receive little feedback.</a:t>
+              <a:t>View ranked job matches</a:t>
             </a:r>
           </a:p>
           <a:p>
@@ -4446,15 +6593,118 @@
               </a:spcAft>
             </a:pPr>
             <a:r>
-              <a:rPr sz="1600" b="0">
+              <a:rPr sz="1150" b="0">
                 <a:solidFill>
                   <a:srgbClr val="1F2A37"/>
                 </a:solidFill>
                 <a:latin typeface="Aptos"/>
               </a:rPr>
-              <a:t>This causes wasted effort, missed qualified candidates, and weak transparency in the matching process.</a:t>
-            </a:r>
-          </a:p>
+              <a:t>View match details</a:t>
+            </a:r>
+          </a:p>
+        </p:txBody>
+      </p:sp>
+      <p:sp>
+        <p:nvSpPr>
+          <p:cNvPr id="10" name="Rounded Rectangle 9"/>
+          <p:cNvSpPr/>
+          <p:nvPr/>
+        </p:nvSpPr>
+        <p:spPr>
+          <a:xfrm>
+            <a:off x="4389120" y="1920240"/>
+            <a:ext cx="3429000" cy="3154680"/>
+          </a:xfrm>
+          <a:prstGeom prst="roundRect">
+            <a:avLst/>
+          </a:prstGeom>
+          <a:solidFill>
+            <a:srgbClr val="E4F2EC"/>
+          </a:solidFill>
+          <a:ln>
+            <a:solidFill>
+              <a:srgbClr val="E4F2EC"/>
+            </a:solidFill>
+          </a:ln>
+        </p:spPr>
+        <p:style>
+          <a:lnRef idx="1">
+            <a:schemeClr val="accent1"/>
+          </a:lnRef>
+          <a:fillRef idx="3">
+            <a:schemeClr val="accent1"/>
+          </a:fillRef>
+          <a:effectRef idx="2">
+            <a:schemeClr val="accent1"/>
+          </a:effectRef>
+          <a:fontRef idx="minor">
+            <a:schemeClr val="lt1"/>
+          </a:fontRef>
+        </p:style>
+        <p:txBody>
+          <a:bodyPr rtlCol="0" anchor="ctr"/>
+          <a:lstStyle/>
+          <a:p>
+            <a:pPr algn="ctr"/>
+          </a:p>
+        </p:txBody>
+      </p:sp>
+      <p:sp>
+        <p:nvSpPr>
+          <p:cNvPr id="11" name="TextBox 10"/>
+          <p:cNvSpPr txBox="1"/>
+          <p:nvPr/>
+        </p:nvSpPr>
+        <p:spPr>
+          <a:xfrm>
+            <a:off x="4498848" y="2011680"/>
+            <a:ext cx="3209544" cy="310896"/>
+          </a:xfrm>
+          <a:prstGeom prst="rect">
+            <a:avLst/>
+          </a:prstGeom>
+          <a:noFill/>
+        </p:spPr>
+        <p:txBody>
+          <a:bodyPr wrap="square" lIns="76200" rIns="76200" tIns="50800" bIns="50800" anchor="t">
+            <a:spAutoFit/>
+          </a:bodyPr>
+          <a:lstStyle/>
+          <a:p>
+            <a:pPr algn="l"/>
+            <a:r>
+              <a:rPr sz="1400" b="1">
+                <a:solidFill>
+                  <a:srgbClr val="11213E"/>
+                </a:solidFill>
+                <a:latin typeface="Georgia"/>
+              </a:rPr>
+              <a:t>Core Matching Engine</a:t>
+            </a:r>
+          </a:p>
+        </p:txBody>
+      </p:sp>
+      <p:sp>
+        <p:nvSpPr>
+          <p:cNvPr id="12" name="TextBox 11"/>
+          <p:cNvSpPr txBox="1"/>
+          <p:nvPr/>
+        </p:nvSpPr>
+        <p:spPr>
+          <a:xfrm>
+            <a:off x="4462272" y="2340864"/>
+            <a:ext cx="3282696" cy="2660904"/>
+          </a:xfrm>
+          <a:prstGeom prst="rect">
+            <a:avLst/>
+          </a:prstGeom>
+          <a:noFill/>
+        </p:spPr>
+        <p:txBody>
+          <a:bodyPr wrap="square" lIns="101600" rIns="101600" tIns="50800" bIns="50800">
+            <a:spAutoFit/>
+          </a:bodyPr>
+          <a:lstStyle/>
           <a:p>
             <a:pPr>
               <a:spcAft>
@@ -4462,13 +6712,13 @@
               </a:spcAft>
             </a:pPr>
             <a:r>
-              <a:rPr sz="1600" b="0">
+              <a:rPr sz="1150" b="0">
                 <a:solidFill>
                   <a:srgbClr val="1F2A37"/>
                 </a:solidFill>
                 <a:latin typeface="Aptos"/>
               </a:rPr>
-              <a:t>The project formalizes comparison between job requirements and candidate competencies into a structured computational process.</a:t>
+              <a:t>Extract competencies</a:t>
             </a:r>
           </a:p>
           <a:p>
@@ -4478,13 +6728,13 @@
               </a:spcAft>
             </a:pPr>
             <a:r>
-              <a:rPr sz="1600" b="0">
+              <a:rPr sz="1150" b="0">
                 <a:solidFill>
                   <a:srgbClr val="1F2A37"/>
                 </a:solidFill>
                 <a:latin typeface="Aptos"/>
               </a:rPr>
-              <a:t>Scope is limited to computing-related roles so the problem stays manageable and evaluation stays realistic.</a:t>
+              <a:t>Map competencies to O*NET descriptors</a:t>
             </a:r>
           </a:p>
           <a:p>
@@ -4494,27 +6744,43 @@
               </a:spcAft>
             </a:pPr>
             <a:r>
-              <a:rPr sz="1600" b="0">
+              <a:rPr sz="1150" b="0">
                 <a:solidFill>
                   <a:srgbClr val="1F2A37"/>
                 </a:solidFill>
                 <a:latin typeface="Aptos"/>
               </a:rPr>
-              <a:t>The system is an initial matching stage, not a full hiring workflow and not a replacement for recruiters.</a:t>
-            </a:r>
-          </a:p>
-        </p:txBody>
-      </p:sp>
-      <p:sp>
-        <p:nvSpPr>
-          <p:cNvPr id="7" name="Rounded Rectangle 6"/>
+              <a:t>Determine qualification</a:t>
+            </a:r>
+          </a:p>
+          <a:p>
+            <a:pPr>
+              <a:spcAft>
+                <a:spcPts val="700"/>
+              </a:spcAft>
+            </a:pPr>
+            <a:r>
+              <a:rPr sz="1150" b="0">
+                <a:solidFill>
+                  <a:srgbClr val="1F2A37"/>
+                </a:solidFill>
+                <a:latin typeface="Aptos"/>
+              </a:rPr>
+              <a:t>Rank results</a:t>
+            </a:r>
+          </a:p>
+        </p:txBody>
+      </p:sp>
+      <p:sp>
+        <p:nvSpPr>
+          <p:cNvPr id="13" name="Rounded Rectangle 12"/>
           <p:cNvSpPr/>
           <p:nvPr/>
         </p:nvSpPr>
         <p:spPr>
           <a:xfrm>
-            <a:off x="6903720" y="1554480"/>
-            <a:ext cx="4617720" cy="1024128"/>
+            <a:off x="8119872" y="1920240"/>
+            <a:ext cx="3429000" cy="3154680"/>
           </a:xfrm>
           <a:prstGeom prst="roundRect">
             <a:avLst/>
@@ -4552,14 +6818,14 @@
       </p:sp>
       <p:sp>
         <p:nvSpPr>
-          <p:cNvPr id="8" name="TextBox 7"/>
+          <p:cNvPr id="14" name="TextBox 13"/>
           <p:cNvSpPr txBox="1"/>
           <p:nvPr/>
         </p:nvSpPr>
         <p:spPr>
           <a:xfrm>
-            <a:off x="7013448" y="1645920"/>
-            <a:ext cx="4398264" cy="310896"/>
+            <a:off x="8229600" y="2011680"/>
+            <a:ext cx="3209544" cy="310896"/>
           </a:xfrm>
           <a:prstGeom prst="rect">
             <a:avLst/>
@@ -4580,21 +6846,21 @@
                 </a:solidFill>
                 <a:latin typeface="Georgia"/>
               </a:rPr>
-              <a:t>Why this matters</a:t>
-            </a:r>
-          </a:p>
-        </p:txBody>
-      </p:sp>
-      <p:sp>
-        <p:nvSpPr>
-          <p:cNvPr id="9" name="TextBox 8"/>
+              <a:t>Employer Web Interface</a:t>
+            </a:r>
+          </a:p>
+        </p:txBody>
+      </p:sp>
+      <p:sp>
+        <p:nvSpPr>
+          <p:cNvPr id="15" name="TextBox 14"/>
           <p:cNvSpPr txBox="1"/>
           <p:nvPr/>
         </p:nvSpPr>
         <p:spPr>
           <a:xfrm>
-            <a:off x="6976872" y="1975104"/>
-            <a:ext cx="4471416" cy="530352"/>
+            <a:off x="8193024" y="2340864"/>
+            <a:ext cx="3282696" cy="2660904"/>
           </a:xfrm>
           <a:prstGeom prst="rect">
             <a:avLst/>
@@ -4619,7 +6885,7 @@
                 </a:solidFill>
                 <a:latin typeface="Aptos"/>
               </a:rPr>
-              <a:t>Qualified candidates can be missed.</a:t>
+              <a:t>Create job posting</a:t>
             </a:r>
           </a:p>
           <a:p>
@@ -4635,7 +6901,7 @@
                 </a:solidFill>
                 <a:latin typeface="Aptos"/>
               </a:rPr>
-              <a:t>Employers spend time filtering weak matches.</a:t>
+              <a:t>View ranked candidates</a:t>
             </a:r>
           </a:p>
           <a:p>
@@ -4651,66 +6917,21 @@
                 </a:solidFill>
                 <a:latin typeface="Aptos"/>
               </a:rPr>
-              <a:t>Applicants get little explanation.</a:t>
-            </a:r>
-          </a:p>
-        </p:txBody>
-      </p:sp>
-      <p:sp>
-        <p:nvSpPr>
-          <p:cNvPr id="10" name="Rounded Rectangle 9"/>
-          <p:cNvSpPr/>
-          <p:nvPr/>
-        </p:nvSpPr>
-        <p:spPr>
-          <a:xfrm>
-            <a:off x="6903720" y="2761488"/>
-            <a:ext cx="4617720" cy="1024128"/>
-          </a:xfrm>
-          <a:prstGeom prst="roundRect">
-            <a:avLst/>
-          </a:prstGeom>
-          <a:solidFill>
-            <a:srgbClr val="E1EBF7"/>
-          </a:solidFill>
-          <a:ln>
-            <a:solidFill>
-              <a:srgbClr val="E1EBF7"/>
-            </a:solidFill>
-          </a:ln>
-        </p:spPr>
-        <p:style>
-          <a:lnRef idx="1">
-            <a:schemeClr val="accent1"/>
-          </a:lnRef>
-          <a:fillRef idx="3">
-            <a:schemeClr val="accent1"/>
-          </a:fillRef>
-          <a:effectRef idx="2">
-            <a:schemeClr val="accent1"/>
-          </a:effectRef>
-          <a:fontRef idx="minor">
-            <a:schemeClr val="lt1"/>
-          </a:fontRef>
-        </p:style>
-        <p:txBody>
-          <a:bodyPr rtlCol="0" anchor="ctr"/>
-          <a:lstStyle/>
-          <a:p>
-            <a:pPr algn="ctr"/>
-          </a:p>
-        </p:txBody>
-      </p:sp>
-      <p:sp>
-        <p:nvSpPr>
-          <p:cNvPr id="11" name="TextBox 10"/>
+              <a:t>View match details</a:t>
+            </a:r>
+          </a:p>
+        </p:txBody>
+      </p:sp>
+      <p:sp>
+        <p:nvSpPr>
+          <p:cNvPr id="16" name="TextBox 15"/>
           <p:cNvSpPr txBox="1"/>
           <p:nvPr/>
         </p:nvSpPr>
         <p:spPr>
           <a:xfrm>
-            <a:off x="7013448" y="2852928"/>
-            <a:ext cx="4398264" cy="310896"/>
+            <a:off x="777240" y="5532120"/>
+            <a:ext cx="10424160" cy="256032"/>
           </a:xfrm>
           <a:prstGeom prst="rect">
             <a:avLst/>
@@ -4725,127 +6946,27 @@
           <a:p>
             <a:pPr algn="l"/>
             <a:r>
-              <a:rPr sz="1400" b="1">
-                <a:solidFill>
-                  <a:srgbClr val="11213E"/>
-                </a:solidFill>
-                <a:latin typeface="Georgia"/>
-              </a:rPr>
-              <a:t>Project boundary</a:t>
-            </a:r>
-          </a:p>
-        </p:txBody>
-      </p:sp>
-      <p:sp>
-        <p:nvSpPr>
-          <p:cNvPr id="12" name="TextBox 11"/>
+              <a:rPr sz="1150" b="0">
+                <a:solidFill>
+                  <a:srgbClr val="2D3E54"/>
+                </a:solidFill>
+                <a:latin typeface="Aptos"/>
+              </a:rPr>
+              <a:t>Possible explanation, gap-report, weighting, and advanced filtering features remain stretch additions rather than guaranteed deliverables.</a:t>
+            </a:r>
+          </a:p>
+        </p:txBody>
+      </p:sp>
+      <p:sp>
+        <p:nvSpPr>
+          <p:cNvPr id="17" name="TextBox 16"/>
           <p:cNvSpPr txBox="1"/>
           <p:nvPr/>
         </p:nvSpPr>
         <p:spPr>
           <a:xfrm>
-            <a:off x="6976872" y="3182112"/>
-            <a:ext cx="4471416" cy="530352"/>
-          </a:xfrm>
-          <a:prstGeom prst="rect">
-            <a:avLst/>
-          </a:prstGeom>
-          <a:noFill/>
-        </p:spPr>
-        <p:txBody>
-          <a:bodyPr wrap="square" lIns="101600" rIns="101600" tIns="50800" bIns="50800">
-            <a:spAutoFit/>
-          </a:bodyPr>
-          <a:lstStyle/>
-          <a:p>
-            <a:pPr>
-              <a:spcAft>
-                <a:spcPts val="700"/>
-              </a:spcAft>
-            </a:pPr>
-            <a:r>
-              <a:rPr sz="1150" b="0">
-                <a:solidFill>
-                  <a:srgbClr val="1F2A37"/>
-                </a:solidFill>
-                <a:latin typeface="Aptos"/>
-              </a:rPr>
-              <a:t>We focus on resumes, job descriptions, and competency-based qualification.</a:t>
-            </a:r>
-          </a:p>
-          <a:p>
-            <a:pPr>
-              <a:spcAft>
-                <a:spcPts val="700"/>
-              </a:spcAft>
-            </a:pPr>
-            <a:r>
-              <a:rPr sz="1150" b="0">
-                <a:solidFill>
-                  <a:srgbClr val="1F2A37"/>
-                </a:solidFill>
-                <a:latin typeface="Aptos"/>
-              </a:rPr>
-              <a:t>We do not model final hiring outcomes.</a:t>
-            </a:r>
-          </a:p>
-        </p:txBody>
-      </p:sp>
-      <p:sp>
-        <p:nvSpPr>
-          <p:cNvPr id="13" name="Rounded Rectangle 12"/>
-          <p:cNvSpPr/>
-          <p:nvPr/>
-        </p:nvSpPr>
-        <p:spPr>
-          <a:xfrm>
-            <a:off x="6903720" y="3968496"/>
-            <a:ext cx="4617720" cy="1115568"/>
-          </a:xfrm>
-          <a:prstGeom prst="roundRect">
-            <a:avLst/>
-          </a:prstGeom>
-          <a:solidFill>
-            <a:srgbClr val="E4F2EC"/>
-          </a:solidFill>
-          <a:ln>
-            <a:solidFill>
-              <a:srgbClr val="E4F2EC"/>
-            </a:solidFill>
-          </a:ln>
-        </p:spPr>
-        <p:style>
-          <a:lnRef idx="1">
-            <a:schemeClr val="accent1"/>
-          </a:lnRef>
-          <a:fillRef idx="3">
-            <a:schemeClr val="accent1"/>
-          </a:fillRef>
-          <a:effectRef idx="2">
-            <a:schemeClr val="accent1"/>
-          </a:effectRef>
-          <a:fontRef idx="minor">
-            <a:schemeClr val="lt1"/>
-          </a:fontRef>
-        </p:style>
-        <p:txBody>
-          <a:bodyPr rtlCol="0" anchor="ctr"/>
-          <a:lstStyle/>
-          <a:p>
-            <a:pPr algn="ctr"/>
-          </a:p>
-        </p:txBody>
-      </p:sp>
-      <p:sp>
-        <p:nvSpPr>
-          <p:cNvPr id="14" name="TextBox 13"/>
-          <p:cNvSpPr txBox="1"/>
-          <p:nvPr/>
-        </p:nvSpPr>
-        <p:spPr>
-          <a:xfrm>
-            <a:off x="7013448" y="4059936"/>
-            <a:ext cx="4398264" cy="310896"/>
+            <a:off x="11448288" y="6400800"/>
+            <a:ext cx="365760" cy="182880"/>
           </a:xfrm>
           <a:prstGeom prst="rect">
             <a:avLst/>
@@ -4858,96 +6979,6 @@
           </a:bodyPr>
           <a:lstStyle/>
           <a:p>
-            <a:pPr algn="l"/>
-            <a:r>
-              <a:rPr sz="1400" b="1">
-                <a:solidFill>
-                  <a:srgbClr val="11213E"/>
-                </a:solidFill>
-                <a:latin typeface="Georgia"/>
-              </a:rPr>
-              <a:t>Core framing</a:t>
-            </a:r>
-          </a:p>
-        </p:txBody>
-      </p:sp>
-      <p:sp>
-        <p:nvSpPr>
-          <p:cNvPr id="15" name="TextBox 14"/>
-          <p:cNvSpPr txBox="1"/>
-          <p:nvPr/>
-        </p:nvSpPr>
-        <p:spPr>
-          <a:xfrm>
-            <a:off x="6976872" y="4389120"/>
-            <a:ext cx="4471416" cy="621792"/>
-          </a:xfrm>
-          <a:prstGeom prst="rect">
-            <a:avLst/>
-          </a:prstGeom>
-          <a:noFill/>
-        </p:spPr>
-        <p:txBody>
-          <a:bodyPr wrap="square" lIns="101600" rIns="101600" tIns="50800" bIns="50800">
-            <a:spAutoFit/>
-          </a:bodyPr>
-          <a:lstStyle/>
-          <a:p>
-            <a:pPr>
-              <a:spcAft>
-                <a:spcPts val="700"/>
-              </a:spcAft>
-            </a:pPr>
-            <a:r>
-              <a:rPr sz="1150" b="0">
-                <a:solidFill>
-                  <a:srgbClr val="1F2A37"/>
-                </a:solidFill>
-                <a:latin typeface="Aptos"/>
-              </a:rPr>
-              <a:t>This is a structured decision-support problem.</a:t>
-            </a:r>
-          </a:p>
-          <a:p>
-            <a:pPr>
-              <a:spcAft>
-                <a:spcPts val="700"/>
-              </a:spcAft>
-            </a:pPr>
-            <a:r>
-              <a:rPr sz="1150" b="0">
-                <a:solidFill>
-                  <a:srgbClr val="1F2A37"/>
-                </a:solidFill>
-                <a:latin typeface="Aptos"/>
-              </a:rPr>
-              <a:t>The goal is a clearer first-pass judgement of suitability.</a:t>
-            </a:r>
-          </a:p>
-        </p:txBody>
-      </p:sp>
-      <p:sp>
-        <p:nvSpPr>
-          <p:cNvPr id="16" name="TextBox 15"/>
-          <p:cNvSpPr txBox="1"/>
-          <p:nvPr/>
-        </p:nvSpPr>
-        <p:spPr>
-          <a:xfrm>
-            <a:off x="11448288" y="6400800"/>
-            <a:ext cx="365760" cy="182880"/>
-          </a:xfrm>
-          <a:prstGeom prst="rect">
-            <a:avLst/>
-          </a:prstGeom>
-          <a:noFill/>
-        </p:spPr>
-        <p:txBody>
-          <a:bodyPr wrap="square" lIns="76200" rIns="76200" tIns="50800" bIns="50800" anchor="t">
-            <a:spAutoFit/>
-          </a:bodyPr>
-          <a:lstStyle/>
-          <a:p>
             <a:pPr algn="r"/>
             <a:r>
               <a:rPr sz="1000" b="0">
@@ -4956,7 +6987,7 @@
                 </a:solidFill>
                 <a:latin typeface="Aptos"/>
               </a:rPr>
-              <a:t>2</a:t>
+              <a:t>3</a:t>
             </a:r>
           </a:p>
         </p:txBody>
@@ -4969,7 +7000,7 @@
 </p:sld>
 </file>
 
-<file path=ppt/slides/slide3.xml><?xml version="1.0" encoding="utf-8"?>
+<file path=ppt/slides/slide4.xml><?xml version="1.0" encoding="utf-8"?>
 <p:sld xmlns:a="http://schemas.openxmlformats.org/drawingml/2006/main" xmlns:p="http://schemas.openxmlformats.org/presentationml/2006/main" xmlns:r="http://schemas.openxmlformats.org/officeDocument/2006/relationships">
   <p:cSld>
     <p:bg>
@@ -5041,7 +7072,7 @@
         <p:spPr>
           <a:xfrm>
             <a:off x="640080" y="502920"/>
-            <a:ext cx="8686800" cy="685800"/>
+            <a:ext cx="8869680" cy="658368"/>
           </a:xfrm>
           <a:prstGeom prst="rect">
             <a:avLst/>
@@ -5062,7 +7093,7 @@
                 </a:solidFill>
                 <a:latin typeface="Georgia"/>
               </a:rPr>
-              <a:t>Proposed Solution</a:t>
+              <a:t>Objectives Clearly Defined</a:t>
             </a:r>
           </a:p>
         </p:txBody>
@@ -5075,8 +7106,8 @@
         </p:nvSpPr>
         <p:spPr>
           <a:xfrm>
-            <a:off x="658368" y="1097280"/>
-            <a:ext cx="8869680" cy="347472"/>
+            <a:off x="658368" y="1078992"/>
+            <a:ext cx="8869680" cy="329184"/>
           </a:xfrm>
           <a:prstGeom prst="rect">
             <a:avLst/>
@@ -5097,7 +7128,7 @@
                 </a:solidFill>
                 <a:latin typeface="Aptos"/>
               </a:rPr>
-              <a:t>How Job Hunt is meant to work</a:t>
+              <a:t>Core deliverables, boundaries, and stretch goals</a:t>
             </a:r>
           </a:p>
         </p:txBody>
@@ -5110,8 +7141,8 @@
         </p:nvSpPr>
         <p:spPr>
           <a:xfrm>
-            <a:off x="9802368" y="566928"/>
-            <a:ext cx="1645920" cy="329184"/>
+            <a:off x="9710928" y="566928"/>
+            <a:ext cx="1783080" cy="329184"/>
           </a:xfrm>
           <a:prstGeom prst="roundRect">
             <a:avLst/>
@@ -5151,21 +7182,101 @@
                 </a:solidFill>
                 <a:latin typeface="Aptos"/>
               </a:rPr>
-              <a:t>Approach</a:t>
-            </a:r>
-          </a:p>
-        </p:txBody>
-      </p:sp>
-      <p:sp>
-        <p:nvSpPr>
-          <p:cNvPr id="6" name="TextBox 5"/>
+              <a:t>Scope</a:t>
+            </a:r>
+          </a:p>
+        </p:txBody>
+      </p:sp>
+      <p:sp>
+        <p:nvSpPr>
+          <p:cNvPr id="6" name="Rounded Rectangle 5"/>
+          <p:cNvSpPr/>
+          <p:nvPr/>
+        </p:nvSpPr>
+        <p:spPr>
+          <a:xfrm>
+            <a:off x="566928" y="1417320"/>
+            <a:ext cx="3703320" cy="4526280"/>
+          </a:xfrm>
+          <a:prstGeom prst="roundRect">
+            <a:avLst/>
+          </a:prstGeom>
+          <a:solidFill>
+            <a:srgbClr val="E4F2EC"/>
+          </a:solidFill>
+          <a:ln>
+            <a:solidFill>
+              <a:srgbClr val="E4F2EC"/>
+            </a:solidFill>
+          </a:ln>
+        </p:spPr>
+        <p:style>
+          <a:lnRef idx="1">
+            <a:schemeClr val="accent1"/>
+          </a:lnRef>
+          <a:fillRef idx="3">
+            <a:schemeClr val="accent1"/>
+          </a:fillRef>
+          <a:effectRef idx="2">
+            <a:schemeClr val="accent1"/>
+          </a:effectRef>
+          <a:fontRef idx="minor">
+            <a:schemeClr val="lt1"/>
+          </a:fontRef>
+        </p:style>
+        <p:txBody>
+          <a:bodyPr rtlCol="0" anchor="ctr"/>
+          <a:lstStyle/>
+          <a:p>
+            <a:pPr algn="ctr"/>
+          </a:p>
+        </p:txBody>
+      </p:sp>
+      <p:sp>
+        <p:nvSpPr>
+          <p:cNvPr id="7" name="TextBox 6"/>
           <p:cNvSpPr txBox="1"/>
           <p:nvPr/>
         </p:nvSpPr>
         <p:spPr>
           <a:xfrm>
-            <a:off x="658368" y="1417320"/>
-            <a:ext cx="5074920" cy="4572000"/>
+            <a:off x="676656" y="1508760"/>
+            <a:ext cx="3483864" cy="310896"/>
+          </a:xfrm>
+          <a:prstGeom prst="rect">
+            <a:avLst/>
+          </a:prstGeom>
+          <a:noFill/>
+        </p:spPr>
+        <p:txBody>
+          <a:bodyPr wrap="square" lIns="76200" rIns="76200" tIns="50800" bIns="50800" anchor="t">
+            <a:spAutoFit/>
+          </a:bodyPr>
+          <a:lstStyle/>
+          <a:p>
+            <a:pPr algn="l"/>
+            <a:r>
+              <a:rPr sz="1400" b="1">
+                <a:solidFill>
+                  <a:srgbClr val="11213E"/>
+                </a:solidFill>
+                <a:latin typeface="Georgia"/>
+              </a:rPr>
+              <a:t>Core deliverables</a:t>
+            </a:r>
+          </a:p>
+        </p:txBody>
+      </p:sp>
+      <p:sp>
+        <p:nvSpPr>
+          <p:cNvPr id="8" name="TextBox 7"/>
+          <p:cNvSpPr txBox="1"/>
+          <p:nvPr/>
+        </p:nvSpPr>
+        <p:spPr>
+          <a:xfrm>
+            <a:off x="640080" y="1837944"/>
+            <a:ext cx="3557016" cy="4032504"/>
           </a:xfrm>
           <a:prstGeom prst="rect">
             <a:avLst/>
@@ -5184,13 +7295,13 @@
               </a:spcAft>
             </a:pPr>
             <a:r>
-              <a:rPr sz="1600" b="0">
+              <a:rPr sz="1150" b="0">
                 <a:solidFill>
                   <a:srgbClr val="1F2A37"/>
                 </a:solidFill>
                 <a:latin typeface="Aptos"/>
               </a:rPr>
-              <a:t>Accept resumes from candidates and job descriptions from employers.</a:t>
+              <a:t>Accept resumes and job descriptions.</a:t>
             </a:r>
           </a:p>
           <a:p>
@@ -5200,13 +7311,13 @@
               </a:spcAft>
             </a:pPr>
             <a:r>
-              <a:rPr sz="1600" b="0">
+              <a:rPr sz="1150" b="0">
                 <a:solidFill>
                   <a:srgbClr val="1F2A37"/>
                 </a:solidFill>
                 <a:latin typeface="Aptos"/>
               </a:rPr>
-              <a:t>Extract relevant competencies from both forms of unstructured text.</a:t>
+              <a:t>Extract competencies from unstructured text.</a:t>
             </a:r>
           </a:p>
           <a:p>
@@ -5216,13 +7327,13 @@
               </a:spcAft>
             </a:pPr>
             <a:r>
-              <a:rPr sz="1600" b="0">
+              <a:rPr sz="1150" b="0">
                 <a:solidFill>
                   <a:srgbClr val="1F2A37"/>
                 </a:solidFill>
                 <a:latin typeface="Aptos"/>
               </a:rPr>
-              <a:t>Map extracted competencies into a shared O*NET-based competency space.</a:t>
+              <a:t>Map extracted competencies to O*NET descriptors.</a:t>
             </a:r>
           </a:p>
           <a:p>
@@ -5232,13 +7343,13 @@
               </a:spcAft>
             </a:pPr>
             <a:r>
-              <a:rPr sz="1600" b="0">
+              <a:rPr sz="1150" b="0">
                 <a:solidFill>
                   <a:srgbClr val="1F2A37"/>
                 </a:solidFill>
                 <a:latin typeface="Aptos"/>
               </a:rPr>
-              <a:t>Determine whether a candidate is qualified for a role, then rank by suitability.</a:t>
+              <a:t>Generate structured competency profiles.</a:t>
             </a:r>
           </a:p>
           <a:p>
@@ -5248,13 +7359,13 @@
               </a:spcAft>
             </a:pPr>
             <a:r>
-              <a:rPr sz="1600" b="0">
+              <a:rPr sz="1150" b="0">
                 <a:solidFill>
                   <a:srgbClr val="1F2A37"/>
                 </a:solidFill>
                 <a:latin typeface="Aptos"/>
               </a:rPr>
-              <a:t>Reduce false recommendations and missed valid matches.</a:t>
+              <a:t>Determine whether required competencies are satisfied.</a:t>
             </a:r>
           </a:p>
           <a:p>
@@ -5264,27 +7375,194 @@
               </a:spcAft>
             </a:pPr>
             <a:r>
-              <a:rPr sz="1600" b="0">
+              <a:rPr sz="1150" b="0">
                 <a:solidFill>
                   <a:srgbClr val="1F2A37"/>
                 </a:solidFill>
                 <a:latin typeface="Aptos"/>
               </a:rPr>
-              <a:t>Approximate the first-pass judgement of a skilled recruiter in a more structured way.</a:t>
-            </a:r>
-          </a:p>
-        </p:txBody>
-      </p:sp>
-      <p:sp>
-        <p:nvSpPr>
-          <p:cNvPr id="7" name="Rounded Rectangle 6"/>
+              <a:t>Rank qualified candidates and relevant jobs.</a:t>
+            </a:r>
+          </a:p>
+        </p:txBody>
+      </p:sp>
+      <p:sp>
+        <p:nvSpPr>
+          <p:cNvPr id="9" name="Rounded Rectangle 8"/>
           <p:cNvSpPr/>
           <p:nvPr/>
         </p:nvSpPr>
         <p:spPr>
           <a:xfrm>
-            <a:off x="5989320" y="1783080"/>
-            <a:ext cx="1325880" cy="1005840"/>
+            <a:off x="4480560" y="1417320"/>
+            <a:ext cx="3657600" cy="4526280"/>
+          </a:xfrm>
+          <a:prstGeom prst="roundRect">
+            <a:avLst/>
+          </a:prstGeom>
+          <a:solidFill>
+            <a:srgbClr val="F6E1DC"/>
+          </a:solidFill>
+          <a:ln>
+            <a:solidFill>
+              <a:srgbClr val="F6E1DC"/>
+            </a:solidFill>
+          </a:ln>
+        </p:spPr>
+        <p:style>
+          <a:lnRef idx="1">
+            <a:schemeClr val="accent1"/>
+          </a:lnRef>
+          <a:fillRef idx="3">
+            <a:schemeClr val="accent1"/>
+          </a:fillRef>
+          <a:effectRef idx="2">
+            <a:schemeClr val="accent1"/>
+          </a:effectRef>
+          <a:fontRef idx="minor">
+            <a:schemeClr val="lt1"/>
+          </a:fontRef>
+        </p:style>
+        <p:txBody>
+          <a:bodyPr rtlCol="0" anchor="ctr"/>
+          <a:lstStyle/>
+          <a:p>
+            <a:pPr algn="ctr"/>
+          </a:p>
+        </p:txBody>
+      </p:sp>
+      <p:sp>
+        <p:nvSpPr>
+          <p:cNvPr id="10" name="TextBox 9"/>
+          <p:cNvSpPr txBox="1"/>
+          <p:nvPr/>
+        </p:nvSpPr>
+        <p:spPr>
+          <a:xfrm>
+            <a:off x="4590288" y="1508760"/>
+            <a:ext cx="3438144" cy="310896"/>
+          </a:xfrm>
+          <a:prstGeom prst="rect">
+            <a:avLst/>
+          </a:prstGeom>
+          <a:noFill/>
+        </p:spPr>
+        <p:txBody>
+          <a:bodyPr wrap="square" lIns="76200" rIns="76200" tIns="50800" bIns="50800" anchor="t">
+            <a:spAutoFit/>
+          </a:bodyPr>
+          <a:lstStyle/>
+          <a:p>
+            <a:pPr algn="l"/>
+            <a:r>
+              <a:rPr sz="1400" b="1">
+                <a:solidFill>
+                  <a:srgbClr val="11213E"/>
+                </a:solidFill>
+                <a:latin typeface="Georgia"/>
+              </a:rPr>
+              <a:t>Clearly out of scope</a:t>
+            </a:r>
+          </a:p>
+        </p:txBody>
+      </p:sp>
+      <p:sp>
+        <p:nvSpPr>
+          <p:cNvPr id="11" name="TextBox 10"/>
+          <p:cNvSpPr txBox="1"/>
+          <p:nvPr/>
+        </p:nvSpPr>
+        <p:spPr>
+          <a:xfrm>
+            <a:off x="4553712" y="1837944"/>
+            <a:ext cx="3511296" cy="4032504"/>
+          </a:xfrm>
+          <a:prstGeom prst="rect">
+            <a:avLst/>
+          </a:prstGeom>
+          <a:noFill/>
+        </p:spPr>
+        <p:txBody>
+          <a:bodyPr wrap="square" lIns="101600" rIns="101600" tIns="50800" bIns="50800">
+            <a:spAutoFit/>
+          </a:bodyPr>
+          <a:lstStyle/>
+          <a:p>
+            <a:pPr>
+              <a:spcAft>
+                <a:spcPts val="700"/>
+              </a:spcAft>
+            </a:pPr>
+            <a:r>
+              <a:rPr sz="1150" b="0">
+                <a:solidFill>
+                  <a:srgbClr val="1F2A37"/>
+                </a:solidFill>
+                <a:latin typeface="Aptos"/>
+              </a:rPr>
+              <a:t>A full hiring platform.</a:t>
+            </a:r>
+          </a:p>
+          <a:p>
+            <a:pPr>
+              <a:spcAft>
+                <a:spcPts val="700"/>
+              </a:spcAft>
+            </a:pPr>
+            <a:r>
+              <a:rPr sz="1150" b="0">
+                <a:solidFill>
+                  <a:srgbClr val="1F2A37"/>
+                </a:solidFill>
+                <a:latin typeface="Aptos"/>
+              </a:rPr>
+              <a:t>Interviews, offers, onboarding, or final hiring decisions.</a:t>
+            </a:r>
+          </a:p>
+          <a:p>
+            <a:pPr>
+              <a:spcAft>
+                <a:spcPts val="700"/>
+              </a:spcAft>
+            </a:pPr>
+            <a:r>
+              <a:rPr sz="1150" b="0">
+                <a:solidFill>
+                  <a:srgbClr val="1F2A37"/>
+                </a:solidFill>
+                <a:latin typeface="Aptos"/>
+              </a:rPr>
+              <a:t>Predicting job performance.</a:t>
+            </a:r>
+          </a:p>
+          <a:p>
+            <a:pPr>
+              <a:spcAft>
+                <a:spcPts val="700"/>
+              </a:spcAft>
+            </a:pPr>
+            <a:r>
+              <a:rPr sz="1150" b="0">
+                <a:solidFill>
+                  <a:srgbClr val="1F2A37"/>
+                </a:solidFill>
+                <a:latin typeface="Aptos"/>
+              </a:rPr>
+              <a:t>Claiming guaranteed real-world hiring accuracy.</a:t>
+            </a:r>
+          </a:p>
+        </p:txBody>
+      </p:sp>
+      <p:sp>
+        <p:nvSpPr>
+          <p:cNvPr id="12" name="Rounded Rectangle 11"/>
+          <p:cNvSpPr/>
+          <p:nvPr/>
+        </p:nvSpPr>
+        <p:spPr>
+          <a:xfrm>
+            <a:off x="8321040" y="1417320"/>
+            <a:ext cx="3310128" cy="4526280"/>
           </a:xfrm>
           <a:prstGeom prst="roundRect">
             <a:avLst/>
@@ -5322,14 +7600,14 @@
       </p:sp>
       <p:sp>
         <p:nvSpPr>
-          <p:cNvPr id="8" name="TextBox 7"/>
+          <p:cNvPr id="13" name="TextBox 12"/>
           <p:cNvSpPr txBox="1"/>
           <p:nvPr/>
         </p:nvSpPr>
         <p:spPr>
           <a:xfrm>
-            <a:off x="6080760" y="1856232"/>
-            <a:ext cx="1143000" cy="256032"/>
+            <a:off x="8430768" y="1508760"/>
+            <a:ext cx="3090672" cy="310896"/>
           </a:xfrm>
           <a:prstGeom prst="rect">
             <a:avLst/>
@@ -5342,614 +7620,29 @@
           </a:bodyPr>
           <a:lstStyle/>
           <a:p>
-            <a:pPr algn="ctr"/>
-            <a:r>
-              <a:rPr sz="1300" b="1">
+            <a:pPr algn="l"/>
+            <a:r>
+              <a:rPr sz="1400" b="1">
                 <a:solidFill>
                   <a:srgbClr val="11213E"/>
                 </a:solidFill>
                 <a:latin typeface="Georgia"/>
               </a:rPr>
-              <a:t>Input</a:t>
-            </a:r>
-          </a:p>
-        </p:txBody>
-      </p:sp>
-      <p:sp>
-        <p:nvSpPr>
-          <p:cNvPr id="9" name="TextBox 8"/>
+              <a:t>Stretch goals</a:t>
+            </a:r>
+          </a:p>
+        </p:txBody>
+      </p:sp>
+      <p:sp>
+        <p:nvSpPr>
+          <p:cNvPr id="14" name="TextBox 13"/>
           <p:cNvSpPr txBox="1"/>
           <p:nvPr/>
         </p:nvSpPr>
         <p:spPr>
           <a:xfrm>
-            <a:off x="6062472" y="2130552"/>
-            <a:ext cx="1170432" cy="502920"/>
-          </a:xfrm>
-          <a:prstGeom prst="rect">
-            <a:avLst/>
-          </a:prstGeom>
-          <a:noFill/>
-        </p:spPr>
-        <p:txBody>
-          <a:bodyPr wrap="square" lIns="76200" rIns="76200" tIns="50800" bIns="50800" anchor="t">
-            <a:spAutoFit/>
-          </a:bodyPr>
-          <a:lstStyle/>
-          <a:p>
-            <a:pPr algn="ctr"/>
-            <a:r>
-              <a:rPr sz="1050" b="0">
-                <a:solidFill>
-                  <a:srgbClr val="1F2A37"/>
-                </a:solidFill>
-                <a:latin typeface="Aptos"/>
-              </a:rPr>
-              <a:t>Resumes and job descriptions</a:t>
-            </a:r>
-          </a:p>
-        </p:txBody>
-      </p:sp>
-      <p:sp>
-        <p:nvSpPr>
-          <p:cNvPr id="10" name="Chevron 9"/>
-          <p:cNvSpPr/>
-          <p:nvPr/>
-        </p:nvSpPr>
-        <p:spPr>
-          <a:xfrm>
-            <a:off x="7342631" y="2029968"/>
-            <a:ext cx="384048" cy="493776"/>
-          </a:xfrm>
-          <a:prstGeom prst="chevron">
-            <a:avLst/>
-          </a:prstGeom>
-          <a:solidFill>
-            <a:srgbClr val="E0B44A"/>
-          </a:solidFill>
-          <a:ln>
-            <a:solidFill>
-              <a:srgbClr val="E0B44A"/>
-            </a:solidFill>
-          </a:ln>
-        </p:spPr>
-        <p:style>
-          <a:lnRef idx="1">
-            <a:schemeClr val="accent1"/>
-          </a:lnRef>
-          <a:fillRef idx="3">
-            <a:schemeClr val="accent1"/>
-          </a:fillRef>
-          <a:effectRef idx="2">
-            <a:schemeClr val="accent1"/>
-          </a:effectRef>
-          <a:fontRef idx="minor">
-            <a:schemeClr val="lt1"/>
-          </a:fontRef>
-        </p:style>
-        <p:txBody>
-          <a:bodyPr rtlCol="0" anchor="ctr"/>
-          <a:lstStyle/>
-          <a:p>
-            <a:pPr algn="ctr"/>
-          </a:p>
-        </p:txBody>
-      </p:sp>
-      <p:sp>
-        <p:nvSpPr>
-          <p:cNvPr id="11" name="Rounded Rectangle 10"/>
-          <p:cNvSpPr/>
-          <p:nvPr/>
-        </p:nvSpPr>
-        <p:spPr>
-          <a:xfrm>
-            <a:off x="7790688" y="1783080"/>
-            <a:ext cx="1325880" cy="1005840"/>
-          </a:xfrm>
-          <a:prstGeom prst="roundRect">
-            <a:avLst/>
-          </a:prstGeom>
-          <a:solidFill>
-            <a:srgbClr val="E4F2EC"/>
-          </a:solidFill>
-          <a:ln>
-            <a:solidFill>
-              <a:srgbClr val="E4F2EC"/>
-            </a:solidFill>
-          </a:ln>
-        </p:spPr>
-        <p:style>
-          <a:lnRef idx="1">
-            <a:schemeClr val="accent1"/>
-          </a:lnRef>
-          <a:fillRef idx="3">
-            <a:schemeClr val="accent1"/>
-          </a:fillRef>
-          <a:effectRef idx="2">
-            <a:schemeClr val="accent1"/>
-          </a:effectRef>
-          <a:fontRef idx="minor">
-            <a:schemeClr val="lt1"/>
-          </a:fontRef>
-        </p:style>
-        <p:txBody>
-          <a:bodyPr rtlCol="0" anchor="ctr"/>
-          <a:lstStyle/>
-          <a:p>
-            <a:pPr algn="ctr"/>
-          </a:p>
-        </p:txBody>
-      </p:sp>
-      <p:sp>
-        <p:nvSpPr>
-          <p:cNvPr id="12" name="TextBox 11"/>
-          <p:cNvSpPr txBox="1"/>
-          <p:nvPr/>
-        </p:nvSpPr>
-        <p:spPr>
-          <a:xfrm>
-            <a:off x="7882128" y="1856232"/>
-            <a:ext cx="1143000" cy="256032"/>
-          </a:xfrm>
-          <a:prstGeom prst="rect">
-            <a:avLst/>
-          </a:prstGeom>
-          <a:noFill/>
-        </p:spPr>
-        <p:txBody>
-          <a:bodyPr wrap="square" lIns="76200" rIns="76200" tIns="50800" bIns="50800" anchor="t">
-            <a:spAutoFit/>
-          </a:bodyPr>
-          <a:lstStyle/>
-          <a:p>
-            <a:pPr algn="ctr"/>
-            <a:r>
-              <a:rPr sz="1300" b="1">
-                <a:solidFill>
-                  <a:srgbClr val="11213E"/>
-                </a:solidFill>
-                <a:latin typeface="Georgia"/>
-              </a:rPr>
-              <a:t>Extract</a:t>
-            </a:r>
-          </a:p>
-        </p:txBody>
-      </p:sp>
-      <p:sp>
-        <p:nvSpPr>
-          <p:cNvPr id="13" name="TextBox 12"/>
-          <p:cNvSpPr txBox="1"/>
-          <p:nvPr/>
-        </p:nvSpPr>
-        <p:spPr>
-          <a:xfrm>
-            <a:off x="7863840" y="2130552"/>
-            <a:ext cx="1170432" cy="502920"/>
-          </a:xfrm>
-          <a:prstGeom prst="rect">
-            <a:avLst/>
-          </a:prstGeom>
-          <a:noFill/>
-        </p:spPr>
-        <p:txBody>
-          <a:bodyPr wrap="square" lIns="76200" rIns="76200" tIns="50800" bIns="50800" anchor="t">
-            <a:spAutoFit/>
-          </a:bodyPr>
-          <a:lstStyle/>
-          <a:p>
-            <a:pPr algn="ctr"/>
-            <a:r>
-              <a:rPr sz="1050" b="0">
-                <a:solidFill>
-                  <a:srgbClr val="1F2A37"/>
-                </a:solidFill>
-                <a:latin typeface="Aptos"/>
-              </a:rPr>
-              <a:t>Pull out competencies from text</a:t>
-            </a:r>
-          </a:p>
-        </p:txBody>
-      </p:sp>
-      <p:sp>
-        <p:nvSpPr>
-          <p:cNvPr id="14" name="Chevron 13"/>
-          <p:cNvSpPr/>
-          <p:nvPr/>
-        </p:nvSpPr>
-        <p:spPr>
-          <a:xfrm>
-            <a:off x="9144000" y="2029968"/>
-            <a:ext cx="384048" cy="493776"/>
-          </a:xfrm>
-          <a:prstGeom prst="chevron">
-            <a:avLst/>
-          </a:prstGeom>
-          <a:solidFill>
-            <a:srgbClr val="E0B44A"/>
-          </a:solidFill>
-          <a:ln>
-            <a:solidFill>
-              <a:srgbClr val="E0B44A"/>
-            </a:solidFill>
-          </a:ln>
-        </p:spPr>
-        <p:style>
-          <a:lnRef idx="1">
-            <a:schemeClr val="accent1"/>
-          </a:lnRef>
-          <a:fillRef idx="3">
-            <a:schemeClr val="accent1"/>
-          </a:fillRef>
-          <a:effectRef idx="2">
-            <a:schemeClr val="accent1"/>
-          </a:effectRef>
-          <a:fontRef idx="minor">
-            <a:schemeClr val="lt1"/>
-          </a:fontRef>
-        </p:style>
-        <p:txBody>
-          <a:bodyPr rtlCol="0" anchor="ctr"/>
-          <a:lstStyle/>
-          <a:p>
-            <a:pPr algn="ctr"/>
-          </a:p>
-        </p:txBody>
-      </p:sp>
-      <p:sp>
-        <p:nvSpPr>
-          <p:cNvPr id="15" name="Rounded Rectangle 14"/>
-          <p:cNvSpPr/>
-          <p:nvPr/>
-        </p:nvSpPr>
-        <p:spPr>
-          <a:xfrm>
-            <a:off x="9582912" y="1783080"/>
-            <a:ext cx="1325880" cy="1005840"/>
-          </a:xfrm>
-          <a:prstGeom prst="roundRect">
-            <a:avLst/>
-          </a:prstGeom>
-          <a:solidFill>
-            <a:srgbClr val="E1EBF7"/>
-          </a:solidFill>
-          <a:ln>
-            <a:solidFill>
-              <a:srgbClr val="E1EBF7"/>
-            </a:solidFill>
-          </a:ln>
-        </p:spPr>
-        <p:style>
-          <a:lnRef idx="1">
-            <a:schemeClr val="accent1"/>
-          </a:lnRef>
-          <a:fillRef idx="3">
-            <a:schemeClr val="accent1"/>
-          </a:fillRef>
-          <a:effectRef idx="2">
-            <a:schemeClr val="accent1"/>
-          </a:effectRef>
-          <a:fontRef idx="minor">
-            <a:schemeClr val="lt1"/>
-          </a:fontRef>
-        </p:style>
-        <p:txBody>
-          <a:bodyPr rtlCol="0" anchor="ctr"/>
-          <a:lstStyle/>
-          <a:p>
-            <a:pPr algn="ctr"/>
-          </a:p>
-        </p:txBody>
-      </p:sp>
-      <p:sp>
-        <p:nvSpPr>
-          <p:cNvPr id="16" name="TextBox 15"/>
-          <p:cNvSpPr txBox="1"/>
-          <p:nvPr/>
-        </p:nvSpPr>
-        <p:spPr>
-          <a:xfrm>
-            <a:off x="9674352" y="1856232"/>
-            <a:ext cx="1143000" cy="256032"/>
-          </a:xfrm>
-          <a:prstGeom prst="rect">
-            <a:avLst/>
-          </a:prstGeom>
-          <a:noFill/>
-        </p:spPr>
-        <p:txBody>
-          <a:bodyPr wrap="square" lIns="76200" rIns="76200" tIns="50800" bIns="50800" anchor="t">
-            <a:spAutoFit/>
-          </a:bodyPr>
-          <a:lstStyle/>
-          <a:p>
-            <a:pPr algn="ctr"/>
-            <a:r>
-              <a:rPr sz="1300" b="1">
-                <a:solidFill>
-                  <a:srgbClr val="11213E"/>
-                </a:solidFill>
-                <a:latin typeface="Georgia"/>
-              </a:rPr>
-              <a:t>Map</a:t>
-            </a:r>
-          </a:p>
-        </p:txBody>
-      </p:sp>
-      <p:sp>
-        <p:nvSpPr>
-          <p:cNvPr id="17" name="TextBox 16"/>
-          <p:cNvSpPr txBox="1"/>
-          <p:nvPr/>
-        </p:nvSpPr>
-        <p:spPr>
-          <a:xfrm>
-            <a:off x="9656064" y="2130552"/>
-            <a:ext cx="1170432" cy="502920"/>
-          </a:xfrm>
-          <a:prstGeom prst="rect">
-            <a:avLst/>
-          </a:prstGeom>
-          <a:noFill/>
-        </p:spPr>
-        <p:txBody>
-          <a:bodyPr wrap="square" lIns="76200" rIns="76200" tIns="50800" bIns="50800" anchor="t">
-            <a:spAutoFit/>
-          </a:bodyPr>
-          <a:lstStyle/>
-          <a:p>
-            <a:pPr algn="ctr"/>
-            <a:r>
-              <a:rPr sz="1050" b="0">
-                <a:solidFill>
-                  <a:srgbClr val="1F2A37"/>
-                </a:solidFill>
-                <a:latin typeface="Aptos"/>
-              </a:rPr>
-              <a:t>Align to shared O*NET descriptors</a:t>
-            </a:r>
-          </a:p>
-        </p:txBody>
-      </p:sp>
-      <p:sp>
-        <p:nvSpPr>
-          <p:cNvPr id="18" name="TextBox 17"/>
-          <p:cNvSpPr txBox="1"/>
-          <p:nvPr/>
-        </p:nvSpPr>
-        <p:spPr>
-          <a:xfrm>
-            <a:off x="8942832" y="3154680"/>
-            <a:ext cx="2057400" cy="274320"/>
-          </a:xfrm>
-          <a:prstGeom prst="rect">
-            <a:avLst/>
-          </a:prstGeom>
-          <a:noFill/>
-        </p:spPr>
-        <p:txBody>
-          <a:bodyPr wrap="square" lIns="76200" rIns="76200" tIns="50800" bIns="50800" anchor="t">
-            <a:spAutoFit/>
-          </a:bodyPr>
-          <a:lstStyle/>
-          <a:p>
-            <a:pPr algn="ctr"/>
-            <a:r>
-              <a:rPr sz="1300" b="1">
-                <a:solidFill>
-                  <a:srgbClr val="368A7F"/>
-                </a:solidFill>
-                <a:latin typeface="Aptos"/>
-              </a:rPr>
-              <a:t>Then</a:t>
-            </a:r>
-          </a:p>
-        </p:txBody>
-      </p:sp>
-      <p:sp>
-        <p:nvSpPr>
-          <p:cNvPr id="19" name="Rounded Rectangle 18"/>
-          <p:cNvSpPr/>
-          <p:nvPr/>
-        </p:nvSpPr>
-        <p:spPr>
-          <a:xfrm>
-            <a:off x="8869680" y="3456432"/>
-            <a:ext cx="1325880" cy="1005840"/>
-          </a:xfrm>
-          <a:prstGeom prst="roundRect">
-            <a:avLst/>
-          </a:prstGeom>
-          <a:solidFill>
-            <a:srgbClr val="F6E1DC"/>
-          </a:solidFill>
-          <a:ln>
-            <a:solidFill>
-              <a:srgbClr val="F6E1DC"/>
-            </a:solidFill>
-          </a:ln>
-        </p:spPr>
-        <p:style>
-          <a:lnRef idx="1">
-            <a:schemeClr val="accent1"/>
-          </a:lnRef>
-          <a:fillRef idx="3">
-            <a:schemeClr val="accent1"/>
-          </a:fillRef>
-          <a:effectRef idx="2">
-            <a:schemeClr val="accent1"/>
-          </a:effectRef>
-          <a:fontRef idx="minor">
-            <a:schemeClr val="lt1"/>
-          </a:fontRef>
-        </p:style>
-        <p:txBody>
-          <a:bodyPr rtlCol="0" anchor="ctr"/>
-          <a:lstStyle/>
-          <a:p>
-            <a:pPr algn="ctr"/>
-          </a:p>
-        </p:txBody>
-      </p:sp>
-      <p:sp>
-        <p:nvSpPr>
-          <p:cNvPr id="20" name="TextBox 19"/>
-          <p:cNvSpPr txBox="1"/>
-          <p:nvPr/>
-        </p:nvSpPr>
-        <p:spPr>
-          <a:xfrm>
-            <a:off x="8961120" y="3529584"/>
-            <a:ext cx="1143000" cy="256032"/>
-          </a:xfrm>
-          <a:prstGeom prst="rect">
-            <a:avLst/>
-          </a:prstGeom>
-          <a:noFill/>
-        </p:spPr>
-        <p:txBody>
-          <a:bodyPr wrap="square" lIns="76200" rIns="76200" tIns="50800" bIns="50800" anchor="t">
-            <a:spAutoFit/>
-          </a:bodyPr>
-          <a:lstStyle/>
-          <a:p>
-            <a:pPr algn="ctr"/>
-            <a:r>
-              <a:rPr sz="1300" b="1">
-                <a:solidFill>
-                  <a:srgbClr val="11213E"/>
-                </a:solidFill>
-                <a:latin typeface="Georgia"/>
-              </a:rPr>
-              <a:t>Decide</a:t>
-            </a:r>
-          </a:p>
-        </p:txBody>
-      </p:sp>
-      <p:sp>
-        <p:nvSpPr>
-          <p:cNvPr id="21" name="TextBox 20"/>
-          <p:cNvSpPr txBox="1"/>
-          <p:nvPr/>
-        </p:nvSpPr>
-        <p:spPr>
-          <a:xfrm>
-            <a:off x="8942832" y="3803904"/>
-            <a:ext cx="1170432" cy="502920"/>
-          </a:xfrm>
-          <a:prstGeom prst="rect">
-            <a:avLst/>
-          </a:prstGeom>
-          <a:noFill/>
-        </p:spPr>
-        <p:txBody>
-          <a:bodyPr wrap="square" lIns="76200" rIns="76200" tIns="50800" bIns="50800" anchor="t">
-            <a:spAutoFit/>
-          </a:bodyPr>
-          <a:lstStyle/>
-          <a:p>
-            <a:pPr algn="ctr"/>
-            <a:r>
-              <a:rPr sz="1050" b="0">
-                <a:solidFill>
-                  <a:srgbClr val="1F2A37"/>
-                </a:solidFill>
-                <a:latin typeface="Aptos"/>
-              </a:rPr>
-              <a:t>Qualify and rank matches</a:t>
-            </a:r>
-          </a:p>
-        </p:txBody>
-      </p:sp>
-      <p:sp>
-        <p:nvSpPr>
-          <p:cNvPr id="22" name="Rounded Rectangle 21"/>
-          <p:cNvSpPr/>
-          <p:nvPr/>
-        </p:nvSpPr>
-        <p:spPr>
-          <a:xfrm>
-            <a:off x="5989320" y="4617720"/>
-            <a:ext cx="5257800" cy="914400"/>
-          </a:xfrm>
-          <a:prstGeom prst="roundRect">
-            <a:avLst/>
-          </a:prstGeom>
-          <a:solidFill>
-            <a:srgbClr val="EAEEF3"/>
-          </a:solidFill>
-          <a:ln>
-            <a:solidFill>
-              <a:srgbClr val="EAEEF3"/>
-            </a:solidFill>
-          </a:ln>
-        </p:spPr>
-        <p:style>
-          <a:lnRef idx="1">
-            <a:schemeClr val="accent1"/>
-          </a:lnRef>
-          <a:fillRef idx="3">
-            <a:schemeClr val="accent1"/>
-          </a:fillRef>
-          <a:effectRef idx="2">
-            <a:schemeClr val="accent1"/>
-          </a:effectRef>
-          <a:fontRef idx="minor">
-            <a:schemeClr val="lt1"/>
-          </a:fontRef>
-        </p:style>
-        <p:txBody>
-          <a:bodyPr rtlCol="0" anchor="ctr"/>
-          <a:lstStyle/>
-          <a:p>
-            <a:pPr algn="ctr"/>
-          </a:p>
-        </p:txBody>
-      </p:sp>
-      <p:sp>
-        <p:nvSpPr>
-          <p:cNvPr id="23" name="TextBox 22"/>
-          <p:cNvSpPr txBox="1"/>
-          <p:nvPr/>
-        </p:nvSpPr>
-        <p:spPr>
-          <a:xfrm>
-            <a:off x="6099048" y="4709160"/>
-            <a:ext cx="5038344" cy="310896"/>
-          </a:xfrm>
-          <a:prstGeom prst="rect">
-            <a:avLst/>
-          </a:prstGeom>
-          <a:noFill/>
-        </p:spPr>
-        <p:txBody>
-          <a:bodyPr wrap="square" lIns="76200" rIns="76200" tIns="50800" bIns="50800" anchor="t">
-            <a:spAutoFit/>
-          </a:bodyPr>
-          <a:lstStyle/>
-          <a:p>
-            <a:pPr algn="l"/>
-            <a:r>
-              <a:rPr sz="1400" b="1">
-                <a:solidFill>
-                  <a:srgbClr val="11213E"/>
-                </a:solidFill>
-                <a:latin typeface="Georgia"/>
-              </a:rPr>
-              <a:t>Central objective</a:t>
-            </a:r>
-          </a:p>
-        </p:txBody>
-      </p:sp>
-      <p:sp>
-        <p:nvSpPr>
-          <p:cNvPr id="24" name="TextBox 23"/>
-          <p:cNvSpPr txBox="1"/>
-          <p:nvPr/>
-        </p:nvSpPr>
-        <p:spPr>
-          <a:xfrm>
-            <a:off x="6062472" y="5038344"/>
-            <a:ext cx="5111496" cy="420624"/>
+            <a:off x="8394192" y="1837944"/>
+            <a:ext cx="3163824" cy="4032504"/>
           </a:xfrm>
           <a:prstGeom prst="rect">
             <a:avLst/>
@@ -5974,7 +7667,7 @@
                 </a:solidFill>
                 <a:latin typeface="Aptos"/>
               </a:rPr>
-              <a:t>Find candidates who genuinely satisfy requirements.</a:t>
+              <a:t>Mark competencies as required or preferred.</a:t>
             </a:r>
           </a:p>
           <a:p>
@@ -5990,14 +7683,62 @@
                 </a:solidFill>
                 <a:latin typeface="Aptos"/>
               </a:rPr>
-              <a:t>Avoid surfacing candidates who do not meet required competencies.</a:t>
-            </a:r>
-          </a:p>
-        </p:txBody>
-      </p:sp>
-      <p:sp>
-        <p:nvSpPr>
-          <p:cNvPr id="25" name="TextBox 24"/>
+              <a:t>Adjust ranking weights within defined bounds.</a:t>
+            </a:r>
+          </a:p>
+          <a:p>
+            <a:pPr>
+              <a:spcAft>
+                <a:spcPts val="700"/>
+              </a:spcAft>
+            </a:pPr>
+            <a:r>
+              <a:rPr sz="1150" b="0">
+                <a:solidFill>
+                  <a:srgbClr val="1F2A37"/>
+                </a:solidFill>
+                <a:latin typeface="Aptos"/>
+              </a:rPr>
+              <a:t>Generate qualification explanations.</a:t>
+            </a:r>
+          </a:p>
+          <a:p>
+            <a:pPr>
+              <a:spcAft>
+                <a:spcPts val="700"/>
+              </a:spcAft>
+            </a:pPr>
+            <a:r>
+              <a:rPr sz="1150" b="0">
+                <a:solidFill>
+                  <a:srgbClr val="1F2A37"/>
+                </a:solidFill>
+                <a:latin typeface="Aptos"/>
+              </a:rPr>
+              <a:t>Produce competency gap reports.</a:t>
+            </a:r>
+          </a:p>
+          <a:p>
+            <a:pPr>
+              <a:spcAft>
+                <a:spcPts val="700"/>
+              </a:spcAft>
+            </a:pPr>
+            <a:r>
+              <a:rPr sz="1150" b="0">
+                <a:solidFill>
+                  <a:srgbClr val="1F2A37"/>
+                </a:solidFill>
+                <a:latin typeface="Aptos"/>
+              </a:rPr>
+              <a:t>Filter results by later decided criteria.</a:t>
+            </a:r>
+          </a:p>
+        </p:txBody>
+      </p:sp>
+      <p:sp>
+        <p:nvSpPr>
+          <p:cNvPr id="15" name="TextBox 14"/>
           <p:cNvSpPr txBox="1"/>
           <p:nvPr/>
         </p:nvSpPr>
@@ -6025,7 +7766,7 @@
                 </a:solidFill>
                 <a:latin typeface="Aptos"/>
               </a:rPr>
-              <a:t>3</a:t>
+              <a:t>4</a:t>
             </a:r>
           </a:p>
         </p:txBody>
@@ -6038,7 +7779,7 @@
 </p:sld>
 </file>
 
-<file path=ppt/slides/slide4.xml><?xml version="1.0" encoding="utf-8"?>
+<file path=ppt/slides/slide5.xml><?xml version="1.0" encoding="utf-8"?>
 <p:sld xmlns:a="http://schemas.openxmlformats.org/drawingml/2006/main" xmlns:p="http://schemas.openxmlformats.org/presentationml/2006/main" xmlns:r="http://schemas.openxmlformats.org/officeDocument/2006/relationships">
   <p:cSld>
     <p:bg>
@@ -6110,7 +7851,7 @@
         <p:spPr>
           <a:xfrm>
             <a:off x="640080" y="502920"/>
-            <a:ext cx="8686800" cy="685800"/>
+            <a:ext cx="8869680" cy="658368"/>
           </a:xfrm>
           <a:prstGeom prst="rect">
             <a:avLst/>
@@ -6131,7 +7872,7 @@
                 </a:solidFill>
                 <a:latin typeface="Georgia"/>
               </a:rPr>
-              <a:t>Project Scope</a:t>
+              <a:t>Functional Requirements Overview</a:t>
             </a:r>
           </a:p>
         </p:txBody>
@@ -6144,8 +7885,8 @@
         </p:nvSpPr>
         <p:spPr>
           <a:xfrm>
-            <a:off x="658368" y="1097280"/>
-            <a:ext cx="8869680" cy="347472"/>
+            <a:off x="658368" y="1078992"/>
+            <a:ext cx="8869680" cy="329184"/>
           </a:xfrm>
           <a:prstGeom prst="rect">
             <a:avLst/>
@@ -6166,7 +7907,7 @@
                 </a:solidFill>
                 <a:latin typeface="Aptos"/>
               </a:rPr>
-              <a:t>What we will do, what we will not do, and what may be added later</a:t>
+              <a:t>The most important behaviours of the system</a:t>
             </a:r>
           </a:p>
         </p:txBody>
@@ -6179,8 +7920,8 @@
         </p:nvSpPr>
         <p:spPr>
           <a:xfrm>
-            <a:off x="9802368" y="566928"/>
-            <a:ext cx="1645920" cy="329184"/>
+            <a:off x="9710928" y="566928"/>
+            <a:ext cx="1783080" cy="329184"/>
           </a:xfrm>
           <a:prstGeom prst="roundRect">
             <a:avLst/>
@@ -6220,7 +7961,7 @@
                 </a:solidFill>
                 <a:latin typeface="Aptos"/>
               </a:rPr>
-              <a:t>Scope</a:t>
+              <a:t>Requirements</a:t>
             </a:r>
           </a:p>
         </p:txBody>
@@ -6233,8 +7974,143 @@
         </p:nvSpPr>
         <p:spPr>
           <a:xfrm>
-            <a:off x="566928" y="1417320"/>
-            <a:ext cx="3703320" cy="4526280"/>
+            <a:off x="658368" y="1508760"/>
+            <a:ext cx="2743200" cy="1645920"/>
+          </a:xfrm>
+          <a:prstGeom prst="roundRect">
+            <a:avLst/>
+          </a:prstGeom>
+          <a:solidFill>
+            <a:srgbClr val="E1EBF7"/>
+          </a:solidFill>
+          <a:ln>
+            <a:solidFill>
+              <a:srgbClr val="E1EBF7"/>
+            </a:solidFill>
+          </a:ln>
+        </p:spPr>
+        <p:style>
+          <a:lnRef idx="1">
+            <a:schemeClr val="accent1"/>
+          </a:lnRef>
+          <a:fillRef idx="3">
+            <a:schemeClr val="accent1"/>
+          </a:fillRef>
+          <a:effectRef idx="2">
+            <a:schemeClr val="accent1"/>
+          </a:effectRef>
+          <a:fontRef idx="minor">
+            <a:schemeClr val="lt1"/>
+          </a:fontRef>
+        </p:style>
+        <p:txBody>
+          <a:bodyPr rtlCol="0" anchor="ctr"/>
+          <a:lstStyle/>
+          <a:p>
+            <a:pPr algn="ctr"/>
+          </a:p>
+        </p:txBody>
+      </p:sp>
+      <p:sp>
+        <p:nvSpPr>
+          <p:cNvPr id="7" name="TextBox 6"/>
+          <p:cNvSpPr txBox="1"/>
+          <p:nvPr/>
+        </p:nvSpPr>
+        <p:spPr>
+          <a:xfrm>
+            <a:off x="768096" y="1600200"/>
+            <a:ext cx="2523744" cy="310896"/>
+          </a:xfrm>
+          <a:prstGeom prst="rect">
+            <a:avLst/>
+          </a:prstGeom>
+          <a:noFill/>
+        </p:spPr>
+        <p:txBody>
+          <a:bodyPr wrap="square" lIns="76200" rIns="76200" tIns="50800" bIns="50800" anchor="t">
+            <a:spAutoFit/>
+          </a:bodyPr>
+          <a:lstStyle/>
+          <a:p>
+            <a:pPr algn="l"/>
+            <a:r>
+              <a:rPr sz="1400" b="1">
+                <a:solidFill>
+                  <a:srgbClr val="11213E"/>
+                </a:solidFill>
+                <a:latin typeface="Georgia"/>
+              </a:rPr>
+              <a:t>Input and storage</a:t>
+            </a:r>
+          </a:p>
+        </p:txBody>
+      </p:sp>
+      <p:sp>
+        <p:nvSpPr>
+          <p:cNvPr id="8" name="TextBox 7"/>
+          <p:cNvSpPr txBox="1"/>
+          <p:nvPr/>
+        </p:nvSpPr>
+        <p:spPr>
+          <a:xfrm>
+            <a:off x="731520" y="1929384"/>
+            <a:ext cx="2596896" cy="1152144"/>
+          </a:xfrm>
+          <a:prstGeom prst="rect">
+            <a:avLst/>
+          </a:prstGeom>
+          <a:noFill/>
+        </p:spPr>
+        <p:txBody>
+          <a:bodyPr wrap="square" lIns="101600" rIns="101600" tIns="50800" bIns="50800">
+            <a:spAutoFit/>
+          </a:bodyPr>
+          <a:lstStyle/>
+          <a:p>
+            <a:pPr>
+              <a:spcAft>
+                <a:spcPts val="700"/>
+              </a:spcAft>
+            </a:pPr>
+            <a:r>
+              <a:rPr sz="1150" b="0">
+                <a:solidFill>
+                  <a:srgbClr val="1F2A37"/>
+                </a:solidFill>
+                <a:latin typeface="Aptos"/>
+              </a:rPr>
+              <a:t>Upload or enter resumes and job descriptions.</a:t>
+            </a:r>
+          </a:p>
+          <a:p>
+            <a:pPr>
+              <a:spcAft>
+                <a:spcPts val="700"/>
+              </a:spcAft>
+            </a:pPr>
+            <a:r>
+              <a:rPr sz="1150" b="0">
+                <a:solidFill>
+                  <a:srgbClr val="1F2A37"/>
+                </a:solidFill>
+                <a:latin typeface="Aptos"/>
+              </a:rPr>
+              <a:t>Store structured profiles for later matching.</a:t>
+            </a:r>
+          </a:p>
+        </p:txBody>
+      </p:sp>
+      <p:sp>
+        <p:nvSpPr>
+          <p:cNvPr id="9" name="Rounded Rectangle 8"/>
+          <p:cNvSpPr/>
+          <p:nvPr/>
+        </p:nvSpPr>
+        <p:spPr>
+          <a:xfrm>
+            <a:off x="3611880" y="1508760"/>
+            <a:ext cx="2743200" cy="1645920"/>
           </a:xfrm>
           <a:prstGeom prst="roundRect">
             <a:avLst/>
@@ -6272,14 +8148,14 @@
       </p:sp>
       <p:sp>
         <p:nvSpPr>
-          <p:cNvPr id="7" name="TextBox 6"/>
+          <p:cNvPr id="10" name="TextBox 9"/>
           <p:cNvSpPr txBox="1"/>
           <p:nvPr/>
         </p:nvSpPr>
         <p:spPr>
           <a:xfrm>
-            <a:off x="676656" y="1508760"/>
-            <a:ext cx="3483864" cy="310896"/>
+            <a:off x="3721608" y="1600200"/>
+            <a:ext cx="2523744" cy="310896"/>
           </a:xfrm>
           <a:prstGeom prst="rect">
             <a:avLst/>
@@ -6300,21 +8176,21 @@
                 </a:solidFill>
                 <a:latin typeface="Georgia"/>
               </a:rPr>
-              <a:t>We will definitely do</a:t>
-            </a:r>
-          </a:p>
-        </p:txBody>
-      </p:sp>
-      <p:sp>
-        <p:nvSpPr>
-          <p:cNvPr id="8" name="TextBox 7"/>
+              <a:t>Competency profiling</a:t>
+            </a:r>
+          </a:p>
+        </p:txBody>
+      </p:sp>
+      <p:sp>
+        <p:nvSpPr>
+          <p:cNvPr id="11" name="TextBox 10"/>
           <p:cNvSpPr txBox="1"/>
           <p:nvPr/>
         </p:nvSpPr>
         <p:spPr>
           <a:xfrm>
-            <a:off x="640080" y="1837944"/>
-            <a:ext cx="3557016" cy="4032504"/>
+            <a:off x="3685032" y="1929384"/>
+            <a:ext cx="2596896" cy="1152144"/>
           </a:xfrm>
           <a:prstGeom prst="rect">
             <a:avLst/>
@@ -6339,7 +8215,7 @@
                 </a:solidFill>
                 <a:latin typeface="Aptos"/>
               </a:rPr>
-              <a:t>Accept resumes and job descriptions as input.</a:t>
+              <a:t>Extract competencies from unstructured text.</a:t>
             </a:r>
           </a:p>
           <a:p>
@@ -6355,9 +8231,112 @@
                 </a:solidFill>
                 <a:latin typeface="Aptos"/>
               </a:rPr>
-              <a:t>Extract competencies from unstructured text.</a:t>
-            </a:r>
-          </a:p>
+              <a:t>Map extracted signals to O*NET descriptors.</a:t>
+            </a:r>
+          </a:p>
+        </p:txBody>
+      </p:sp>
+      <p:sp>
+        <p:nvSpPr>
+          <p:cNvPr id="12" name="Rounded Rectangle 11"/>
+          <p:cNvSpPr/>
+          <p:nvPr/>
+        </p:nvSpPr>
+        <p:spPr>
+          <a:xfrm>
+            <a:off x="6565392" y="1508760"/>
+            <a:ext cx="2697480" cy="1645920"/>
+          </a:xfrm>
+          <a:prstGeom prst="roundRect">
+            <a:avLst/>
+          </a:prstGeom>
+          <a:solidFill>
+            <a:srgbClr val="F7EBC7"/>
+          </a:solidFill>
+          <a:ln>
+            <a:solidFill>
+              <a:srgbClr val="F7EBC7"/>
+            </a:solidFill>
+          </a:ln>
+        </p:spPr>
+        <p:style>
+          <a:lnRef idx="1">
+            <a:schemeClr val="accent1"/>
+          </a:lnRef>
+          <a:fillRef idx="3">
+            <a:schemeClr val="accent1"/>
+          </a:fillRef>
+          <a:effectRef idx="2">
+            <a:schemeClr val="accent1"/>
+          </a:effectRef>
+          <a:fontRef idx="minor">
+            <a:schemeClr val="lt1"/>
+          </a:fontRef>
+        </p:style>
+        <p:txBody>
+          <a:bodyPr rtlCol="0" anchor="ctr"/>
+          <a:lstStyle/>
+          <a:p>
+            <a:pPr algn="ctr"/>
+          </a:p>
+        </p:txBody>
+      </p:sp>
+      <p:sp>
+        <p:nvSpPr>
+          <p:cNvPr id="13" name="TextBox 12"/>
+          <p:cNvSpPr txBox="1"/>
+          <p:nvPr/>
+        </p:nvSpPr>
+        <p:spPr>
+          <a:xfrm>
+            <a:off x="6675120" y="1600200"/>
+            <a:ext cx="2478024" cy="310896"/>
+          </a:xfrm>
+          <a:prstGeom prst="rect">
+            <a:avLst/>
+          </a:prstGeom>
+          <a:noFill/>
+        </p:spPr>
+        <p:txBody>
+          <a:bodyPr wrap="square" lIns="76200" rIns="76200" tIns="50800" bIns="50800" anchor="t">
+            <a:spAutoFit/>
+          </a:bodyPr>
+          <a:lstStyle/>
+          <a:p>
+            <a:pPr algn="l"/>
+            <a:r>
+              <a:rPr sz="1400" b="1">
+                <a:solidFill>
+                  <a:srgbClr val="11213E"/>
+                </a:solidFill>
+                <a:latin typeface="Georgia"/>
+              </a:rPr>
+              <a:t>Qualification logic</a:t>
+            </a:r>
+          </a:p>
+        </p:txBody>
+      </p:sp>
+      <p:sp>
+        <p:nvSpPr>
+          <p:cNvPr id="14" name="TextBox 13"/>
+          <p:cNvSpPr txBox="1"/>
+          <p:nvPr/>
+        </p:nvSpPr>
+        <p:spPr>
+          <a:xfrm>
+            <a:off x="6638544" y="1929384"/>
+            <a:ext cx="2551176" cy="1152144"/>
+          </a:xfrm>
+          <a:prstGeom prst="rect">
+            <a:avLst/>
+          </a:prstGeom>
+          <a:noFill/>
+        </p:spPr>
+        <p:txBody>
+          <a:bodyPr wrap="square" lIns="101600" rIns="101600" tIns="50800" bIns="50800">
+            <a:spAutoFit/>
+          </a:bodyPr>
+          <a:lstStyle/>
           <a:p>
             <a:pPr>
               <a:spcAft>
@@ -6371,7 +8350,7 @@
                 </a:solidFill>
                 <a:latin typeface="Aptos"/>
               </a:rPr>
-              <a:t>Map extracted competencies to O*NET descriptors.</a:t>
+              <a:t>Determine whether required competencies are satisfied.</a:t>
             </a:r>
           </a:p>
           <a:p>
@@ -6387,53 +8366,21 @@
                 </a:solidFill>
                 <a:latin typeface="Aptos"/>
               </a:rPr>
-              <a:t>Generate structured competency profiles for jobs and candidates.</a:t>
-            </a:r>
-          </a:p>
-          <a:p>
-            <a:pPr>
-              <a:spcAft>
-                <a:spcPts val="700"/>
-              </a:spcAft>
-            </a:pPr>
-            <a:r>
-              <a:rPr sz="1150" b="0">
-                <a:solidFill>
-                  <a:srgbClr val="1F2A37"/>
-                </a:solidFill>
-                <a:latin typeface="Aptos"/>
-              </a:rPr>
-              <a:t>Determine whether required competencies are satisfied.</a:t>
-            </a:r>
-          </a:p>
-          <a:p>
-            <a:pPr>
-              <a:spcAft>
-                <a:spcPts val="700"/>
-              </a:spcAft>
-            </a:pPr>
-            <a:r>
-              <a:rPr sz="1150" b="0">
-                <a:solidFill>
-                  <a:srgbClr val="1F2A37"/>
-                </a:solidFill>
-                <a:latin typeface="Aptos"/>
-              </a:rPr>
-              <a:t>Rank qualified candidates and relevant jobs.</a:t>
-            </a:r>
-          </a:p>
-        </p:txBody>
-      </p:sp>
-      <p:sp>
-        <p:nvSpPr>
-          <p:cNvPr id="9" name="Rounded Rectangle 8"/>
+              <a:t>Separate qualified from not qualified cases.</a:t>
+            </a:r>
+          </a:p>
+        </p:txBody>
+      </p:sp>
+      <p:sp>
+        <p:nvSpPr>
+          <p:cNvPr id="15" name="Rounded Rectangle 14"/>
           <p:cNvSpPr/>
           <p:nvPr/>
         </p:nvSpPr>
         <p:spPr>
           <a:xfrm>
-            <a:off x="4471416" y="1417320"/>
-            <a:ext cx="3657600" cy="4526280"/>
+            <a:off x="9473184" y="1508760"/>
+            <a:ext cx="2011680" cy="1645920"/>
           </a:xfrm>
           <a:prstGeom prst="roundRect">
             <a:avLst/>
@@ -6471,14 +8418,14 @@
       </p:sp>
       <p:sp>
         <p:nvSpPr>
-          <p:cNvPr id="10" name="TextBox 9"/>
+          <p:cNvPr id="16" name="TextBox 15"/>
           <p:cNvSpPr txBox="1"/>
           <p:nvPr/>
         </p:nvSpPr>
         <p:spPr>
           <a:xfrm>
-            <a:off x="4581144" y="1508760"/>
-            <a:ext cx="3438144" cy="310896"/>
+            <a:off x="9582912" y="1600200"/>
+            <a:ext cx="1792224" cy="310896"/>
           </a:xfrm>
           <a:prstGeom prst="rect">
             <a:avLst/>
@@ -6499,21 +8446,21 @@
                 </a:solidFill>
                 <a:latin typeface="Georgia"/>
               </a:rPr>
-              <a:t>We will definitely not do</a:t>
-            </a:r>
-          </a:p>
-        </p:txBody>
-      </p:sp>
-      <p:sp>
-        <p:nvSpPr>
-          <p:cNvPr id="11" name="TextBox 10"/>
+              <a:t>Ranked results</a:t>
+            </a:r>
+          </a:p>
+        </p:txBody>
+      </p:sp>
+      <p:sp>
+        <p:nvSpPr>
+          <p:cNvPr id="17" name="TextBox 16"/>
           <p:cNvSpPr txBox="1"/>
           <p:nvPr/>
         </p:nvSpPr>
         <p:spPr>
           <a:xfrm>
-            <a:off x="4544568" y="1837944"/>
-            <a:ext cx="3511296" cy="4032504"/>
+            <a:off x="9546336" y="1929384"/>
+            <a:ext cx="1865376" cy="1152144"/>
           </a:xfrm>
           <a:prstGeom prst="rect">
             <a:avLst/>
@@ -6538,7 +8485,7 @@
                 </a:solidFill>
                 <a:latin typeface="Aptos"/>
               </a:rPr>
-              <a:t>Build a complete hiring platform.</a:t>
+              <a:t>Rank candidates for employers.</a:t>
             </a:r>
           </a:p>
           <a:p>
@@ -6554,9 +8501,112 @@
                 </a:solidFill>
                 <a:latin typeface="Aptos"/>
               </a:rPr>
-              <a:t>Handle interviews, onboarding, or final hiring decisions.</a:t>
-            </a:r>
-          </a:p>
+              <a:t>Rank jobs for candidates.</a:t>
+            </a:r>
+          </a:p>
+        </p:txBody>
+      </p:sp>
+      <p:sp>
+        <p:nvSpPr>
+          <p:cNvPr id="18" name="Rounded Rectangle 17"/>
+          <p:cNvSpPr/>
+          <p:nvPr/>
+        </p:nvSpPr>
+        <p:spPr>
+          <a:xfrm>
+            <a:off x="1325880" y="3730752"/>
+            <a:ext cx="4617720" cy="1554480"/>
+          </a:xfrm>
+          <a:prstGeom prst="roundRect">
+            <a:avLst/>
+          </a:prstGeom>
+          <a:solidFill>
+            <a:srgbClr val="EAEEF3"/>
+          </a:solidFill>
+          <a:ln>
+            <a:solidFill>
+              <a:srgbClr val="EAEEF3"/>
+            </a:solidFill>
+          </a:ln>
+        </p:spPr>
+        <p:style>
+          <a:lnRef idx="1">
+            <a:schemeClr val="accent1"/>
+          </a:lnRef>
+          <a:fillRef idx="3">
+            <a:schemeClr val="accent1"/>
+          </a:fillRef>
+          <a:effectRef idx="2">
+            <a:schemeClr val="accent1"/>
+          </a:effectRef>
+          <a:fontRef idx="minor">
+            <a:schemeClr val="lt1"/>
+          </a:fontRef>
+        </p:style>
+        <p:txBody>
+          <a:bodyPr rtlCol="0" anchor="ctr"/>
+          <a:lstStyle/>
+          <a:p>
+            <a:pPr algn="ctr"/>
+          </a:p>
+        </p:txBody>
+      </p:sp>
+      <p:sp>
+        <p:nvSpPr>
+          <p:cNvPr id="19" name="TextBox 18"/>
+          <p:cNvSpPr txBox="1"/>
+          <p:nvPr/>
+        </p:nvSpPr>
+        <p:spPr>
+          <a:xfrm>
+            <a:off x="1435608" y="3822192"/>
+            <a:ext cx="4398264" cy="310896"/>
+          </a:xfrm>
+          <a:prstGeom prst="rect">
+            <a:avLst/>
+          </a:prstGeom>
+          <a:noFill/>
+        </p:spPr>
+        <p:txBody>
+          <a:bodyPr wrap="square" lIns="76200" rIns="76200" tIns="50800" bIns="50800" anchor="t">
+            <a:spAutoFit/>
+          </a:bodyPr>
+          <a:lstStyle/>
+          <a:p>
+            <a:pPr algn="l"/>
+            <a:r>
+              <a:rPr sz="1400" b="1">
+                <a:solidFill>
+                  <a:srgbClr val="11213E"/>
+                </a:solidFill>
+                <a:latin typeface="Georgia"/>
+              </a:rPr>
+              <a:t>Important supporting behaviour</a:t>
+            </a:r>
+          </a:p>
+        </p:txBody>
+      </p:sp>
+      <p:sp>
+        <p:nvSpPr>
+          <p:cNvPr id="20" name="TextBox 19"/>
+          <p:cNvSpPr txBox="1"/>
+          <p:nvPr/>
+        </p:nvSpPr>
+        <p:spPr>
+          <a:xfrm>
+            <a:off x="1399032" y="4151376"/>
+            <a:ext cx="4471416" cy="1060704"/>
+          </a:xfrm>
+          <a:prstGeom prst="rect">
+            <a:avLst/>
+          </a:prstGeom>
+          <a:noFill/>
+        </p:spPr>
+        <p:txBody>
+          <a:bodyPr wrap="square" lIns="101600" rIns="101600" tIns="50800" bIns="50800">
+            <a:spAutoFit/>
+          </a:bodyPr>
+          <a:lstStyle/>
           <a:p>
             <a:pPr>
               <a:spcAft>
@@ -6570,7 +8620,7 @@
                 </a:solidFill>
                 <a:latin typeface="Aptos"/>
               </a:rPr>
-              <a:t>Predict actual job performance.</a:t>
+              <a:t>Show the most useful results, not just raw matches.</a:t>
             </a:r>
           </a:p>
           <a:p>
@@ -6586,31 +8636,31 @@
                 </a:solidFill>
                 <a:latin typeface="Aptos"/>
               </a:rPr>
-              <a:t>Guarantee real-world hiring accuracy from resume text alone.</a:t>
-            </a:r>
-          </a:p>
-        </p:txBody>
-      </p:sp>
-      <p:sp>
-        <p:nvSpPr>
-          <p:cNvPr id="12" name="Rounded Rectangle 11"/>
+              <a:t>Keep the design realistic for a web application workflow.</a:t>
+            </a:r>
+          </a:p>
+        </p:txBody>
+      </p:sp>
+      <p:sp>
+        <p:nvSpPr>
+          <p:cNvPr id="21" name="Rounded Rectangle 20"/>
           <p:cNvSpPr/>
           <p:nvPr/>
         </p:nvSpPr>
         <p:spPr>
           <a:xfrm>
-            <a:off x="8302752" y="1417320"/>
-            <a:ext cx="3337560" cy="4526280"/>
+            <a:off x="6236208" y="3730752"/>
+            <a:ext cx="4663440" cy="1554480"/>
           </a:xfrm>
           <a:prstGeom prst="roundRect">
             <a:avLst/>
           </a:prstGeom>
           <a:solidFill>
-            <a:srgbClr val="F7EBC7"/>
+            <a:srgbClr val="E1EBF7"/>
           </a:solidFill>
           <a:ln>
             <a:solidFill>
-              <a:srgbClr val="F7EBC7"/>
+              <a:srgbClr val="E1EBF7"/>
             </a:solidFill>
           </a:ln>
         </p:spPr>
@@ -6638,14 +8688,14 @@
       </p:sp>
       <p:sp>
         <p:nvSpPr>
-          <p:cNvPr id="13" name="TextBox 12"/>
+          <p:cNvPr id="22" name="TextBox 21"/>
           <p:cNvSpPr txBox="1"/>
           <p:nvPr/>
         </p:nvSpPr>
         <p:spPr>
           <a:xfrm>
-            <a:off x="8412480" y="1508760"/>
-            <a:ext cx="3118104" cy="310896"/>
+            <a:off x="6345936" y="3822192"/>
+            <a:ext cx="4443984" cy="310896"/>
           </a:xfrm>
           <a:prstGeom prst="rect">
             <a:avLst/>
@@ -6666,21 +8716,21 @@
                 </a:solidFill>
                 <a:latin typeface="Georgia"/>
               </a:rPr>
-              <a:t>We might do if time permits</a:t>
-            </a:r>
-          </a:p>
-        </p:txBody>
-      </p:sp>
-      <p:sp>
-        <p:nvSpPr>
-          <p:cNvPr id="14" name="TextBox 13"/>
+              <a:t>Stretch features stay separate</a:t>
+            </a:r>
+          </a:p>
+        </p:txBody>
+      </p:sp>
+      <p:sp>
+        <p:nvSpPr>
+          <p:cNvPr id="23" name="TextBox 22"/>
           <p:cNvSpPr txBox="1"/>
           <p:nvPr/>
         </p:nvSpPr>
         <p:spPr>
           <a:xfrm>
-            <a:off x="8375904" y="1837944"/>
-            <a:ext cx="3191256" cy="4032504"/>
+            <a:off x="6309360" y="4151376"/>
+            <a:ext cx="4517136" cy="1060704"/>
           </a:xfrm>
           <a:prstGeom prst="rect">
             <a:avLst/>
@@ -6705,7 +8755,7 @@
                 </a:solidFill>
                 <a:latin typeface="Aptos"/>
               </a:rPr>
-              <a:t>Mark competencies as required or preferred.</a:t>
+              <a:t>Explanation, weighting controls, preferred vs required tags, and gap reports are optional additions.</a:t>
             </a:r>
           </a:p>
           <a:p>
@@ -6721,62 +8771,14 @@
                 </a:solidFill>
                 <a:latin typeface="Aptos"/>
               </a:rPr>
-              <a:t>Adjust ranking weights within limits.</a:t>
-            </a:r>
-          </a:p>
-          <a:p>
-            <a:pPr>
-              <a:spcAft>
-                <a:spcPts val="700"/>
-              </a:spcAft>
-            </a:pPr>
-            <a:r>
-              <a:rPr sz="1150" b="0">
-                <a:solidFill>
-                  <a:srgbClr val="1F2A37"/>
-                </a:solidFill>
-                <a:latin typeface="Aptos"/>
-              </a:rPr>
-              <a:t>Generate qualification explanations.</a:t>
-            </a:r>
-          </a:p>
-          <a:p>
-            <a:pPr>
-              <a:spcAft>
-                <a:spcPts val="700"/>
-              </a:spcAft>
-            </a:pPr>
-            <a:r>
-              <a:rPr sz="1150" b="0">
-                <a:solidFill>
-                  <a:srgbClr val="1F2A37"/>
-                </a:solidFill>
-                <a:latin typeface="Aptos"/>
-              </a:rPr>
-              <a:t>Produce competency gap reports.</a:t>
-            </a:r>
-          </a:p>
-          <a:p>
-            <a:pPr>
-              <a:spcAft>
-                <a:spcPts val="700"/>
-              </a:spcAft>
-            </a:pPr>
-            <a:r>
-              <a:rPr sz="1150" b="0">
-                <a:solidFill>
-                  <a:srgbClr val="1F2A37"/>
-                </a:solidFill>
-                <a:latin typeface="Aptos"/>
-              </a:rPr>
-              <a:t>Add user result filters.</a:t>
-            </a:r>
-          </a:p>
-        </p:txBody>
-      </p:sp>
-      <p:sp>
-        <p:nvSpPr>
-          <p:cNvPr id="15" name="TextBox 14"/>
+              <a:t>They are not presented as guaranteed deliverables.</a:t>
+            </a:r>
+          </a:p>
+        </p:txBody>
+      </p:sp>
+      <p:sp>
+        <p:nvSpPr>
+          <p:cNvPr id="24" name="TextBox 23"/>
           <p:cNvSpPr txBox="1"/>
           <p:nvPr/>
         </p:nvSpPr>
@@ -6804,7 +8806,7 @@
                 </a:solidFill>
                 <a:latin typeface="Aptos"/>
               </a:rPr>
-              <a:t>4</a:t>
+              <a:t>5</a:t>
             </a:r>
           </a:p>
         </p:txBody>
@@ -6817,7 +8819,7 @@
 </p:sld>
 </file>
 
-<file path=ppt/slides/slide5.xml><?xml version="1.0" encoding="utf-8"?>
+<file path=ppt/slides/slide6.xml><?xml version="1.0" encoding="utf-8"?>
 <p:sld xmlns:a="http://schemas.openxmlformats.org/drawingml/2006/main" xmlns:p="http://schemas.openxmlformats.org/presentationml/2006/main" xmlns:r="http://schemas.openxmlformats.org/officeDocument/2006/relationships">
   <p:cSld>
     <p:bg>
@@ -6889,7 +8891,7 @@
         <p:spPr>
           <a:xfrm>
             <a:off x="640080" y="502920"/>
-            <a:ext cx="8686800" cy="685800"/>
+            <a:ext cx="8869680" cy="658368"/>
           </a:xfrm>
           <a:prstGeom prst="rect">
             <a:avLst/>
@@ -6910,7 +8912,7 @@
                 </a:solidFill>
                 <a:latin typeface="Georgia"/>
               </a:rPr>
-              <a:t>Technical Issues and Why the Project Is Non-Trivial</a:t>
+              <a:t>System Flow and Methodology</a:t>
             </a:r>
           </a:p>
         </p:txBody>
@@ -6923,8 +8925,8 @@
         </p:nvSpPr>
         <p:spPr>
           <a:xfrm>
-            <a:off x="658368" y="1097280"/>
-            <a:ext cx="8869680" cy="347472"/>
+            <a:off x="658368" y="1078992"/>
+            <a:ext cx="8869680" cy="329184"/>
           </a:xfrm>
           <a:prstGeom prst="rect">
             <a:avLst/>
@@ -6945,7 +8947,7 @@
                 </a:solidFill>
                 <a:latin typeface="Aptos"/>
               </a:rPr>
-              <a:t>The hard parts are modelling and evaluation, not just the interface</a:t>
+              <a:t>From document input to ranked recommendations</a:t>
             </a:r>
           </a:p>
         </p:txBody>
@@ -6958,8 +8960,8 @@
         </p:nvSpPr>
         <p:spPr>
           <a:xfrm>
-            <a:off x="9802368" y="566928"/>
-            <a:ext cx="1645920" cy="329184"/>
+            <a:off x="9710928" y="566928"/>
+            <a:ext cx="1783080" cy="329184"/>
           </a:xfrm>
           <a:prstGeom prst="roundRect">
             <a:avLst/>
@@ -6999,7 +9001,7 @@
                 </a:solidFill>
                 <a:latin typeface="Aptos"/>
               </a:rPr>
-              <a:t>Challenge</a:t>
+              <a:t>Method</a:t>
             </a:r>
           </a:p>
         </p:txBody>
@@ -7012,8 +9014,328 @@
         </p:nvSpPr>
         <p:spPr>
           <a:xfrm>
-            <a:off x="658368" y="1554480"/>
-            <a:ext cx="2606040" cy="1828800"/>
+            <a:off x="822960" y="1828800"/>
+            <a:ext cx="1325880" cy="1005840"/>
+          </a:xfrm>
+          <a:prstGeom prst="roundRect">
+            <a:avLst/>
+          </a:prstGeom>
+          <a:solidFill>
+            <a:srgbClr val="F7EBC7"/>
+          </a:solidFill>
+          <a:ln>
+            <a:solidFill>
+              <a:srgbClr val="F7EBC7"/>
+            </a:solidFill>
+          </a:ln>
+        </p:spPr>
+        <p:style>
+          <a:lnRef idx="1">
+            <a:schemeClr val="accent1"/>
+          </a:lnRef>
+          <a:fillRef idx="3">
+            <a:schemeClr val="accent1"/>
+          </a:fillRef>
+          <a:effectRef idx="2">
+            <a:schemeClr val="accent1"/>
+          </a:effectRef>
+          <a:fontRef idx="minor">
+            <a:schemeClr val="lt1"/>
+          </a:fontRef>
+        </p:style>
+        <p:txBody>
+          <a:bodyPr rtlCol="0" anchor="ctr"/>
+          <a:lstStyle/>
+          <a:p>
+            <a:pPr algn="ctr"/>
+          </a:p>
+        </p:txBody>
+      </p:sp>
+      <p:sp>
+        <p:nvSpPr>
+          <p:cNvPr id="7" name="TextBox 6"/>
+          <p:cNvSpPr txBox="1"/>
+          <p:nvPr/>
+        </p:nvSpPr>
+        <p:spPr>
+          <a:xfrm>
+            <a:off x="914400" y="1901952"/>
+            <a:ext cx="1143000" cy="256032"/>
+          </a:xfrm>
+          <a:prstGeom prst="rect">
+            <a:avLst/>
+          </a:prstGeom>
+          <a:noFill/>
+        </p:spPr>
+        <p:txBody>
+          <a:bodyPr wrap="square" lIns="76200" rIns="76200" tIns="50800" bIns="50800" anchor="t">
+            <a:spAutoFit/>
+          </a:bodyPr>
+          <a:lstStyle/>
+          <a:p>
+            <a:pPr algn="ctr"/>
+            <a:r>
+              <a:rPr sz="1300" b="1">
+                <a:solidFill>
+                  <a:srgbClr val="11213E"/>
+                </a:solidFill>
+                <a:latin typeface="Georgia"/>
+              </a:rPr>
+              <a:t>1. Collect</a:t>
+            </a:r>
+          </a:p>
+        </p:txBody>
+      </p:sp>
+      <p:sp>
+        <p:nvSpPr>
+          <p:cNvPr id="8" name="TextBox 7"/>
+          <p:cNvSpPr txBox="1"/>
+          <p:nvPr/>
+        </p:nvSpPr>
+        <p:spPr>
+          <a:xfrm>
+            <a:off x="896112" y="2176272"/>
+            <a:ext cx="1170432" cy="502920"/>
+          </a:xfrm>
+          <a:prstGeom prst="rect">
+            <a:avLst/>
+          </a:prstGeom>
+          <a:noFill/>
+        </p:spPr>
+        <p:txBody>
+          <a:bodyPr wrap="square" lIns="76200" rIns="76200" tIns="50800" bIns="50800" anchor="t">
+            <a:spAutoFit/>
+          </a:bodyPr>
+          <a:lstStyle/>
+          <a:p>
+            <a:pPr algn="ctr"/>
+            <a:r>
+              <a:rPr sz="1050" b="0">
+                <a:solidFill>
+                  <a:srgbClr val="1F2A37"/>
+                </a:solidFill>
+                <a:latin typeface="Aptos"/>
+              </a:rPr>
+              <a:t>Candidate resumes and employer job descriptions</a:t>
+            </a:r>
+          </a:p>
+        </p:txBody>
+      </p:sp>
+      <p:sp>
+        <p:nvSpPr>
+          <p:cNvPr id="9" name="Chevron 8"/>
+          <p:cNvSpPr/>
+          <p:nvPr/>
+        </p:nvSpPr>
+        <p:spPr>
+          <a:xfrm>
+            <a:off x="2176272" y="2084831"/>
+            <a:ext cx="384048" cy="493776"/>
+          </a:xfrm>
+          <a:prstGeom prst="chevron">
+            <a:avLst/>
+          </a:prstGeom>
+          <a:solidFill>
+            <a:srgbClr val="E0B44A"/>
+          </a:solidFill>
+          <a:ln>
+            <a:solidFill>
+              <a:srgbClr val="E0B44A"/>
+            </a:solidFill>
+          </a:ln>
+        </p:spPr>
+        <p:style>
+          <a:lnRef idx="1">
+            <a:schemeClr val="accent1"/>
+          </a:lnRef>
+          <a:fillRef idx="3">
+            <a:schemeClr val="accent1"/>
+          </a:fillRef>
+          <a:effectRef idx="2">
+            <a:schemeClr val="accent1"/>
+          </a:effectRef>
+          <a:fontRef idx="minor">
+            <a:schemeClr val="lt1"/>
+          </a:fontRef>
+        </p:style>
+        <p:txBody>
+          <a:bodyPr rtlCol="0" anchor="ctr"/>
+          <a:lstStyle/>
+          <a:p>
+            <a:pPr algn="ctr"/>
+          </a:p>
+        </p:txBody>
+      </p:sp>
+      <p:sp>
+        <p:nvSpPr>
+          <p:cNvPr id="10" name="Rounded Rectangle 9"/>
+          <p:cNvSpPr/>
+          <p:nvPr/>
+        </p:nvSpPr>
+        <p:spPr>
+          <a:xfrm>
+            <a:off x="2633472" y="1828800"/>
+            <a:ext cx="1325880" cy="1005840"/>
+          </a:xfrm>
+          <a:prstGeom prst="roundRect">
+            <a:avLst/>
+          </a:prstGeom>
+          <a:solidFill>
+            <a:srgbClr val="E4F2EC"/>
+          </a:solidFill>
+          <a:ln>
+            <a:solidFill>
+              <a:srgbClr val="E4F2EC"/>
+            </a:solidFill>
+          </a:ln>
+        </p:spPr>
+        <p:style>
+          <a:lnRef idx="1">
+            <a:schemeClr val="accent1"/>
+          </a:lnRef>
+          <a:fillRef idx="3">
+            <a:schemeClr val="accent1"/>
+          </a:fillRef>
+          <a:effectRef idx="2">
+            <a:schemeClr val="accent1"/>
+          </a:effectRef>
+          <a:fontRef idx="minor">
+            <a:schemeClr val="lt1"/>
+          </a:fontRef>
+        </p:style>
+        <p:txBody>
+          <a:bodyPr rtlCol="0" anchor="ctr"/>
+          <a:lstStyle/>
+          <a:p>
+            <a:pPr algn="ctr"/>
+          </a:p>
+        </p:txBody>
+      </p:sp>
+      <p:sp>
+        <p:nvSpPr>
+          <p:cNvPr id="11" name="TextBox 10"/>
+          <p:cNvSpPr txBox="1"/>
+          <p:nvPr/>
+        </p:nvSpPr>
+        <p:spPr>
+          <a:xfrm>
+            <a:off x="2724912" y="1901952"/>
+            <a:ext cx="1143000" cy="256032"/>
+          </a:xfrm>
+          <a:prstGeom prst="rect">
+            <a:avLst/>
+          </a:prstGeom>
+          <a:noFill/>
+        </p:spPr>
+        <p:txBody>
+          <a:bodyPr wrap="square" lIns="76200" rIns="76200" tIns="50800" bIns="50800" anchor="t">
+            <a:spAutoFit/>
+          </a:bodyPr>
+          <a:lstStyle/>
+          <a:p>
+            <a:pPr algn="ctr"/>
+            <a:r>
+              <a:rPr sz="1300" b="1">
+                <a:solidFill>
+                  <a:srgbClr val="11213E"/>
+                </a:solidFill>
+                <a:latin typeface="Georgia"/>
+              </a:rPr>
+              <a:t>2. Extract</a:t>
+            </a:r>
+          </a:p>
+        </p:txBody>
+      </p:sp>
+      <p:sp>
+        <p:nvSpPr>
+          <p:cNvPr id="12" name="TextBox 11"/>
+          <p:cNvSpPr txBox="1"/>
+          <p:nvPr/>
+        </p:nvSpPr>
+        <p:spPr>
+          <a:xfrm>
+            <a:off x="2706624" y="2176272"/>
+            <a:ext cx="1170432" cy="502920"/>
+          </a:xfrm>
+          <a:prstGeom prst="rect">
+            <a:avLst/>
+          </a:prstGeom>
+          <a:noFill/>
+        </p:spPr>
+        <p:txBody>
+          <a:bodyPr wrap="square" lIns="76200" rIns="76200" tIns="50800" bIns="50800" anchor="t">
+            <a:spAutoFit/>
+          </a:bodyPr>
+          <a:lstStyle/>
+          <a:p>
+            <a:pPr algn="ctr"/>
+            <a:r>
+              <a:rPr sz="1050" b="0">
+                <a:solidFill>
+                  <a:srgbClr val="1F2A37"/>
+                </a:solidFill>
+                <a:latin typeface="Aptos"/>
+              </a:rPr>
+              <a:t>Find competency signals in unstructured text</a:t>
+            </a:r>
+          </a:p>
+        </p:txBody>
+      </p:sp>
+      <p:sp>
+        <p:nvSpPr>
+          <p:cNvPr id="13" name="Chevron 12"/>
+          <p:cNvSpPr/>
+          <p:nvPr/>
+        </p:nvSpPr>
+        <p:spPr>
+          <a:xfrm>
+            <a:off x="3986784" y="2084831"/>
+            <a:ext cx="384048" cy="493776"/>
+          </a:xfrm>
+          <a:prstGeom prst="chevron">
+            <a:avLst/>
+          </a:prstGeom>
+          <a:solidFill>
+            <a:srgbClr val="E0B44A"/>
+          </a:solidFill>
+          <a:ln>
+            <a:solidFill>
+              <a:srgbClr val="E0B44A"/>
+            </a:solidFill>
+          </a:ln>
+        </p:spPr>
+        <p:style>
+          <a:lnRef idx="1">
+            <a:schemeClr val="accent1"/>
+          </a:lnRef>
+          <a:fillRef idx="3">
+            <a:schemeClr val="accent1"/>
+          </a:fillRef>
+          <a:effectRef idx="2">
+            <a:schemeClr val="accent1"/>
+          </a:effectRef>
+          <a:fontRef idx="minor">
+            <a:schemeClr val="lt1"/>
+          </a:fontRef>
+        </p:style>
+        <p:txBody>
+          <a:bodyPr rtlCol="0" anchor="ctr"/>
+          <a:lstStyle/>
+          <a:p>
+            <a:pPr algn="ctr"/>
+          </a:p>
+        </p:txBody>
+      </p:sp>
+      <p:sp>
+        <p:nvSpPr>
+          <p:cNvPr id="14" name="Rounded Rectangle 13"/>
+          <p:cNvSpPr/>
+          <p:nvPr/>
+        </p:nvSpPr>
+        <p:spPr>
+          <a:xfrm>
+            <a:off x="4443984" y="1828800"/>
+            <a:ext cx="1325880" cy="1005840"/>
           </a:xfrm>
           <a:prstGeom prst="roundRect">
             <a:avLst/>
@@ -7051,14 +9373,14 @@
       </p:sp>
       <p:sp>
         <p:nvSpPr>
-          <p:cNvPr id="7" name="TextBox 6"/>
+          <p:cNvPr id="15" name="TextBox 14"/>
           <p:cNvSpPr txBox="1"/>
           <p:nvPr/>
         </p:nvSpPr>
         <p:spPr>
           <a:xfrm>
-            <a:off x="768096" y="1645920"/>
-            <a:ext cx="2386584" cy="310896"/>
+            <a:off x="4535424" y="1901952"/>
+            <a:ext cx="1143000" cy="256032"/>
           </a:xfrm>
           <a:prstGeom prst="rect">
             <a:avLst/>
@@ -7071,29 +9393,29 @@
           </a:bodyPr>
           <a:lstStyle/>
           <a:p>
-            <a:pPr algn="l"/>
-            <a:r>
-              <a:rPr sz="1400" b="1">
+            <a:pPr algn="ctr"/>
+            <a:r>
+              <a:rPr sz="1300" b="1">
                 <a:solidFill>
                   <a:srgbClr val="11213E"/>
                 </a:solidFill>
                 <a:latin typeface="Georgia"/>
               </a:rPr>
-              <a:t>Messy text</a:t>
-            </a:r>
-          </a:p>
-        </p:txBody>
-      </p:sp>
-      <p:sp>
-        <p:nvSpPr>
-          <p:cNvPr id="8" name="TextBox 7"/>
+              <a:t>3. Map</a:t>
+            </a:r>
+          </a:p>
+        </p:txBody>
+      </p:sp>
+      <p:sp>
+        <p:nvSpPr>
+          <p:cNvPr id="16" name="TextBox 15"/>
           <p:cNvSpPr txBox="1"/>
           <p:nvPr/>
         </p:nvSpPr>
         <p:spPr>
           <a:xfrm>
-            <a:off x="731520" y="1975104"/>
-            <a:ext cx="2459736" cy="1335024"/>
+            <a:off x="4517136" y="2176272"/>
+            <a:ext cx="1170432" cy="502920"/>
           </a:xfrm>
           <a:prstGeom prst="rect">
             <a:avLst/>
@@ -7101,64 +9423,44 @@
           <a:noFill/>
         </p:spPr>
         <p:txBody>
-          <a:bodyPr wrap="square" lIns="101600" rIns="101600" tIns="50800" bIns="50800">
+          <a:bodyPr wrap="square" lIns="76200" rIns="76200" tIns="50800" bIns="50800" anchor="t">
             <a:spAutoFit/>
           </a:bodyPr>
           <a:lstStyle/>
           <a:p>
-            <a:pPr>
-              <a:spcAft>
-                <a:spcPts val="700"/>
-              </a:spcAft>
-            </a:pPr>
-            <a:r>
-              <a:rPr sz="1150" b="0">
+            <a:pPr algn="ctr"/>
+            <a:r>
+              <a:rPr sz="1050" b="0">
                 <a:solidFill>
                   <a:srgbClr val="1F2A37"/>
                 </a:solidFill>
                 <a:latin typeface="Aptos"/>
               </a:rPr>
-              <a:t>Resumes and job descriptions are vague, inconsistent, and full of implied skills.</a:t>
-            </a:r>
-          </a:p>
-          <a:p>
-            <a:pPr>
-              <a:spcAft>
-                <a:spcPts val="700"/>
-              </a:spcAft>
-            </a:pPr>
-            <a:r>
-              <a:rPr sz="1150" b="0">
-                <a:solidFill>
-                  <a:srgbClr val="1F2A37"/>
-                </a:solidFill>
-                <a:latin typeface="Aptos"/>
-              </a:rPr>
-              <a:t>Competency extraction must work on noisy language, not clean forms.</a:t>
-            </a:r>
-          </a:p>
-        </p:txBody>
-      </p:sp>
-      <p:sp>
-        <p:nvSpPr>
-          <p:cNvPr id="9" name="Rounded Rectangle 8"/>
+              <a:t>Represent extracted signals with O*NET descriptors</a:t>
+            </a:r>
+          </a:p>
+        </p:txBody>
+      </p:sp>
+      <p:sp>
+        <p:nvSpPr>
+          <p:cNvPr id="17" name="Chevron 16"/>
           <p:cNvSpPr/>
           <p:nvPr/>
         </p:nvSpPr>
         <p:spPr>
           <a:xfrm>
-            <a:off x="3456432" y="1554480"/>
-            <a:ext cx="2606040" cy="1828800"/>
-          </a:xfrm>
-          <a:prstGeom prst="roundRect">
+            <a:off x="5797296" y="2084831"/>
+            <a:ext cx="384048" cy="493776"/>
+          </a:xfrm>
+          <a:prstGeom prst="chevron">
             <a:avLst/>
           </a:prstGeom>
           <a:solidFill>
-            <a:srgbClr val="E4F2EC"/>
+            <a:srgbClr val="E0B44A"/>
           </a:solidFill>
           <a:ln>
             <a:solidFill>
-              <a:srgbClr val="E4F2EC"/>
+              <a:srgbClr val="E0B44A"/>
             </a:solidFill>
           </a:ln>
         </p:spPr>
@@ -7186,14 +9488,59 @@
       </p:sp>
       <p:sp>
         <p:nvSpPr>
-          <p:cNvPr id="10" name="TextBox 9"/>
+          <p:cNvPr id="18" name="Rounded Rectangle 17"/>
+          <p:cNvSpPr/>
+          <p:nvPr/>
+        </p:nvSpPr>
+        <p:spPr>
+          <a:xfrm>
+            <a:off x="6254496" y="1828800"/>
+            <a:ext cx="1325880" cy="1005840"/>
+          </a:xfrm>
+          <a:prstGeom prst="roundRect">
+            <a:avLst/>
+          </a:prstGeom>
+          <a:solidFill>
+            <a:srgbClr val="F6E1DC"/>
+          </a:solidFill>
+          <a:ln>
+            <a:solidFill>
+              <a:srgbClr val="F6E1DC"/>
+            </a:solidFill>
+          </a:ln>
+        </p:spPr>
+        <p:style>
+          <a:lnRef idx="1">
+            <a:schemeClr val="accent1"/>
+          </a:lnRef>
+          <a:fillRef idx="3">
+            <a:schemeClr val="accent1"/>
+          </a:fillRef>
+          <a:effectRef idx="2">
+            <a:schemeClr val="accent1"/>
+          </a:effectRef>
+          <a:fontRef idx="minor">
+            <a:schemeClr val="lt1"/>
+          </a:fontRef>
+        </p:style>
+        <p:txBody>
+          <a:bodyPr rtlCol="0" anchor="ctr"/>
+          <a:lstStyle/>
+          <a:p>
+            <a:pPr algn="ctr"/>
+          </a:p>
+        </p:txBody>
+      </p:sp>
+      <p:sp>
+        <p:nvSpPr>
+          <p:cNvPr id="19" name="TextBox 18"/>
           <p:cNvSpPr txBox="1"/>
           <p:nvPr/>
         </p:nvSpPr>
         <p:spPr>
           <a:xfrm>
-            <a:off x="3566160" y="1645920"/>
-            <a:ext cx="2386584" cy="310896"/>
+            <a:off x="6345936" y="1901952"/>
+            <a:ext cx="1143000" cy="256032"/>
           </a:xfrm>
           <a:prstGeom prst="rect">
             <a:avLst/>
@@ -7206,29 +9553,29 @@
           </a:bodyPr>
           <a:lstStyle/>
           <a:p>
-            <a:pPr algn="l"/>
-            <a:r>
-              <a:rPr sz="1400" b="1">
+            <a:pPr algn="ctr"/>
+            <a:r>
+              <a:rPr sz="1300" b="1">
                 <a:solidFill>
                   <a:srgbClr val="11213E"/>
                 </a:solidFill>
                 <a:latin typeface="Georgia"/>
               </a:rPr>
-              <a:t>Defining qualified</a:t>
-            </a:r>
-          </a:p>
-        </p:txBody>
-      </p:sp>
-      <p:sp>
-        <p:nvSpPr>
-          <p:cNvPr id="11" name="TextBox 10"/>
+              <a:t>4. Qualify</a:t>
+            </a:r>
+          </a:p>
+        </p:txBody>
+      </p:sp>
+      <p:sp>
+        <p:nvSpPr>
+          <p:cNvPr id="20" name="TextBox 19"/>
           <p:cNvSpPr txBox="1"/>
           <p:nvPr/>
         </p:nvSpPr>
         <p:spPr>
           <a:xfrm>
-            <a:off x="3529584" y="1975104"/>
-            <a:ext cx="2459736" cy="1335024"/>
+            <a:off x="6327648" y="2176272"/>
+            <a:ext cx="1170432" cy="502920"/>
           </a:xfrm>
           <a:prstGeom prst="rect">
             <a:avLst/>
@@ -7236,54 +9583,79 @@
           <a:noFill/>
         </p:spPr>
         <p:txBody>
-          <a:bodyPr wrap="square" lIns="101600" rIns="101600" tIns="50800" bIns="50800">
+          <a:bodyPr wrap="square" lIns="76200" rIns="76200" tIns="50800" bIns="50800" anchor="t">
             <a:spAutoFit/>
           </a:bodyPr>
           <a:lstStyle/>
           <a:p>
-            <a:pPr>
-              <a:spcAft>
-                <a:spcPts val="700"/>
-              </a:spcAft>
-            </a:pPr>
-            <a:r>
-              <a:rPr sz="1150" b="0">
+            <a:pPr algn="ctr"/>
+            <a:r>
+              <a:rPr sz="1050" b="0">
                 <a:solidFill>
                   <a:srgbClr val="1F2A37"/>
                 </a:solidFill>
                 <a:latin typeface="Aptos"/>
               </a:rPr>
-              <a:t>Qualification is multi-dimensional, not a single score.</a:t>
-            </a:r>
-          </a:p>
-          <a:p>
-            <a:pPr>
-              <a:spcAft>
-                <a:spcPts val="700"/>
-              </a:spcAft>
-            </a:pPr>
-            <a:r>
-              <a:rPr sz="1150" b="0">
-                <a:solidFill>
-                  <a:srgbClr val="1F2A37"/>
-                </a:solidFill>
-                <a:latin typeface="Aptos"/>
-              </a:rPr>
-              <a:t>Multiple signals must be combined without becoming arbitrary.</a:t>
-            </a:r>
-          </a:p>
-        </p:txBody>
-      </p:sp>
-      <p:sp>
-        <p:nvSpPr>
-          <p:cNvPr id="12" name="Rounded Rectangle 11"/>
+              <a:t>Check whether required competencies are satisfied</a:t>
+            </a:r>
+          </a:p>
+        </p:txBody>
+      </p:sp>
+      <p:sp>
+        <p:nvSpPr>
+          <p:cNvPr id="21" name="Chevron 20"/>
           <p:cNvSpPr/>
           <p:nvPr/>
         </p:nvSpPr>
         <p:spPr>
           <a:xfrm>
-            <a:off x="6254496" y="1554480"/>
-            <a:ext cx="2606040" cy="1828800"/>
+            <a:off x="7607808" y="2084831"/>
+            <a:ext cx="384048" cy="493776"/>
+          </a:xfrm>
+          <a:prstGeom prst="chevron">
+            <a:avLst/>
+          </a:prstGeom>
+          <a:solidFill>
+            <a:srgbClr val="E0B44A"/>
+          </a:solidFill>
+          <a:ln>
+            <a:solidFill>
+              <a:srgbClr val="E0B44A"/>
+            </a:solidFill>
+          </a:ln>
+        </p:spPr>
+        <p:style>
+          <a:lnRef idx="1">
+            <a:schemeClr val="accent1"/>
+          </a:lnRef>
+          <a:fillRef idx="3">
+            <a:schemeClr val="accent1"/>
+          </a:fillRef>
+          <a:effectRef idx="2">
+            <a:schemeClr val="accent1"/>
+          </a:effectRef>
+          <a:fontRef idx="minor">
+            <a:schemeClr val="lt1"/>
+          </a:fontRef>
+        </p:style>
+        <p:txBody>
+          <a:bodyPr rtlCol="0" anchor="ctr"/>
+          <a:lstStyle/>
+          <a:p>
+            <a:pPr algn="ctr"/>
+          </a:p>
+        </p:txBody>
+      </p:sp>
+      <p:sp>
+        <p:nvSpPr>
+          <p:cNvPr id="22" name="Rounded Rectangle 21"/>
+          <p:cNvSpPr/>
+          <p:nvPr/>
+        </p:nvSpPr>
+        <p:spPr>
+          <a:xfrm>
+            <a:off x="8065008" y="1828800"/>
+            <a:ext cx="1325880" cy="1005840"/>
           </a:xfrm>
           <a:prstGeom prst="roundRect">
             <a:avLst/>
@@ -7321,14 +9693,14 @@
       </p:sp>
       <p:sp>
         <p:nvSpPr>
-          <p:cNvPr id="13" name="TextBox 12"/>
+          <p:cNvPr id="23" name="TextBox 22"/>
           <p:cNvSpPr txBox="1"/>
           <p:nvPr/>
         </p:nvSpPr>
         <p:spPr>
           <a:xfrm>
-            <a:off x="6364224" y="1645920"/>
-            <a:ext cx="2386584" cy="310896"/>
+            <a:off x="8156448" y="1901952"/>
+            <a:ext cx="1143000" cy="256032"/>
           </a:xfrm>
           <a:prstGeom prst="rect">
             <a:avLst/>
@@ -7341,129 +9713,29 @@
           </a:bodyPr>
           <a:lstStyle/>
           <a:p>
-            <a:pPr algn="l"/>
-            <a:r>
-              <a:rPr sz="1400" b="1">
+            <a:pPr algn="ctr"/>
+            <a:r>
+              <a:rPr sz="1300" b="1">
                 <a:solidFill>
                   <a:srgbClr val="11213E"/>
                 </a:solidFill>
                 <a:latin typeface="Georgia"/>
               </a:rPr>
-              <a:t>High-dimensional space</a:t>
-            </a:r>
-          </a:p>
-        </p:txBody>
-      </p:sp>
-      <p:sp>
-        <p:nvSpPr>
-          <p:cNvPr id="14" name="TextBox 13"/>
+              <a:t>5. Rank</a:t>
+            </a:r>
+          </a:p>
+        </p:txBody>
+      </p:sp>
+      <p:sp>
+        <p:nvSpPr>
+          <p:cNvPr id="24" name="TextBox 23"/>
           <p:cNvSpPr txBox="1"/>
           <p:nvPr/>
         </p:nvSpPr>
         <p:spPr>
           <a:xfrm>
-            <a:off x="6327648" y="1975104"/>
-            <a:ext cx="2459736" cy="1335024"/>
-          </a:xfrm>
-          <a:prstGeom prst="rect">
-            <a:avLst/>
-          </a:prstGeom>
-          <a:noFill/>
-        </p:spPr>
-        <p:txBody>
-          <a:bodyPr wrap="square" lIns="101600" rIns="101600" tIns="50800" bIns="50800">
-            <a:spAutoFit/>
-          </a:bodyPr>
-          <a:lstStyle/>
-          <a:p>
-            <a:pPr>
-              <a:spcAft>
-                <a:spcPts val="700"/>
-              </a:spcAft>
-            </a:pPr>
-            <a:r>
-              <a:rPr sz="1150" b="0">
-                <a:solidFill>
-                  <a:srgbClr val="1F2A37"/>
-                </a:solidFill>
-                <a:latin typeface="Aptos"/>
-              </a:rPr>
-              <a:t>The system assumes useful structure in a competency space.</a:t>
-            </a:r>
-          </a:p>
-          <a:p>
-            <a:pPr>
-              <a:spcAft>
-                <a:spcPts val="700"/>
-              </a:spcAft>
-            </a:pPr>
-            <a:r>
-              <a:rPr sz="1150" b="0">
-                <a:solidFill>
-                  <a:srgbClr val="1F2A37"/>
-                </a:solidFill>
-                <a:latin typeface="Aptos"/>
-              </a:rPr>
-              <a:t>Linearity may not always hold, and scale still matters.</a:t>
-            </a:r>
-          </a:p>
-        </p:txBody>
-      </p:sp>
-      <p:sp>
-        <p:nvSpPr>
-          <p:cNvPr id="15" name="Rounded Rectangle 14"/>
-          <p:cNvSpPr/>
-          <p:nvPr/>
-        </p:nvSpPr>
-        <p:spPr>
-          <a:xfrm>
-            <a:off x="9052560" y="1554480"/>
-            <a:ext cx="2514600" cy="1828800"/>
-          </a:xfrm>
-          <a:prstGeom prst="roundRect">
-            <a:avLst/>
-          </a:prstGeom>
-          <a:solidFill>
-            <a:srgbClr val="F6E1DC"/>
-          </a:solidFill>
-          <a:ln>
-            <a:solidFill>
-              <a:srgbClr val="F6E1DC"/>
-            </a:solidFill>
-          </a:ln>
-        </p:spPr>
-        <p:style>
-          <a:lnRef idx="1">
-            <a:schemeClr val="accent1"/>
-          </a:lnRef>
-          <a:fillRef idx="3">
-            <a:schemeClr val="accent1"/>
-          </a:fillRef>
-          <a:effectRef idx="2">
-            <a:schemeClr val="accent1"/>
-          </a:effectRef>
-          <a:fontRef idx="minor">
-            <a:schemeClr val="lt1"/>
-          </a:fontRef>
-        </p:style>
-        <p:txBody>
-          <a:bodyPr rtlCol="0" anchor="ctr"/>
-          <a:lstStyle/>
-          <a:p>
-            <a:pPr algn="ctr"/>
-          </a:p>
-        </p:txBody>
-      </p:sp>
-      <p:sp>
-        <p:nvSpPr>
-          <p:cNvPr id="16" name="TextBox 15"/>
-          <p:cNvSpPr txBox="1"/>
-          <p:nvPr/>
-        </p:nvSpPr>
-        <p:spPr>
-          <a:xfrm>
-            <a:off x="9162288" y="1645920"/>
-            <a:ext cx="2295144" cy="310896"/>
+            <a:off x="8138160" y="2176272"/>
+            <a:ext cx="1170432" cy="502920"/>
           </a:xfrm>
           <a:prstGeom prst="rect">
             <a:avLst/>
@@ -7476,84 +9748,29 @@
           </a:bodyPr>
           <a:lstStyle/>
           <a:p>
-            <a:pPr algn="l"/>
-            <a:r>
-              <a:rPr sz="1400" b="1">
-                <a:solidFill>
-                  <a:srgbClr val="11213E"/>
-                </a:solidFill>
-                <a:latin typeface="Georgia"/>
-              </a:rPr>
-              <a:t>Evaluation</a:t>
-            </a:r>
-          </a:p>
-        </p:txBody>
-      </p:sp>
-      <p:sp>
-        <p:nvSpPr>
-          <p:cNvPr id="17" name="TextBox 16"/>
-          <p:cNvSpPr txBox="1"/>
-          <p:nvPr/>
-        </p:nvSpPr>
-        <p:spPr>
-          <a:xfrm>
-            <a:off x="9125712" y="1975104"/>
-            <a:ext cx="2368296" cy="1335024"/>
-          </a:xfrm>
-          <a:prstGeom prst="rect">
-            <a:avLst/>
-          </a:prstGeom>
-          <a:noFill/>
-        </p:spPr>
-        <p:txBody>
-          <a:bodyPr wrap="square" lIns="101600" rIns="101600" tIns="50800" bIns="50800">
-            <a:spAutoFit/>
-          </a:bodyPr>
-          <a:lstStyle/>
-          <a:p>
-            <a:pPr>
-              <a:spcAft>
-                <a:spcPts val="700"/>
-              </a:spcAft>
-            </a:pPr>
-            <a:r>
-              <a:rPr sz="1150" b="0">
+            <a:pPr algn="ctr"/>
+            <a:r>
+              <a:rPr sz="1050" b="0">
                 <a:solidFill>
                   <a:srgbClr val="1F2A37"/>
                 </a:solidFill>
                 <a:latin typeface="Aptos"/>
               </a:rPr>
-              <a:t>Ground truth for who is truly qualified is hard to obtain.</a:t>
-            </a:r>
-          </a:p>
-          <a:p>
-            <a:pPr>
-              <a:spcAft>
-                <a:spcPts val="700"/>
-              </a:spcAft>
-            </a:pPr>
-            <a:r>
-              <a:rPr sz="1150" b="0">
-                <a:solidFill>
-                  <a:srgbClr val="1F2A37"/>
-                </a:solidFill>
-                <a:latin typeface="Aptos"/>
-              </a:rPr>
-              <a:t>Testing must be credible, staged, and metric-driven.</a:t>
-            </a:r>
-          </a:p>
-        </p:txBody>
-      </p:sp>
-      <p:sp>
-        <p:nvSpPr>
-          <p:cNvPr id="18" name="Rounded Rectangle 17"/>
+              <a:t>Order the strongest matches for both user groups</a:t>
+            </a:r>
+          </a:p>
+        </p:txBody>
+      </p:sp>
+      <p:sp>
+        <p:nvSpPr>
+          <p:cNvPr id="25" name="Rounded Rectangle 24"/>
           <p:cNvSpPr/>
           <p:nvPr/>
         </p:nvSpPr>
         <p:spPr>
           <a:xfrm>
-            <a:off x="658368" y="3913632"/>
-            <a:ext cx="10881360" cy="1371600"/>
+            <a:off x="1051560" y="4069080"/>
+            <a:ext cx="9966960" cy="1143000"/>
           </a:xfrm>
           <a:prstGeom prst="roundRect">
             <a:avLst/>
@@ -7591,14 +9808,14 @@
       </p:sp>
       <p:sp>
         <p:nvSpPr>
-          <p:cNvPr id="19" name="TextBox 18"/>
+          <p:cNvPr id="26" name="TextBox 25"/>
           <p:cNvSpPr txBox="1"/>
           <p:nvPr/>
         </p:nvSpPr>
         <p:spPr>
           <a:xfrm>
-            <a:off x="896112" y="4114800"/>
-            <a:ext cx="2743200" cy="274320"/>
+            <a:off x="1298448" y="4279392"/>
+            <a:ext cx="2743200" cy="228600"/>
           </a:xfrm>
           <a:prstGeom prst="rect">
             <a:avLst/>
@@ -7619,21 +9836,21 @@
                 </a:solidFill>
                 <a:latin typeface="Aptos"/>
               </a:rPr>
-              <a:t>Evaluation plan from the draft</a:t>
-            </a:r>
-          </a:p>
-        </p:txBody>
-      </p:sp>
-      <p:sp>
-        <p:nvSpPr>
-          <p:cNvPr id="20" name="TextBox 19"/>
+              <a:t>Evaluation focus</a:t>
+            </a:r>
+          </a:p>
+        </p:txBody>
+      </p:sp>
+      <p:sp>
+        <p:nvSpPr>
+          <p:cNvPr id="27" name="TextBox 26"/>
           <p:cNvSpPr txBox="1"/>
           <p:nvPr/>
         </p:nvSpPr>
         <p:spPr>
           <a:xfrm>
-            <a:off x="868680" y="4407408"/>
-            <a:ext cx="10332720" cy="731520"/>
+            <a:off x="1280160" y="4526280"/>
+            <a:ext cx="9372600" cy="502920"/>
           </a:xfrm>
           <a:prstGeom prst="rect">
             <a:avLst/>
@@ -7652,13 +9869,13 @@
               </a:spcAft>
             </a:pPr>
             <a:r>
-              <a:rPr sz="1500" b="0">
+              <a:rPr sz="1400" b="0">
                 <a:solidFill>
                   <a:srgbClr val="FFFFFF"/>
                 </a:solidFill>
                 <a:latin typeface="Aptos"/>
               </a:rPr>
-              <a:t>Stage 1: qualification decision using precision, recall, and F1.</a:t>
+              <a:t>Qualification quality: precision, recall, and F1.</a:t>
             </a:r>
           </a:p>
           <a:p>
@@ -7668,20 +9885,20 @@
               </a:spcAft>
             </a:pPr>
             <a:r>
-              <a:rPr sz="1500" b="0">
+              <a:rPr sz="1400" b="0">
                 <a:solidFill>
                   <a:srgbClr val="FFFFFF"/>
                 </a:solidFill>
                 <a:latin typeface="Aptos"/>
               </a:rPr>
-              <a:t>Stage 2: ranking quality using Precision@K, nDCG@K, and MRR if time permits.</a:t>
-            </a:r>
-          </a:p>
-        </p:txBody>
-      </p:sp>
-      <p:sp>
-        <p:nvSpPr>
-          <p:cNvPr id="21" name="TextBox 20"/>
+              <a:t>Ranking quality if time permits: Precision@K, nDCG@K, and MRR.</a:t>
+            </a:r>
+          </a:p>
+        </p:txBody>
+      </p:sp>
+      <p:sp>
+        <p:nvSpPr>
+          <p:cNvPr id="28" name="TextBox 27"/>
           <p:cNvSpPr txBox="1"/>
           <p:nvPr/>
         </p:nvSpPr>
@@ -7709,7 +9926,7 @@
                 </a:solidFill>
                 <a:latin typeface="Aptos"/>
               </a:rPr>
-              <a:t>5</a:t>
+              <a:t>6</a:t>
             </a:r>
           </a:p>
         </p:txBody>
@@ -7722,7 +9939,7 @@
 </p:sld>
 </file>
 
-<file path=ppt/slides/slide6.xml><?xml version="1.0" encoding="utf-8"?>
+<file path=ppt/slides/slide7.xml><?xml version="1.0" encoding="utf-8"?>
 <p:sld xmlns:a="http://schemas.openxmlformats.org/drawingml/2006/main" xmlns:p="http://schemas.openxmlformats.org/presentationml/2006/main" xmlns:r="http://schemas.openxmlformats.org/officeDocument/2006/relationships">
   <p:cSld>
     <p:bg>
@@ -7794,7 +10011,7 @@
         <p:spPr>
           <a:xfrm>
             <a:off x="640080" y="502920"/>
-            <a:ext cx="8686800" cy="685800"/>
+            <a:ext cx="8869680" cy="658368"/>
           </a:xfrm>
           <a:prstGeom prst="rect">
             <a:avLst/>
@@ -7815,7 +10032,7 @@
                 </a:solidFill>
                 <a:latin typeface="Georgia"/>
               </a:rPr>
-              <a:t>Knowledge From the Curriculum Required</a:t>
+              <a:t>Sitemap</a:t>
             </a:r>
           </a:p>
         </p:txBody>
@@ -7828,8 +10045,8 @@
         </p:nvSpPr>
         <p:spPr>
           <a:xfrm>
-            <a:off x="658368" y="1097280"/>
-            <a:ext cx="8869680" cy="347472"/>
+            <a:off x="658368" y="1078992"/>
+            <a:ext cx="8869680" cy="329184"/>
           </a:xfrm>
           <a:prstGeom prst="rect">
             <a:avLst/>
@@ -7850,7 +10067,7 @@
                 </a:solidFill>
                 <a:latin typeface="Aptos"/>
               </a:rPr>
-              <a:t>Why this is a capstone-level problem</a:t>
+              <a:t>Progress artefact for the planned web application structure</a:t>
             </a:r>
           </a:p>
         </p:txBody>
@@ -7863,8 +10080,8 @@
         </p:nvSpPr>
         <p:spPr>
           <a:xfrm>
-            <a:off x="9802368" y="566928"/>
-            <a:ext cx="1645920" cy="329184"/>
+            <a:off x="9710928" y="566928"/>
+            <a:ext cx="1783080" cy="329184"/>
           </a:xfrm>
           <a:prstGeom prst="roundRect">
             <a:avLst/>
@@ -7904,7 +10121,7 @@
                 </a:solidFill>
                 <a:latin typeface="Aptos"/>
               </a:rPr>
-              <a:t>Curriculum</a:t>
+              <a:t>Progress</a:t>
             </a:r>
           </a:p>
         </p:txBody>
@@ -7917,18 +10134,18 @@
         </p:nvSpPr>
         <p:spPr>
           <a:xfrm>
-            <a:off x="658368" y="1508760"/>
-            <a:ext cx="2240280" cy="1627632"/>
+            <a:off x="566928" y="1417320"/>
+            <a:ext cx="7909560" cy="4800600"/>
           </a:xfrm>
           <a:prstGeom prst="roundRect">
             <a:avLst/>
           </a:prstGeom>
           <a:solidFill>
-            <a:srgbClr val="E1EBF7"/>
+            <a:srgbClr val="EAEEF3"/>
           </a:solidFill>
           <a:ln>
             <a:solidFill>
-              <a:srgbClr val="E1EBF7"/>
+              <a:srgbClr val="EAEEF3"/>
             </a:solidFill>
           </a:ln>
         </p:spPr>
@@ -7954,209 +10171,40 @@
           </a:p>
         </p:txBody>
       </p:sp>
-      <p:sp>
-        <p:nvSpPr>
-          <p:cNvPr id="7" name="TextBox 6"/>
-          <p:cNvSpPr txBox="1"/>
-          <p:nvPr/>
-        </p:nvSpPr>
-        <p:spPr>
-          <a:xfrm>
-            <a:off x="768096" y="1600200"/>
-            <a:ext cx="2020824" cy="310896"/>
-          </a:xfrm>
-          <a:prstGeom prst="rect">
-            <a:avLst/>
-          </a:prstGeom>
-          <a:noFill/>
-        </p:spPr>
-        <p:txBody>
-          <a:bodyPr wrap="square" lIns="76200" rIns="76200" tIns="50800" bIns="50800" anchor="t">
-            <a:spAutoFit/>
-          </a:bodyPr>
-          <a:lstStyle/>
-          <a:p>
-            <a:pPr algn="l"/>
-            <a:r>
-              <a:rPr sz="1400" b="1">
-                <a:solidFill>
-                  <a:srgbClr val="11213E"/>
-                </a:solidFill>
-                <a:latin typeface="Georgia"/>
-              </a:rPr>
-              <a:t>COMP2171 + COMP2140</a:t>
-            </a:r>
-          </a:p>
-        </p:txBody>
-      </p:sp>
-      <p:sp>
-        <p:nvSpPr>
-          <p:cNvPr id="8" name="TextBox 7"/>
-          <p:cNvSpPr txBox="1"/>
-          <p:nvPr/>
-        </p:nvSpPr>
-        <p:spPr>
-          <a:xfrm>
-            <a:off x="731520" y="1929384"/>
-            <a:ext cx="2093976" cy="1133856"/>
-          </a:xfrm>
-          <a:prstGeom prst="rect">
-            <a:avLst/>
-          </a:prstGeom>
-          <a:noFill/>
-        </p:spPr>
-        <p:txBody>
-          <a:bodyPr wrap="square" lIns="101600" rIns="101600" tIns="50800" bIns="50800">
-            <a:spAutoFit/>
-          </a:bodyPr>
-          <a:lstStyle/>
-          <a:p>
-            <a:pPr>
-              <a:spcAft>
-                <a:spcPts val="700"/>
-              </a:spcAft>
-            </a:pPr>
-            <a:r>
-              <a:rPr sz="1150" b="0">
-                <a:solidFill>
-                  <a:srgbClr val="1F2A37"/>
-                </a:solidFill>
-                <a:latin typeface="Aptos"/>
-              </a:rPr>
-              <a:t>Documentation, requirements analysis, system modelling, and design artifacts.</a:t>
-            </a:r>
-          </a:p>
-        </p:txBody>
-      </p:sp>
-      <p:sp>
-        <p:nvSpPr>
-          <p:cNvPr id="9" name="Rounded Rectangle 8"/>
+      <p:pic>
+        <p:nvPicPr>
+          <p:cNvPr id="7" name="Picture 6" descr="image.png"/>
+          <p:cNvPicPr>
+            <a:picLocks noChangeAspect="1"/>
+          </p:cNvPicPr>
+          <p:nvPr/>
+        </p:nvPicPr>
+        <p:blipFill>
+          <a:blip r:embed="rId2"/>
+          <a:stretch>
+            <a:fillRect/>
+          </a:stretch>
+        </p:blipFill>
+        <p:spPr>
+          <a:xfrm>
+            <a:off x="1066247" y="1627632"/>
+            <a:ext cx="6920064" cy="4343400"/>
+          </a:xfrm>
+          <a:prstGeom prst="rect">
+            <a:avLst/>
+          </a:prstGeom>
+        </p:spPr>
+      </p:pic>
+      <p:sp>
+        <p:nvSpPr>
+          <p:cNvPr id="8" name="Rounded Rectangle 7"/>
           <p:cNvSpPr/>
           <p:nvPr/>
         </p:nvSpPr>
         <p:spPr>
           <a:xfrm>
-            <a:off x="3611880" y="1508760"/>
-            <a:ext cx="2240280" cy="1627632"/>
-          </a:xfrm>
-          <a:prstGeom prst="roundRect">
-            <a:avLst/>
-          </a:prstGeom>
-          <a:solidFill>
-            <a:srgbClr val="E4F2EC"/>
-          </a:solidFill>
-          <a:ln>
-            <a:solidFill>
-              <a:srgbClr val="E4F2EC"/>
-            </a:solidFill>
-          </a:ln>
-        </p:spPr>
-        <p:style>
-          <a:lnRef idx="1">
-            <a:schemeClr val="accent1"/>
-          </a:lnRef>
-          <a:fillRef idx="3">
-            <a:schemeClr val="accent1"/>
-          </a:fillRef>
-          <a:effectRef idx="2">
-            <a:schemeClr val="accent1"/>
-          </a:effectRef>
-          <a:fontRef idx="minor">
-            <a:schemeClr val="lt1"/>
-          </a:fontRef>
-        </p:style>
-        <p:txBody>
-          <a:bodyPr rtlCol="0" anchor="ctr"/>
-          <a:lstStyle/>
-          <a:p>
-            <a:pPr algn="ctr"/>
-          </a:p>
-        </p:txBody>
-      </p:sp>
-      <p:sp>
-        <p:nvSpPr>
-          <p:cNvPr id="10" name="TextBox 9"/>
-          <p:cNvSpPr txBox="1"/>
-          <p:nvPr/>
-        </p:nvSpPr>
-        <p:spPr>
-          <a:xfrm>
-            <a:off x="3721608" y="1600200"/>
-            <a:ext cx="2020824" cy="310896"/>
-          </a:xfrm>
-          <a:prstGeom prst="rect">
-            <a:avLst/>
-          </a:prstGeom>
-          <a:noFill/>
-        </p:spPr>
-        <p:txBody>
-          <a:bodyPr wrap="square" lIns="76200" rIns="76200" tIns="50800" bIns="50800" anchor="t">
-            <a:spAutoFit/>
-          </a:bodyPr>
-          <a:lstStyle/>
-          <a:p>
-            <a:pPr algn="l"/>
-            <a:r>
-              <a:rPr sz="1400" b="1">
-                <a:solidFill>
-                  <a:srgbClr val="11213E"/>
-                </a:solidFill>
-                <a:latin typeface="Georgia"/>
-              </a:rPr>
-              <a:t>COMP3161</a:t>
-            </a:r>
-          </a:p>
-        </p:txBody>
-      </p:sp>
-      <p:sp>
-        <p:nvSpPr>
-          <p:cNvPr id="11" name="TextBox 10"/>
-          <p:cNvSpPr txBox="1"/>
-          <p:nvPr/>
-        </p:nvSpPr>
-        <p:spPr>
-          <a:xfrm>
-            <a:off x="3685032" y="1929384"/>
-            <a:ext cx="2093976" cy="1133856"/>
-          </a:xfrm>
-          <a:prstGeom prst="rect">
-            <a:avLst/>
-          </a:prstGeom>
-          <a:noFill/>
-        </p:spPr>
-        <p:txBody>
-          <a:bodyPr wrap="square" lIns="101600" rIns="101600" tIns="50800" bIns="50800">
-            <a:spAutoFit/>
-          </a:bodyPr>
-          <a:lstStyle/>
-          <a:p>
-            <a:pPr>
-              <a:spcAft>
-                <a:spcPts val="700"/>
-              </a:spcAft>
-            </a:pPr>
-            <a:r>
-              <a:rPr sz="1150" b="0">
-                <a:solidFill>
-                  <a:srgbClr val="1F2A37"/>
-                </a:solidFill>
-                <a:latin typeface="Aptos"/>
-              </a:rPr>
-              <a:t>Database design for resumes, job posts, competency profiles, and match results.</a:t>
-            </a:r>
-          </a:p>
-        </p:txBody>
-      </p:sp>
-      <p:sp>
-        <p:nvSpPr>
-          <p:cNvPr id="12" name="Rounded Rectangle 11"/>
-          <p:cNvSpPr/>
-          <p:nvPr/>
-        </p:nvSpPr>
-        <p:spPr>
-          <a:xfrm>
-            <a:off x="6565392" y="1508760"/>
-            <a:ext cx="2240280" cy="1627632"/>
+            <a:off x="8732520" y="1627632"/>
+            <a:ext cx="2697480" cy="2971800"/>
           </a:xfrm>
           <a:prstGeom prst="roundRect">
             <a:avLst/>
@@ -8194,14 +10242,14 @@
       </p:sp>
       <p:sp>
         <p:nvSpPr>
-          <p:cNvPr id="13" name="TextBox 12"/>
+          <p:cNvPr id="9" name="TextBox 8"/>
           <p:cNvSpPr txBox="1"/>
           <p:nvPr/>
         </p:nvSpPr>
         <p:spPr>
           <a:xfrm>
-            <a:off x="6675120" y="1600200"/>
-            <a:ext cx="2020824" cy="310896"/>
+            <a:off x="8842248" y="1719072"/>
+            <a:ext cx="2478024" cy="310896"/>
           </a:xfrm>
           <a:prstGeom prst="rect">
             <a:avLst/>
@@ -8222,21 +10270,21 @@
                 </a:solidFill>
                 <a:latin typeface="Georgia"/>
               </a:rPr>
-              <a:t>COMP3162</a:t>
-            </a:r>
-          </a:p>
-        </p:txBody>
-      </p:sp>
-      <p:sp>
-        <p:nvSpPr>
-          <p:cNvPr id="14" name="TextBox 13"/>
+              <a:t>Why it matters</a:t>
+            </a:r>
+          </a:p>
+        </p:txBody>
+      </p:sp>
+      <p:sp>
+        <p:nvSpPr>
+          <p:cNvPr id="10" name="TextBox 9"/>
           <p:cNvSpPr txBox="1"/>
           <p:nvPr/>
         </p:nvSpPr>
         <p:spPr>
           <a:xfrm>
-            <a:off x="6638544" y="1929384"/>
-            <a:ext cx="2093976" cy="1133856"/>
+            <a:off x="8805672" y="2048256"/>
+            <a:ext cx="2551176" cy="2478024"/>
           </a:xfrm>
           <a:prstGeom prst="rect">
             <a:avLst/>
@@ -8261,112 +10309,9 @@
                 </a:solidFill>
                 <a:latin typeface="Aptos"/>
               </a:rPr>
-              <a:t>Data cleaning, preprocessing, modelling support, and evaluation work.</a:t>
-            </a:r>
-          </a:p>
-        </p:txBody>
-      </p:sp>
-      <p:sp>
-        <p:nvSpPr>
-          <p:cNvPr id="15" name="Rounded Rectangle 14"/>
-          <p:cNvSpPr/>
-          <p:nvPr/>
-        </p:nvSpPr>
-        <p:spPr>
-          <a:xfrm>
-            <a:off x="9518904" y="1508760"/>
-            <a:ext cx="2240280" cy="1627632"/>
-          </a:xfrm>
-          <a:prstGeom prst="roundRect">
-            <a:avLst/>
-          </a:prstGeom>
-          <a:solidFill>
-            <a:srgbClr val="F6E1DC"/>
-          </a:solidFill>
-          <a:ln>
-            <a:solidFill>
-              <a:srgbClr val="F6E1DC"/>
-            </a:solidFill>
-          </a:ln>
-        </p:spPr>
-        <p:style>
-          <a:lnRef idx="1">
-            <a:schemeClr val="accent1"/>
-          </a:lnRef>
-          <a:fillRef idx="3">
-            <a:schemeClr val="accent1"/>
-          </a:fillRef>
-          <a:effectRef idx="2">
-            <a:schemeClr val="accent1"/>
-          </a:effectRef>
-          <a:fontRef idx="minor">
-            <a:schemeClr val="lt1"/>
-          </a:fontRef>
-        </p:style>
-        <p:txBody>
-          <a:bodyPr rtlCol="0" anchor="ctr"/>
-          <a:lstStyle/>
-          <a:p>
-            <a:pPr algn="ctr"/>
-          </a:p>
-        </p:txBody>
-      </p:sp>
-      <p:sp>
-        <p:nvSpPr>
-          <p:cNvPr id="16" name="TextBox 15"/>
-          <p:cNvSpPr txBox="1"/>
-          <p:nvPr/>
-        </p:nvSpPr>
-        <p:spPr>
-          <a:xfrm>
-            <a:off x="9628632" y="1600200"/>
-            <a:ext cx="2020824" cy="310896"/>
-          </a:xfrm>
-          <a:prstGeom prst="rect">
-            <a:avLst/>
-          </a:prstGeom>
-          <a:noFill/>
-        </p:spPr>
-        <p:txBody>
-          <a:bodyPr wrap="square" lIns="76200" rIns="76200" tIns="50800" bIns="50800" anchor="t">
-            <a:spAutoFit/>
-          </a:bodyPr>
-          <a:lstStyle/>
-          <a:p>
-            <a:pPr algn="l"/>
-            <a:r>
-              <a:rPr sz="1400" b="1">
-                <a:solidFill>
-                  <a:srgbClr val="11213E"/>
-                </a:solidFill>
-                <a:latin typeface="Georgia"/>
-              </a:rPr>
-              <a:t>COMP1127</a:t>
-            </a:r>
-          </a:p>
-        </p:txBody>
-      </p:sp>
-      <p:sp>
-        <p:nvSpPr>
-          <p:cNvPr id="17" name="TextBox 16"/>
-          <p:cNvSpPr txBox="1"/>
-          <p:nvPr/>
-        </p:nvSpPr>
-        <p:spPr>
-          <a:xfrm>
-            <a:off x="9592056" y="1929384"/>
-            <a:ext cx="2093976" cy="1133856"/>
-          </a:xfrm>
-          <a:prstGeom prst="rect">
-            <a:avLst/>
-          </a:prstGeom>
-          <a:noFill/>
-        </p:spPr>
-        <p:txBody>
-          <a:bodyPr wrap="square" lIns="101600" rIns="101600" tIns="50800" bIns="50800">
-            <a:spAutoFit/>
-          </a:bodyPr>
-          <a:lstStyle/>
+              <a:t>This artefact plans the front end structure of the web application for candidate and employer workflows.</a:t>
+            </a:r>
+          </a:p>
           <a:p>
             <a:pPr>
               <a:spcAft>
@@ -8380,66 +10325,21 @@
                 </a:solidFill>
                 <a:latin typeface="Aptos"/>
               </a:rPr>
-              <a:t>Python foundations for backend logic, parsing, and experimentation.</a:t>
-            </a:r>
-          </a:p>
-        </p:txBody>
-      </p:sp>
-      <p:sp>
-        <p:nvSpPr>
-          <p:cNvPr id="18" name="Rounded Rectangle 17"/>
-          <p:cNvSpPr/>
-          <p:nvPr/>
-        </p:nvSpPr>
-        <p:spPr>
-          <a:xfrm>
-            <a:off x="1874519" y="3749039"/>
-            <a:ext cx="2240280" cy="1627632"/>
-          </a:xfrm>
-          <a:prstGeom prst="roundRect">
-            <a:avLst/>
-          </a:prstGeom>
-          <a:solidFill>
-            <a:srgbClr val="EAEEF3"/>
-          </a:solidFill>
-          <a:ln>
-            <a:solidFill>
-              <a:srgbClr val="EAEEF3"/>
-            </a:solidFill>
-          </a:ln>
-        </p:spPr>
-        <p:style>
-          <a:lnRef idx="1">
-            <a:schemeClr val="accent1"/>
-          </a:lnRef>
-          <a:fillRef idx="3">
-            <a:schemeClr val="accent1"/>
-          </a:fillRef>
-          <a:effectRef idx="2">
-            <a:schemeClr val="accent1"/>
-          </a:effectRef>
-          <a:fontRef idx="minor">
-            <a:schemeClr val="lt1"/>
-          </a:fontRef>
-        </p:style>
-        <p:txBody>
-          <a:bodyPr rtlCol="0" anchor="ctr"/>
-          <a:lstStyle/>
-          <a:p>
-            <a:pPr algn="ctr"/>
-          </a:p>
-        </p:txBody>
-      </p:sp>
-      <p:sp>
-        <p:nvSpPr>
-          <p:cNvPr id="19" name="TextBox 18"/>
+              <a:t>It separates public pages from candidate and employer dashboard paths.</a:t>
+            </a:r>
+          </a:p>
+        </p:txBody>
+      </p:sp>
+      <p:sp>
+        <p:nvSpPr>
+          <p:cNvPr id="11" name="TextBox 10"/>
           <p:cNvSpPr txBox="1"/>
           <p:nvPr/>
         </p:nvSpPr>
         <p:spPr>
           <a:xfrm>
-            <a:off x="1984247" y="3840479"/>
-            <a:ext cx="2020824" cy="310896"/>
+            <a:off x="804672" y="5998464"/>
+            <a:ext cx="7452360" cy="228600"/>
           </a:xfrm>
           <a:prstGeom prst="rect">
             <a:avLst/>
@@ -8454,111 +10354,27 @@
           <a:p>
             <a:pPr algn="l"/>
             <a:r>
-              <a:rPr sz="1400" b="1">
-                <a:solidFill>
-                  <a:srgbClr val="11213E"/>
-                </a:solidFill>
-                <a:latin typeface="Georgia"/>
-              </a:rPr>
-              <a:t>INFO2180</a:t>
-            </a:r>
-          </a:p>
-        </p:txBody>
-      </p:sp>
-      <p:sp>
-        <p:nvSpPr>
-          <p:cNvPr id="20" name="TextBox 19"/>
+              <a:rPr sz="1150" b="0">
+                <a:solidFill>
+                  <a:srgbClr val="2D3E54"/>
+                </a:solidFill>
+                <a:latin typeface="Aptos"/>
+              </a:rPr>
+              <a:t>Caption: This artefact plans the front end structure of the web application for candidate and employer workflows.</a:t>
+            </a:r>
+          </a:p>
+        </p:txBody>
+      </p:sp>
+      <p:sp>
+        <p:nvSpPr>
+          <p:cNvPr id="12" name="TextBox 11"/>
           <p:cNvSpPr txBox="1"/>
           <p:nvPr/>
         </p:nvSpPr>
         <p:spPr>
           <a:xfrm>
-            <a:off x="1947671" y="4169663"/>
-            <a:ext cx="2093976" cy="1133856"/>
-          </a:xfrm>
-          <a:prstGeom prst="rect">
-            <a:avLst/>
-          </a:prstGeom>
-          <a:noFill/>
-        </p:spPr>
-        <p:txBody>
-          <a:bodyPr wrap="square" lIns="101600" rIns="101600" tIns="50800" bIns="50800">
-            <a:spAutoFit/>
-          </a:bodyPr>
-          <a:lstStyle/>
-          <a:p>
-            <a:pPr>
-              <a:spcAft>
-                <a:spcPts val="700"/>
-              </a:spcAft>
-            </a:pPr>
-            <a:r>
-              <a:rPr sz="1150" b="0">
-                <a:solidFill>
-                  <a:srgbClr val="1F2A37"/>
-                </a:solidFill>
-                <a:latin typeface="Aptos"/>
-              </a:rPr>
-              <a:t>Frontend design and implementation for employer and candidate interaction.</a:t>
-            </a:r>
-          </a:p>
-        </p:txBody>
-      </p:sp>
-      <p:sp>
-        <p:nvSpPr>
-          <p:cNvPr id="21" name="Rounded Rectangle 20"/>
-          <p:cNvSpPr/>
-          <p:nvPr/>
-        </p:nvSpPr>
-        <p:spPr>
-          <a:xfrm>
-            <a:off x="4828032" y="3749039"/>
-            <a:ext cx="2240280" cy="1627632"/>
-          </a:xfrm>
-          <a:prstGeom prst="roundRect">
-            <a:avLst/>
-          </a:prstGeom>
-          <a:solidFill>
-            <a:srgbClr val="E1EBF7"/>
-          </a:solidFill>
-          <a:ln>
-            <a:solidFill>
-              <a:srgbClr val="E1EBF7"/>
-            </a:solidFill>
-          </a:ln>
-        </p:spPr>
-        <p:style>
-          <a:lnRef idx="1">
-            <a:schemeClr val="accent1"/>
-          </a:lnRef>
-          <a:fillRef idx="3">
-            <a:schemeClr val="accent1"/>
-          </a:fillRef>
-          <a:effectRef idx="2">
-            <a:schemeClr val="accent1"/>
-          </a:effectRef>
-          <a:fontRef idx="minor">
-            <a:schemeClr val="lt1"/>
-          </a:fontRef>
-        </p:style>
-        <p:txBody>
-          <a:bodyPr rtlCol="0" anchor="ctr"/>
-          <a:lstStyle/>
-          <a:p>
-            <a:pPr algn="ctr"/>
-          </a:p>
-        </p:txBody>
-      </p:sp>
-      <p:sp>
-        <p:nvSpPr>
-          <p:cNvPr id="22" name="TextBox 21"/>
-          <p:cNvSpPr txBox="1"/>
-          <p:nvPr/>
-        </p:nvSpPr>
-        <p:spPr>
-          <a:xfrm>
-            <a:off x="4937760" y="3840479"/>
-            <a:ext cx="2020824" cy="310896"/>
+            <a:off x="11448288" y="6400800"/>
+            <a:ext cx="365760" cy="182880"/>
           </a:xfrm>
           <a:prstGeom prst="rect">
             <a:avLst/>
@@ -8571,234 +10387,6 @@
           </a:bodyPr>
           <a:lstStyle/>
           <a:p>
-            <a:pPr algn="l"/>
-            <a:r>
-              <a:rPr sz="1400" b="1">
-                <a:solidFill>
-                  <a:srgbClr val="11213E"/>
-                </a:solidFill>
-                <a:latin typeface="Georgia"/>
-              </a:rPr>
-              <a:t>COMP3220</a:t>
-            </a:r>
-          </a:p>
-        </p:txBody>
-      </p:sp>
-      <p:sp>
-        <p:nvSpPr>
-          <p:cNvPr id="23" name="TextBox 22"/>
-          <p:cNvSpPr txBox="1"/>
-          <p:nvPr/>
-        </p:nvSpPr>
-        <p:spPr>
-          <a:xfrm>
-            <a:off x="4901184" y="4169663"/>
-            <a:ext cx="2093976" cy="1133856"/>
-          </a:xfrm>
-          <a:prstGeom prst="rect">
-            <a:avLst/>
-          </a:prstGeom>
-          <a:noFill/>
-        </p:spPr>
-        <p:txBody>
-          <a:bodyPr wrap="square" lIns="101600" rIns="101600" tIns="50800" bIns="50800">
-            <a:spAutoFit/>
-          </a:bodyPr>
-          <a:lstStyle/>
-          <a:p>
-            <a:pPr>
-              <a:spcAft>
-                <a:spcPts val="700"/>
-              </a:spcAft>
-            </a:pPr>
-            <a:r>
-              <a:rPr sz="1150" b="0">
-                <a:solidFill>
-                  <a:srgbClr val="1F2A37"/>
-                </a:solidFill>
-                <a:latin typeface="Aptos"/>
-              </a:rPr>
-              <a:t>Intelligent decision-making for extraction, matching, and qualification.</a:t>
-            </a:r>
-          </a:p>
-        </p:txBody>
-      </p:sp>
-      <p:sp>
-        <p:nvSpPr>
-          <p:cNvPr id="24" name="Rounded Rectangle 23"/>
-          <p:cNvSpPr/>
-          <p:nvPr/>
-        </p:nvSpPr>
-        <p:spPr>
-          <a:xfrm>
-            <a:off x="7781544" y="3749039"/>
-            <a:ext cx="2240280" cy="1627632"/>
-          </a:xfrm>
-          <a:prstGeom prst="roundRect">
-            <a:avLst/>
-          </a:prstGeom>
-          <a:solidFill>
-            <a:srgbClr val="E4F2EC"/>
-          </a:solidFill>
-          <a:ln>
-            <a:solidFill>
-              <a:srgbClr val="E4F2EC"/>
-            </a:solidFill>
-          </a:ln>
-        </p:spPr>
-        <p:style>
-          <a:lnRef idx="1">
-            <a:schemeClr val="accent1"/>
-          </a:lnRef>
-          <a:fillRef idx="3">
-            <a:schemeClr val="accent1"/>
-          </a:fillRef>
-          <a:effectRef idx="2">
-            <a:schemeClr val="accent1"/>
-          </a:effectRef>
-          <a:fontRef idx="minor">
-            <a:schemeClr val="lt1"/>
-          </a:fontRef>
-        </p:style>
-        <p:txBody>
-          <a:bodyPr rtlCol="0" anchor="ctr"/>
-          <a:lstStyle/>
-          <a:p>
-            <a:pPr algn="ctr"/>
-          </a:p>
-        </p:txBody>
-      </p:sp>
-      <p:sp>
-        <p:nvSpPr>
-          <p:cNvPr id="25" name="TextBox 24"/>
-          <p:cNvSpPr txBox="1"/>
-          <p:nvPr/>
-        </p:nvSpPr>
-        <p:spPr>
-          <a:xfrm>
-            <a:off x="7891272" y="3840479"/>
-            <a:ext cx="2020824" cy="310896"/>
-          </a:xfrm>
-          <a:prstGeom prst="rect">
-            <a:avLst/>
-          </a:prstGeom>
-          <a:noFill/>
-        </p:spPr>
-        <p:txBody>
-          <a:bodyPr wrap="square" lIns="76200" rIns="76200" tIns="50800" bIns="50800" anchor="t">
-            <a:spAutoFit/>
-          </a:bodyPr>
-          <a:lstStyle/>
-          <a:p>
-            <a:pPr algn="l"/>
-            <a:r>
-              <a:rPr sz="1400" b="1">
-                <a:solidFill>
-                  <a:srgbClr val="11213E"/>
-                </a:solidFill>
-                <a:latin typeface="Georgia"/>
-              </a:rPr>
-              <a:t>COMP2211</a:t>
-            </a:r>
-          </a:p>
-        </p:txBody>
-      </p:sp>
-      <p:sp>
-        <p:nvSpPr>
-          <p:cNvPr id="26" name="TextBox 25"/>
-          <p:cNvSpPr txBox="1"/>
-          <p:nvPr/>
-        </p:nvSpPr>
-        <p:spPr>
-          <a:xfrm>
-            <a:off x="7854696" y="4169663"/>
-            <a:ext cx="2093976" cy="1133856"/>
-          </a:xfrm>
-          <a:prstGeom prst="rect">
-            <a:avLst/>
-          </a:prstGeom>
-          <a:noFill/>
-        </p:spPr>
-        <p:txBody>
-          <a:bodyPr wrap="square" lIns="101600" rIns="101600" tIns="50800" bIns="50800">
-            <a:spAutoFit/>
-          </a:bodyPr>
-          <a:lstStyle/>
-          <a:p>
-            <a:pPr>
-              <a:spcAft>
-                <a:spcPts val="700"/>
-              </a:spcAft>
-            </a:pPr>
-            <a:r>
-              <a:rPr sz="1150" b="0">
-                <a:solidFill>
-                  <a:srgbClr val="1F2A37"/>
-                </a:solidFill>
-                <a:latin typeface="Aptos"/>
-              </a:rPr>
-              <a:t>Optimization thinking for ranking and balancing multiple decision factors.</a:t>
-            </a:r>
-          </a:p>
-        </p:txBody>
-      </p:sp>
-      <p:sp>
-        <p:nvSpPr>
-          <p:cNvPr id="27" name="TextBox 26"/>
-          <p:cNvSpPr txBox="1"/>
-          <p:nvPr/>
-        </p:nvSpPr>
-        <p:spPr>
-          <a:xfrm>
-            <a:off x="804672" y="5897880"/>
-            <a:ext cx="10789920" cy="320040"/>
-          </a:xfrm>
-          <a:prstGeom prst="rect">
-            <a:avLst/>
-          </a:prstGeom>
-          <a:noFill/>
-        </p:spPr>
-        <p:txBody>
-          <a:bodyPr wrap="square" lIns="76200" rIns="76200" tIns="50800" bIns="50800" anchor="t">
-            <a:spAutoFit/>
-          </a:bodyPr>
-          <a:lstStyle/>
-          <a:p>
-            <a:pPr algn="l"/>
-            <a:r>
-              <a:rPr sz="1300" b="1">
-                <a:solidFill>
-                  <a:srgbClr val="11213E"/>
-                </a:solidFill>
-                <a:latin typeface="Aptos"/>
-              </a:rPr>
-              <a:t>Taken together, the project draws on software engineering, databases, web development, AI, data science, programming, and optimization.</a:t>
-            </a:r>
-          </a:p>
-        </p:txBody>
-      </p:sp>
-      <p:sp>
-        <p:nvSpPr>
-          <p:cNvPr id="28" name="TextBox 27"/>
-          <p:cNvSpPr txBox="1"/>
-          <p:nvPr/>
-        </p:nvSpPr>
-        <p:spPr>
-          <a:xfrm>
-            <a:off x="11448288" y="6400800"/>
-            <a:ext cx="365760" cy="182880"/>
-          </a:xfrm>
-          <a:prstGeom prst="rect">
-            <a:avLst/>
-          </a:prstGeom>
-          <a:noFill/>
-        </p:spPr>
-        <p:txBody>
-          <a:bodyPr wrap="square" lIns="76200" rIns="76200" tIns="50800" bIns="50800" anchor="t">
-            <a:spAutoFit/>
-          </a:bodyPr>
-          <a:lstStyle/>
-          <a:p>
             <a:pPr algn="r"/>
             <a:r>
               <a:rPr sz="1000" b="0">
@@ -8807,7 +10395,7 @@
                 </a:solidFill>
                 <a:latin typeface="Aptos"/>
               </a:rPr>
-              <a:t>6</a:t>
+              <a:t>10</a:t>
             </a:r>
           </a:p>
         </p:txBody>
@@ -8820,7 +10408,7 @@
 </p:sld>
 </file>
 
-<file path=ppt/slides/slide7.xml><?xml version="1.0" encoding="utf-8"?>
+<file path=ppt/slides/slide8.xml><?xml version="1.0" encoding="utf-8"?>
 <p:sld xmlns:a="http://schemas.openxmlformats.org/drawingml/2006/main" xmlns:p="http://schemas.openxmlformats.org/presentationml/2006/main" xmlns:r="http://schemas.openxmlformats.org/officeDocument/2006/relationships">
   <p:cSld>
     <p:bg>
@@ -8892,7 +10480,7 @@
         <p:spPr>
           <a:xfrm>
             <a:off x="640080" y="502920"/>
-            <a:ext cx="8686800" cy="685800"/>
+            <a:ext cx="8869680" cy="658368"/>
           </a:xfrm>
           <a:prstGeom prst="rect">
             <a:avLst/>
@@ -8913,7 +10501,7 @@
                 </a:solidFill>
                 <a:latin typeface="Georgia"/>
               </a:rPr>
-              <a:t>Progress on Target</a:t>
+              <a:t>Use Case Diagram</a:t>
             </a:r>
           </a:p>
         </p:txBody>
@@ -8926,8 +10514,8 @@
         </p:nvSpPr>
         <p:spPr>
           <a:xfrm>
-            <a:off x="658368" y="1097280"/>
-            <a:ext cx="8869680" cy="347472"/>
+            <a:off x="658368" y="1078992"/>
+            <a:ext cx="8869680" cy="329184"/>
           </a:xfrm>
           <a:prstGeom prst="rect">
             <a:avLst/>
@@ -8948,7 +10536,7 @@
                 </a:solidFill>
                 <a:latin typeface="Aptos"/>
               </a:rPr>
-              <a:t>Who is doing what right now</a:t>
+              <a:t>Progress artefact for the planned user interactions</a:t>
             </a:r>
           </a:p>
         </p:txBody>
@@ -8961,8 +10549,8 @@
         </p:nvSpPr>
         <p:spPr>
           <a:xfrm>
-            <a:off x="9802368" y="566928"/>
-            <a:ext cx="1645920" cy="329184"/>
+            <a:off x="9710928" y="566928"/>
+            <a:ext cx="1783080" cy="329184"/>
           </a:xfrm>
           <a:prstGeom prst="roundRect">
             <a:avLst/>
@@ -9015,8 +10603,77 @@
         </p:nvSpPr>
         <p:spPr>
           <a:xfrm>
-            <a:off x="658368" y="1554480"/>
-            <a:ext cx="2743200" cy="1097280"/>
+            <a:off x="566928" y="1417320"/>
+            <a:ext cx="7909560" cy="4800600"/>
+          </a:xfrm>
+          <a:prstGeom prst="roundRect">
+            <a:avLst/>
+          </a:prstGeom>
+          <a:solidFill>
+            <a:srgbClr val="EAEEF3"/>
+          </a:solidFill>
+          <a:ln>
+            <a:solidFill>
+              <a:srgbClr val="EAEEF3"/>
+            </a:solidFill>
+          </a:ln>
+        </p:spPr>
+        <p:style>
+          <a:lnRef idx="1">
+            <a:schemeClr val="accent1"/>
+          </a:lnRef>
+          <a:fillRef idx="3">
+            <a:schemeClr val="accent1"/>
+          </a:fillRef>
+          <a:effectRef idx="2">
+            <a:schemeClr val="accent1"/>
+          </a:effectRef>
+          <a:fontRef idx="minor">
+            <a:schemeClr val="lt1"/>
+          </a:fontRef>
+        </p:style>
+        <p:txBody>
+          <a:bodyPr rtlCol="0" anchor="ctr"/>
+          <a:lstStyle/>
+          <a:p>
+            <a:pPr algn="ctr"/>
+          </a:p>
+        </p:txBody>
+      </p:sp>
+      <p:pic>
+        <p:nvPicPr>
+          <p:cNvPr id="7" name="Picture 6" descr="image.png"/>
+          <p:cNvPicPr>
+            <a:picLocks noChangeAspect="1"/>
+          </p:cNvPicPr>
+          <p:nvPr/>
+        </p:nvPicPr>
+        <p:blipFill>
+          <a:blip r:embed="rId2"/>
+          <a:stretch>
+            <a:fillRect/>
+          </a:stretch>
+        </p:blipFill>
+        <p:spPr>
+          <a:xfrm>
+            <a:off x="777240" y="1885980"/>
+            <a:ext cx="7498079" cy="3826703"/>
+          </a:xfrm>
+          <a:prstGeom prst="rect">
+            <a:avLst/>
+          </a:prstGeom>
+        </p:spPr>
+      </p:pic>
+      <p:sp>
+        <p:nvSpPr>
+          <p:cNvPr id="8" name="Rounded Rectangle 7"/>
+          <p:cNvSpPr/>
+          <p:nvPr/>
+        </p:nvSpPr>
+        <p:spPr>
+          <a:xfrm>
+            <a:off x="8732520" y="1627632"/>
+            <a:ext cx="2697480" cy="2971800"/>
           </a:xfrm>
           <a:prstGeom prst="roundRect">
             <a:avLst/>
@@ -9054,14 +10711,14 @@
       </p:sp>
       <p:sp>
         <p:nvSpPr>
-          <p:cNvPr id="7" name="TextBox 6"/>
+          <p:cNvPr id="9" name="TextBox 8"/>
           <p:cNvSpPr txBox="1"/>
           <p:nvPr/>
         </p:nvSpPr>
         <p:spPr>
           <a:xfrm>
-            <a:off x="768096" y="1645920"/>
-            <a:ext cx="2523744" cy="310896"/>
+            <a:off x="8842248" y="1719072"/>
+            <a:ext cx="2478024" cy="310896"/>
           </a:xfrm>
           <a:prstGeom prst="rect">
             <a:avLst/>
@@ -9082,21 +10739,21 @@
                 </a:solidFill>
                 <a:latin typeface="Georgia"/>
               </a:rPr>
-              <a:t>Alwyn Sterling</a:t>
-            </a:r>
-          </a:p>
-        </p:txBody>
-      </p:sp>
-      <p:sp>
-        <p:nvSpPr>
-          <p:cNvPr id="8" name="TextBox 7"/>
+              <a:t>Why it matters</a:t>
+            </a:r>
+          </a:p>
+        </p:txBody>
+      </p:sp>
+      <p:sp>
+        <p:nvSpPr>
+          <p:cNvPr id="10" name="TextBox 9"/>
           <p:cNvSpPr txBox="1"/>
           <p:nvPr/>
         </p:nvSpPr>
         <p:spPr>
           <a:xfrm>
-            <a:off x="731520" y="1975104"/>
-            <a:ext cx="2596896" cy="603504"/>
+            <a:off x="8805672" y="2048256"/>
+            <a:ext cx="2551176" cy="2478024"/>
           </a:xfrm>
           <a:prstGeom prst="rect">
             <a:avLst/>
@@ -9121,7 +10778,7 @@
                 </a:solidFill>
                 <a:latin typeface="Aptos"/>
               </a:rPr>
-              <a:t>Backend development</a:t>
+              <a:t>This artefact clarifies the main interactions between Candidates, Employers, and the system.</a:t>
             </a:r>
           </a:p>
           <a:p>
@@ -9137,66 +10794,21 @@
                 </a:solidFill>
                 <a:latin typeface="Aptos"/>
               </a:rPr>
-              <a:t>Database implementation</a:t>
-            </a:r>
-          </a:p>
-        </p:txBody>
-      </p:sp>
-      <p:sp>
-        <p:nvSpPr>
-          <p:cNvPr id="9" name="Rounded Rectangle 8"/>
-          <p:cNvSpPr/>
-          <p:nvPr/>
-        </p:nvSpPr>
-        <p:spPr>
-          <a:xfrm>
-            <a:off x="658368" y="2788920"/>
-            <a:ext cx="2743200" cy="1097280"/>
-          </a:xfrm>
-          <a:prstGeom prst="roundRect">
-            <a:avLst/>
-          </a:prstGeom>
-          <a:solidFill>
-            <a:srgbClr val="E4F2EC"/>
-          </a:solidFill>
-          <a:ln>
-            <a:solidFill>
-              <a:srgbClr val="E4F2EC"/>
-            </a:solidFill>
-          </a:ln>
-        </p:spPr>
-        <p:style>
-          <a:lnRef idx="1">
-            <a:schemeClr val="accent1"/>
-          </a:lnRef>
-          <a:fillRef idx="3">
-            <a:schemeClr val="accent1"/>
-          </a:fillRef>
-          <a:effectRef idx="2">
-            <a:schemeClr val="accent1"/>
-          </a:effectRef>
-          <a:fontRef idx="minor">
-            <a:schemeClr val="lt1"/>
-          </a:fontRef>
-        </p:style>
-        <p:txBody>
-          <a:bodyPr rtlCol="0" anchor="ctr"/>
-          <a:lstStyle/>
-          <a:p>
-            <a:pPr algn="ctr"/>
-          </a:p>
-        </p:txBody>
-      </p:sp>
-      <p:sp>
-        <p:nvSpPr>
-          <p:cNvPr id="10" name="TextBox 9"/>
+              <a:t>It helps refine what each actor can submit, view, and inspect.</a:t>
+            </a:r>
+          </a:p>
+        </p:txBody>
+      </p:sp>
+      <p:sp>
+        <p:nvSpPr>
+          <p:cNvPr id="11" name="TextBox 10"/>
           <p:cNvSpPr txBox="1"/>
           <p:nvPr/>
         </p:nvSpPr>
         <p:spPr>
           <a:xfrm>
-            <a:off x="768096" y="2880360"/>
-            <a:ext cx="2523744" cy="310896"/>
+            <a:off x="804672" y="5998464"/>
+            <a:ext cx="7452360" cy="228600"/>
           </a:xfrm>
           <a:prstGeom prst="rect">
             <a:avLst/>
@@ -9211,127 +10823,27 @@
           <a:p>
             <a:pPr algn="l"/>
             <a:r>
-              <a:rPr sz="1400" b="1">
-                <a:solidFill>
-                  <a:srgbClr val="11213E"/>
-                </a:solidFill>
-                <a:latin typeface="Georgia"/>
-              </a:rPr>
-              <a:t>Dominic Scott</a:t>
-            </a:r>
-          </a:p>
-        </p:txBody>
-      </p:sp>
-      <p:sp>
-        <p:nvSpPr>
-          <p:cNvPr id="11" name="TextBox 10"/>
+              <a:rPr sz="1150" b="0">
+                <a:solidFill>
+                  <a:srgbClr val="2D3E54"/>
+                </a:solidFill>
+                <a:latin typeface="Aptos"/>
+              </a:rPr>
+              <a:t>Caption: This artefact clarifies the main interactions between Candidates, Employers, and the system.</a:t>
+            </a:r>
+          </a:p>
+        </p:txBody>
+      </p:sp>
+      <p:sp>
+        <p:nvSpPr>
+          <p:cNvPr id="12" name="TextBox 11"/>
           <p:cNvSpPr txBox="1"/>
           <p:nvPr/>
         </p:nvSpPr>
         <p:spPr>
           <a:xfrm>
-            <a:off x="731520" y="3209544"/>
-            <a:ext cx="2596896" cy="603504"/>
-          </a:xfrm>
-          <a:prstGeom prst="rect">
-            <a:avLst/>
-          </a:prstGeom>
-          <a:noFill/>
-        </p:spPr>
-        <p:txBody>
-          <a:bodyPr wrap="square" lIns="101600" rIns="101600" tIns="50800" bIns="50800">
-            <a:spAutoFit/>
-          </a:bodyPr>
-          <a:lstStyle/>
-          <a:p>
-            <a:pPr>
-              <a:spcAft>
-                <a:spcPts val="700"/>
-              </a:spcAft>
-            </a:pPr>
-            <a:r>
-              <a:rPr sz="1150" b="0">
-                <a:solidFill>
-                  <a:srgbClr val="1F2A37"/>
-                </a:solidFill>
-                <a:latin typeface="Aptos"/>
-              </a:rPr>
-              <a:t>Backend development</a:t>
-            </a:r>
-          </a:p>
-          <a:p>
-            <a:pPr>
-              <a:spcAft>
-                <a:spcPts val="700"/>
-              </a:spcAft>
-            </a:pPr>
-            <a:r>
-              <a:rPr sz="1150" b="0">
-                <a:solidFill>
-                  <a:srgbClr val="1F2A37"/>
-                </a:solidFill>
-                <a:latin typeface="Aptos"/>
-              </a:rPr>
-              <a:t>Database implementation</a:t>
-            </a:r>
-          </a:p>
-        </p:txBody>
-      </p:sp>
-      <p:sp>
-        <p:nvSpPr>
-          <p:cNvPr id="12" name="Rounded Rectangle 11"/>
-          <p:cNvSpPr/>
-          <p:nvPr/>
-        </p:nvSpPr>
-        <p:spPr>
-          <a:xfrm>
-            <a:off x="658368" y="4023360"/>
-            <a:ext cx="2743200" cy="1325880"/>
-          </a:xfrm>
-          <a:prstGeom prst="roundRect">
-            <a:avLst/>
-          </a:prstGeom>
-          <a:solidFill>
-            <a:srgbClr val="F7EBC7"/>
-          </a:solidFill>
-          <a:ln>
-            <a:solidFill>
-              <a:srgbClr val="F7EBC7"/>
-            </a:solidFill>
-          </a:ln>
-        </p:spPr>
-        <p:style>
-          <a:lnRef idx="1">
-            <a:schemeClr val="accent1"/>
-          </a:lnRef>
-          <a:fillRef idx="3">
-            <a:schemeClr val="accent1"/>
-          </a:fillRef>
-          <a:effectRef idx="2">
-            <a:schemeClr val="accent1"/>
-          </a:effectRef>
-          <a:fontRef idx="minor">
-            <a:schemeClr val="lt1"/>
-          </a:fontRef>
-        </p:style>
-        <p:txBody>
-          <a:bodyPr rtlCol="0" anchor="ctr"/>
-          <a:lstStyle/>
-          <a:p>
-            <a:pPr algn="ctr"/>
-          </a:p>
-        </p:txBody>
-      </p:sp>
-      <p:sp>
-        <p:nvSpPr>
-          <p:cNvPr id="13" name="TextBox 12"/>
-          <p:cNvSpPr txBox="1"/>
-          <p:nvPr/>
-        </p:nvSpPr>
-        <p:spPr>
-          <a:xfrm>
-            <a:off x="768096" y="4114800"/>
-            <a:ext cx="2523744" cy="310896"/>
+            <a:off x="11448288" y="6400800"/>
+            <a:ext cx="365760" cy="182880"/>
           </a:xfrm>
           <a:prstGeom prst="rect">
             <a:avLst/>
@@ -9344,517 +10856,6 @@
           </a:bodyPr>
           <a:lstStyle/>
           <a:p>
-            <a:pPr algn="l"/>
-            <a:r>
-              <a:rPr sz="1400" b="1">
-                <a:solidFill>
-                  <a:srgbClr val="11213E"/>
-                </a:solidFill>
-                <a:latin typeface="Georgia"/>
-              </a:rPr>
-              <a:t>Ron-Hugh Walters</a:t>
-            </a:r>
-          </a:p>
-        </p:txBody>
-      </p:sp>
-      <p:sp>
-        <p:nvSpPr>
-          <p:cNvPr id="14" name="TextBox 13"/>
-          <p:cNvSpPr txBox="1"/>
-          <p:nvPr/>
-        </p:nvSpPr>
-        <p:spPr>
-          <a:xfrm>
-            <a:off x="731520" y="4443984"/>
-            <a:ext cx="2596896" cy="832104"/>
-          </a:xfrm>
-          <a:prstGeom prst="rect">
-            <a:avLst/>
-          </a:prstGeom>
-          <a:noFill/>
-        </p:spPr>
-        <p:txBody>
-          <a:bodyPr wrap="square" lIns="101600" rIns="101600" tIns="50800" bIns="50800">
-            <a:spAutoFit/>
-          </a:bodyPr>
-          <a:lstStyle/>
-          <a:p>
-            <a:pPr>
-              <a:spcAft>
-                <a:spcPts val="700"/>
-              </a:spcAft>
-            </a:pPr>
-            <a:r>
-              <a:rPr sz="1150" b="0">
-                <a:solidFill>
-                  <a:srgbClr val="1F2A37"/>
-                </a:solidFill>
-                <a:latin typeface="Aptos"/>
-              </a:rPr>
-              <a:t>Documentation</a:t>
-            </a:r>
-          </a:p>
-          <a:p>
-            <a:pPr>
-              <a:spcAft>
-                <a:spcPts val="700"/>
-              </a:spcAft>
-            </a:pPr>
-            <a:r>
-              <a:rPr sz="1150" b="0">
-                <a:solidFill>
-                  <a:srgbClr val="1F2A37"/>
-                </a:solidFill>
-                <a:latin typeface="Aptos"/>
-              </a:rPr>
-              <a:t>System modelling</a:t>
-            </a:r>
-          </a:p>
-          <a:p>
-            <a:pPr>
-              <a:spcAft>
-                <a:spcPts val="700"/>
-              </a:spcAft>
-            </a:pPr>
-            <a:r>
-              <a:rPr sz="1150" b="0">
-                <a:solidFill>
-                  <a:srgbClr val="1F2A37"/>
-                </a:solidFill>
-                <a:latin typeface="Aptos"/>
-              </a:rPr>
-              <a:t>Data cleaning</a:t>
-            </a:r>
-          </a:p>
-          <a:p>
-            <a:pPr>
-              <a:spcAft>
-                <a:spcPts val="700"/>
-              </a:spcAft>
-            </a:pPr>
-            <a:r>
-              <a:rPr sz="1150" b="0">
-                <a:solidFill>
-                  <a:srgbClr val="1F2A37"/>
-                </a:solidFill>
-                <a:latin typeface="Aptos"/>
-              </a:rPr>
-              <a:t>Data parsing</a:t>
-            </a:r>
-          </a:p>
-        </p:txBody>
-      </p:sp>
-      <p:sp>
-        <p:nvSpPr>
-          <p:cNvPr id="15" name="Rounded Rectangle 14"/>
-          <p:cNvSpPr/>
-          <p:nvPr/>
-        </p:nvSpPr>
-        <p:spPr>
-          <a:xfrm>
-            <a:off x="3611880" y="1554480"/>
-            <a:ext cx="2743200" cy="1097280"/>
-          </a:xfrm>
-          <a:prstGeom prst="roundRect">
-            <a:avLst/>
-          </a:prstGeom>
-          <a:solidFill>
-            <a:srgbClr val="F6E1DC"/>
-          </a:solidFill>
-          <a:ln>
-            <a:solidFill>
-              <a:srgbClr val="F6E1DC"/>
-            </a:solidFill>
-          </a:ln>
-        </p:spPr>
-        <p:style>
-          <a:lnRef idx="1">
-            <a:schemeClr val="accent1"/>
-          </a:lnRef>
-          <a:fillRef idx="3">
-            <a:schemeClr val="accent1"/>
-          </a:fillRef>
-          <a:effectRef idx="2">
-            <a:schemeClr val="accent1"/>
-          </a:effectRef>
-          <a:fontRef idx="minor">
-            <a:schemeClr val="lt1"/>
-          </a:fontRef>
-        </p:style>
-        <p:txBody>
-          <a:bodyPr rtlCol="0" anchor="ctr"/>
-          <a:lstStyle/>
-          <a:p>
-            <a:pPr algn="ctr"/>
-          </a:p>
-        </p:txBody>
-      </p:sp>
-      <p:sp>
-        <p:nvSpPr>
-          <p:cNvPr id="16" name="TextBox 15"/>
-          <p:cNvSpPr txBox="1"/>
-          <p:nvPr/>
-        </p:nvSpPr>
-        <p:spPr>
-          <a:xfrm>
-            <a:off x="3721608" y="1645920"/>
-            <a:ext cx="2523744" cy="310896"/>
-          </a:xfrm>
-          <a:prstGeom prst="rect">
-            <a:avLst/>
-          </a:prstGeom>
-          <a:noFill/>
-        </p:spPr>
-        <p:txBody>
-          <a:bodyPr wrap="square" lIns="76200" rIns="76200" tIns="50800" bIns="50800" anchor="t">
-            <a:spAutoFit/>
-          </a:bodyPr>
-          <a:lstStyle/>
-          <a:p>
-            <a:pPr algn="l"/>
-            <a:r>
-              <a:rPr sz="1400" b="1">
-                <a:solidFill>
-                  <a:srgbClr val="11213E"/>
-                </a:solidFill>
-                <a:latin typeface="Georgia"/>
-              </a:rPr>
-              <a:t>Leah-Jay Holness</a:t>
-            </a:r>
-          </a:p>
-        </p:txBody>
-      </p:sp>
-      <p:sp>
-        <p:nvSpPr>
-          <p:cNvPr id="17" name="TextBox 16"/>
-          <p:cNvSpPr txBox="1"/>
-          <p:nvPr/>
-        </p:nvSpPr>
-        <p:spPr>
-          <a:xfrm>
-            <a:off x="3685032" y="1975104"/>
-            <a:ext cx="2596896" cy="603504"/>
-          </a:xfrm>
-          <a:prstGeom prst="rect">
-            <a:avLst/>
-          </a:prstGeom>
-          <a:noFill/>
-        </p:spPr>
-        <p:txBody>
-          <a:bodyPr wrap="square" lIns="101600" rIns="101600" tIns="50800" bIns="50800">
-            <a:spAutoFit/>
-          </a:bodyPr>
-          <a:lstStyle/>
-          <a:p>
-            <a:pPr>
-              <a:spcAft>
-                <a:spcPts val="700"/>
-              </a:spcAft>
-            </a:pPr>
-            <a:r>
-              <a:rPr sz="1150" b="0">
-                <a:solidFill>
-                  <a:srgbClr val="1F2A37"/>
-                </a:solidFill>
-                <a:latin typeface="Aptos"/>
-              </a:rPr>
-              <a:t>User interface design</a:t>
-            </a:r>
-          </a:p>
-        </p:txBody>
-      </p:sp>
-      <p:sp>
-        <p:nvSpPr>
-          <p:cNvPr id="18" name="Rounded Rectangle 17"/>
-          <p:cNvSpPr/>
-          <p:nvPr/>
-        </p:nvSpPr>
-        <p:spPr>
-          <a:xfrm>
-            <a:off x="3611880" y="2788920"/>
-            <a:ext cx="2743200" cy="1097280"/>
-          </a:xfrm>
-          <a:prstGeom prst="roundRect">
-            <a:avLst/>
-          </a:prstGeom>
-          <a:solidFill>
-            <a:srgbClr val="EAEEF3"/>
-          </a:solidFill>
-          <a:ln>
-            <a:solidFill>
-              <a:srgbClr val="EAEEF3"/>
-            </a:solidFill>
-          </a:ln>
-        </p:spPr>
-        <p:style>
-          <a:lnRef idx="1">
-            <a:schemeClr val="accent1"/>
-          </a:lnRef>
-          <a:fillRef idx="3">
-            <a:schemeClr val="accent1"/>
-          </a:fillRef>
-          <a:effectRef idx="2">
-            <a:schemeClr val="accent1"/>
-          </a:effectRef>
-          <a:fontRef idx="minor">
-            <a:schemeClr val="lt1"/>
-          </a:fontRef>
-        </p:style>
-        <p:txBody>
-          <a:bodyPr rtlCol="0" anchor="ctr"/>
-          <a:lstStyle/>
-          <a:p>
-            <a:pPr algn="ctr"/>
-          </a:p>
-        </p:txBody>
-      </p:sp>
-      <p:sp>
-        <p:nvSpPr>
-          <p:cNvPr id="19" name="TextBox 18"/>
-          <p:cNvSpPr txBox="1"/>
-          <p:nvPr/>
-        </p:nvSpPr>
-        <p:spPr>
-          <a:xfrm>
-            <a:off x="3721608" y="2880360"/>
-            <a:ext cx="2523744" cy="310896"/>
-          </a:xfrm>
-          <a:prstGeom prst="rect">
-            <a:avLst/>
-          </a:prstGeom>
-          <a:noFill/>
-        </p:spPr>
-        <p:txBody>
-          <a:bodyPr wrap="square" lIns="76200" rIns="76200" tIns="50800" bIns="50800" anchor="t">
-            <a:spAutoFit/>
-          </a:bodyPr>
-          <a:lstStyle/>
-          <a:p>
-            <a:pPr algn="l"/>
-            <a:r>
-              <a:rPr sz="1400" b="1">
-                <a:solidFill>
-                  <a:srgbClr val="11213E"/>
-                </a:solidFill>
-                <a:latin typeface="Georgia"/>
-              </a:rPr>
-              <a:t>Tianna Bassaragh</a:t>
-            </a:r>
-          </a:p>
-        </p:txBody>
-      </p:sp>
-      <p:sp>
-        <p:nvSpPr>
-          <p:cNvPr id="20" name="TextBox 19"/>
-          <p:cNvSpPr txBox="1"/>
-          <p:nvPr/>
-        </p:nvSpPr>
-        <p:spPr>
-          <a:xfrm>
-            <a:off x="3685032" y="3209544"/>
-            <a:ext cx="2596896" cy="603504"/>
-          </a:xfrm>
-          <a:prstGeom prst="rect">
-            <a:avLst/>
-          </a:prstGeom>
-          <a:noFill/>
-        </p:spPr>
-        <p:txBody>
-          <a:bodyPr wrap="square" lIns="101600" rIns="101600" tIns="50800" bIns="50800">
-            <a:spAutoFit/>
-          </a:bodyPr>
-          <a:lstStyle/>
-          <a:p>
-            <a:pPr>
-              <a:spcAft>
-                <a:spcPts val="700"/>
-              </a:spcAft>
-            </a:pPr>
-            <a:r>
-              <a:rPr sz="1150" b="0">
-                <a:solidFill>
-                  <a:srgbClr val="1F2A37"/>
-                </a:solidFill>
-                <a:latin typeface="Aptos"/>
-              </a:rPr>
-              <a:t>User interface design</a:t>
-            </a:r>
-          </a:p>
-        </p:txBody>
-      </p:sp>
-      <p:sp>
-        <p:nvSpPr>
-          <p:cNvPr id="21" name="Rounded Rectangle 20"/>
-          <p:cNvSpPr/>
-          <p:nvPr/>
-        </p:nvSpPr>
-        <p:spPr>
-          <a:xfrm>
-            <a:off x="6784848" y="1600200"/>
-            <a:ext cx="4572000" cy="3703320"/>
-          </a:xfrm>
-          <a:prstGeom prst="roundRect">
-            <a:avLst/>
-          </a:prstGeom>
-          <a:solidFill>
-            <a:srgbClr val="11213E"/>
-          </a:solidFill>
-          <a:ln>
-            <a:solidFill>
-              <a:srgbClr val="11213E"/>
-            </a:solidFill>
-          </a:ln>
-        </p:spPr>
-        <p:style>
-          <a:lnRef idx="1">
-            <a:schemeClr val="accent1"/>
-          </a:lnRef>
-          <a:fillRef idx="3">
-            <a:schemeClr val="accent1"/>
-          </a:fillRef>
-          <a:effectRef idx="2">
-            <a:schemeClr val="accent1"/>
-          </a:effectRef>
-          <a:fontRef idx="minor">
-            <a:schemeClr val="lt1"/>
-          </a:fontRef>
-        </p:style>
-        <p:txBody>
-          <a:bodyPr rtlCol="0" anchor="ctr"/>
-          <a:lstStyle/>
-          <a:p>
-            <a:pPr algn="ctr"/>
-          </a:p>
-        </p:txBody>
-      </p:sp>
-      <p:sp>
-        <p:nvSpPr>
-          <p:cNvPr id="22" name="TextBox 21"/>
-          <p:cNvSpPr txBox="1"/>
-          <p:nvPr/>
-        </p:nvSpPr>
-        <p:spPr>
-          <a:xfrm>
-            <a:off x="7059168" y="1828800"/>
-            <a:ext cx="3840480" cy="274320"/>
-          </a:xfrm>
-          <a:prstGeom prst="rect">
-            <a:avLst/>
-          </a:prstGeom>
-          <a:noFill/>
-        </p:spPr>
-        <p:txBody>
-          <a:bodyPr wrap="square" lIns="76200" rIns="76200" tIns="50800" bIns="50800" anchor="t">
-            <a:spAutoFit/>
-          </a:bodyPr>
-          <a:lstStyle/>
-          <a:p>
-            <a:pPr algn="l"/>
-            <a:r>
-              <a:rPr sz="1300" b="1">
-                <a:solidFill>
-                  <a:srgbClr val="F7EBC7"/>
-                </a:solidFill>
-                <a:latin typeface="Aptos"/>
-              </a:rPr>
-              <a:t>What this shows for midsemester</a:t>
-            </a:r>
-          </a:p>
-        </p:txBody>
-      </p:sp>
-      <p:sp>
-        <p:nvSpPr>
-          <p:cNvPr id="23" name="TextBox 22"/>
-          <p:cNvSpPr txBox="1"/>
-          <p:nvPr/>
-        </p:nvSpPr>
-        <p:spPr>
-          <a:xfrm>
-            <a:off x="6995160" y="2139696"/>
-            <a:ext cx="3931920" cy="2788920"/>
-          </a:xfrm>
-          <a:prstGeom prst="rect">
-            <a:avLst/>
-          </a:prstGeom>
-          <a:noFill/>
-        </p:spPr>
-        <p:txBody>
-          <a:bodyPr wrap="square" lIns="101600" rIns="101600" tIns="50800" bIns="50800">
-            <a:spAutoFit/>
-          </a:bodyPr>
-          <a:lstStyle/>
-          <a:p>
-            <a:pPr>
-              <a:spcAft>
-                <a:spcPts val="700"/>
-              </a:spcAft>
-            </a:pPr>
-            <a:r>
-              <a:rPr sz="1500" b="0">
-                <a:solidFill>
-                  <a:srgbClr val="FFFFFF"/>
-                </a:solidFill>
-                <a:latin typeface="Aptos"/>
-              </a:rPr>
-              <a:t>The work is split across backend, database, UI, documentation, modelling, and data preparation.</a:t>
-            </a:r>
-          </a:p>
-          <a:p>
-            <a:pPr>
-              <a:spcAft>
-                <a:spcPts val="700"/>
-              </a:spcAft>
-            </a:pPr>
-            <a:r>
-              <a:rPr sz="1500" b="0">
-                <a:solidFill>
-                  <a:srgbClr val="FFFFFF"/>
-                </a:solidFill>
-                <a:latin typeface="Aptos"/>
-              </a:rPr>
-              <a:t>The team already has a defined structure rather than an undefined group effort.</a:t>
-            </a:r>
-          </a:p>
-          <a:p>
-            <a:pPr>
-              <a:spcAft>
-                <a:spcPts val="700"/>
-              </a:spcAft>
-            </a:pPr>
-            <a:r>
-              <a:rPr sz="1500" b="0">
-                <a:solidFill>
-                  <a:srgbClr val="FFFFFF"/>
-                </a:solidFill>
-                <a:latin typeface="Aptos"/>
-              </a:rPr>
-              <a:t>That makes the remaining implementation plan easier to organize and defend.</a:t>
-            </a:r>
-          </a:p>
-        </p:txBody>
-      </p:sp>
-      <p:sp>
-        <p:nvSpPr>
-          <p:cNvPr id="24" name="TextBox 23"/>
-          <p:cNvSpPr txBox="1"/>
-          <p:nvPr/>
-        </p:nvSpPr>
-        <p:spPr>
-          <a:xfrm>
-            <a:off x="11448288" y="6400800"/>
-            <a:ext cx="365760" cy="182880"/>
-          </a:xfrm>
-          <a:prstGeom prst="rect">
-            <a:avLst/>
-          </a:prstGeom>
-          <a:noFill/>
-        </p:spPr>
-        <p:txBody>
-          <a:bodyPr wrap="square" lIns="76200" rIns="76200" tIns="50800" bIns="50800" anchor="t">
-            <a:spAutoFit/>
-          </a:bodyPr>
-          <a:lstStyle/>
-          <a:p>
             <a:pPr algn="r"/>
             <a:r>
               <a:rPr sz="1000" b="0">
@@ -9863,7 +10864,7 @@
                 </a:solidFill>
                 <a:latin typeface="Aptos"/>
               </a:rPr>
-              <a:t>7</a:t>
+              <a:t>9</a:t>
             </a:r>
           </a:p>
         </p:txBody>
@@ -9876,7 +10877,7 @@
 </p:sld>
 </file>
 
-<file path=ppt/slides/slide8.xml><?xml version="1.0" encoding="utf-8"?>
+<file path=ppt/slides/slide9.xml><?xml version="1.0" encoding="utf-8"?>
 <p:sld xmlns:a="http://schemas.openxmlformats.org/drawingml/2006/main" xmlns:p="http://schemas.openxmlformats.org/presentationml/2006/main" xmlns:r="http://schemas.openxmlformats.org/officeDocument/2006/relationships">
   <p:cSld>
     <p:bg>
@@ -9948,7 +10949,7 @@
         <p:spPr>
           <a:xfrm>
             <a:off x="640080" y="502920"/>
-            <a:ext cx="8686800" cy="685800"/>
+            <a:ext cx="8869680" cy="658368"/>
           </a:xfrm>
           <a:prstGeom prst="rect">
             <a:avLst/>
@@ -9969,7 +10970,7 @@
                 </a:solidFill>
                 <a:latin typeface="Georgia"/>
               </a:rPr>
-              <a:t>What Remains to Be Done</a:t>
+              <a:t>Technical Challenges and Why the Project Is Non-Trivial</a:t>
             </a:r>
           </a:p>
         </p:txBody>
@@ -9982,8 +10983,8 @@
         </p:nvSpPr>
         <p:spPr>
           <a:xfrm>
-            <a:off x="658368" y="1097280"/>
-            <a:ext cx="8869680" cy="347472"/>
+            <a:off x="658368" y="1078992"/>
+            <a:ext cx="8869680" cy="329184"/>
           </a:xfrm>
           <a:prstGeom prst="rect">
             <a:avLst/>
@@ -10004,7 +11005,7 @@
                 </a:solidFill>
                 <a:latin typeface="Aptos"/>
               </a:rPr>
-              <a:t>Main implementation and evaluation work still ahead</a:t>
+              <a:t>This is a modelling problem, not just a CRUD app</a:t>
             </a:r>
           </a:p>
         </p:txBody>
@@ -10017,8 +11018,8 @@
         </p:nvSpPr>
         <p:spPr>
           <a:xfrm>
-            <a:off x="9802368" y="566928"/>
-            <a:ext cx="1645920" cy="329184"/>
+            <a:off x="9710928" y="566928"/>
+            <a:ext cx="1783080" cy="329184"/>
           </a:xfrm>
           <a:prstGeom prst="roundRect">
             <a:avLst/>
@@ -10058,7 +11059,7 @@
                 </a:solidFill>
                 <a:latin typeface="Aptos"/>
               </a:rPr>
-              <a:t>Next</a:t>
+              <a:t>Challenge</a:t>
             </a:r>
           </a:p>
         </p:txBody>
@@ -10071,8 +11072,8 @@
         </p:nvSpPr>
         <p:spPr>
           <a:xfrm>
-            <a:off x="731520" y="1463040"/>
-            <a:ext cx="6400800" cy="932688"/>
+            <a:off x="658368" y="1554480"/>
+            <a:ext cx="2606040" cy="1828800"/>
           </a:xfrm>
           <a:prstGeom prst="roundRect">
             <a:avLst/>
@@ -10116,8 +11117,8 @@
         </p:nvSpPr>
         <p:spPr>
           <a:xfrm>
-            <a:off x="841248" y="1554480"/>
-            <a:ext cx="6181344" cy="310896"/>
+            <a:off x="768096" y="1645920"/>
+            <a:ext cx="2386584" cy="310896"/>
           </a:xfrm>
           <a:prstGeom prst="rect">
             <a:avLst/>
@@ -10138,7 +11139,7 @@
                 </a:solidFill>
                 <a:latin typeface="Georgia"/>
               </a:rPr>
-              <a:t>1. Frontend</a:t>
+              <a:t>Extraction</a:t>
             </a:r>
           </a:p>
         </p:txBody>
@@ -10151,8 +11152,8 @@
         </p:nvSpPr>
         <p:spPr>
           <a:xfrm>
-            <a:off x="804672" y="1883664"/>
-            <a:ext cx="6254496" cy="438912"/>
+            <a:off x="731520" y="1975104"/>
+            <a:ext cx="2459736" cy="1335024"/>
           </a:xfrm>
           <a:prstGeom prst="rect">
             <a:avLst/>
@@ -10177,7 +11178,23 @@
                 </a:solidFill>
                 <a:latin typeface="Aptos"/>
               </a:rPr>
-              <a:t>Candidate and employer interfaces, page flow, and user interaction.</a:t>
+              <a:t>Competencies must be pulled from messy resumes and job descriptions.</a:t>
+            </a:r>
+          </a:p>
+          <a:p>
+            <a:pPr>
+              <a:spcAft>
+                <a:spcPts val="700"/>
+              </a:spcAft>
+            </a:pPr>
+            <a:r>
+              <a:rPr sz="1150" b="0">
+                <a:solidFill>
+                  <a:srgbClr val="1F2A37"/>
+                </a:solidFill>
+                <a:latin typeface="Aptos"/>
+              </a:rPr>
+              <a:t>The source documents are inconsistent and incomplete.</a:t>
             </a:r>
           </a:p>
         </p:txBody>
@@ -10190,8 +11207,8 @@
         </p:nvSpPr>
         <p:spPr>
           <a:xfrm>
-            <a:off x="731520" y="2651760"/>
-            <a:ext cx="6400800" cy="932688"/>
+            <a:off x="3456432" y="1554480"/>
+            <a:ext cx="2606040" cy="1828800"/>
           </a:xfrm>
           <a:prstGeom prst="roundRect">
             <a:avLst/>
@@ -10235,8 +11252,8 @@
         </p:nvSpPr>
         <p:spPr>
           <a:xfrm>
-            <a:off x="841248" y="2743200"/>
-            <a:ext cx="6181344" cy="310896"/>
+            <a:off x="3566160" y="1645920"/>
+            <a:ext cx="2386584" cy="310896"/>
           </a:xfrm>
           <a:prstGeom prst="rect">
             <a:avLst/>
@@ -10257,7 +11274,7 @@
                 </a:solidFill>
                 <a:latin typeface="Georgia"/>
               </a:rPr>
-              <a:t>2. Backend + Database</a:t>
+              <a:t>O*NET mapping</a:t>
             </a:r>
           </a:p>
         </p:txBody>
@@ -10270,8 +11287,8 @@
         </p:nvSpPr>
         <p:spPr>
           <a:xfrm>
-            <a:off x="804672" y="3072384"/>
-            <a:ext cx="6254496" cy="438912"/>
+            <a:off x="3529584" y="1975104"/>
+            <a:ext cx="2459736" cy="1335024"/>
           </a:xfrm>
           <a:prstGeom prst="rect">
             <a:avLst/>
@@ -10296,7 +11313,23 @@
                 </a:solidFill>
                 <a:latin typeface="Aptos"/>
               </a:rPr>
-              <a:t>API endpoints, document processing flow, and storage for jobs, resumes, profiles, and matches.</a:t>
+              <a:t>Extracted text must be mapped into a shared competency space.</a:t>
+            </a:r>
+          </a:p>
+          <a:p>
+            <a:pPr>
+              <a:spcAft>
+                <a:spcPts val="700"/>
+              </a:spcAft>
+            </a:pPr>
+            <a:r>
+              <a:rPr sz="1150" b="0">
+                <a:solidFill>
+                  <a:srgbClr val="1F2A37"/>
+                </a:solidFill>
+                <a:latin typeface="Aptos"/>
+              </a:rPr>
+              <a:t>That mapping has to be meaningful enough for comparison.</a:t>
             </a:r>
           </a:p>
         </p:txBody>
@@ -10309,8 +11342,8 @@
         </p:nvSpPr>
         <p:spPr>
           <a:xfrm>
-            <a:off x="731520" y="3840480"/>
-            <a:ext cx="6400800" cy="932688"/>
+            <a:off x="6254496" y="1554480"/>
+            <a:ext cx="2606040" cy="1828800"/>
           </a:xfrm>
           <a:prstGeom prst="roundRect">
             <a:avLst/>
@@ -10354,8 +11387,8 @@
         </p:nvSpPr>
         <p:spPr>
           <a:xfrm>
-            <a:off x="841248" y="3931920"/>
-            <a:ext cx="6181344" cy="310896"/>
+            <a:off x="6364224" y="1645920"/>
+            <a:ext cx="2386584" cy="310896"/>
           </a:xfrm>
           <a:prstGeom prst="rect">
             <a:avLst/>
@@ -10376,7 +11409,7 @@
                 </a:solidFill>
                 <a:latin typeface="Georgia"/>
               </a:rPr>
-              <a:t>3. Implement the matching pipeline</a:t>
+              <a:t>Defensible qualification</a:t>
             </a:r>
           </a:p>
         </p:txBody>
@@ -10389,8 +11422,8 @@
         </p:nvSpPr>
         <p:spPr>
           <a:xfrm>
-            <a:off x="804672" y="4261104"/>
-            <a:ext cx="6254496" cy="438912"/>
+            <a:off x="6327648" y="1975104"/>
+            <a:ext cx="2459736" cy="1335024"/>
           </a:xfrm>
           <a:prstGeom prst="rect">
             <a:avLst/>
@@ -10415,7 +11448,23 @@
                 </a:solidFill>
                 <a:latin typeface="Aptos"/>
               </a:rPr>
-              <a:t>Resume parsing, job parsing, mapping, qualification, and ranking logic.</a:t>
+              <a:t>Qualification must reflect skill coverage, experience, and education.</a:t>
+            </a:r>
+          </a:p>
+          <a:p>
+            <a:pPr>
+              <a:spcAft>
+                <a:spcPts val="700"/>
+              </a:spcAft>
+            </a:pPr>
+            <a:r>
+              <a:rPr sz="1150" b="0">
+                <a:solidFill>
+                  <a:srgbClr val="1F2A37"/>
+                </a:solidFill>
+                <a:latin typeface="Aptos"/>
+              </a:rPr>
+              <a:t>The decision cannot collapse into an arbitrary single score.</a:t>
             </a:r>
           </a:p>
         </p:txBody>
@@ -10428,8 +11477,8 @@
         </p:nvSpPr>
         <p:spPr>
           <a:xfrm>
-            <a:off x="731520" y="5029200"/>
-            <a:ext cx="6400800" cy="932688"/>
+            <a:off x="9052560" y="1554480"/>
+            <a:ext cx="2514600" cy="1828800"/>
           </a:xfrm>
           <a:prstGeom prst="roundRect">
             <a:avLst/>
@@ -10473,8 +11522,8 @@
         </p:nvSpPr>
         <p:spPr>
           <a:xfrm>
-            <a:off x="841248" y="5120640"/>
-            <a:ext cx="6181344" cy="310896"/>
+            <a:off x="9162288" y="1645920"/>
+            <a:ext cx="2295144" cy="310896"/>
           </a:xfrm>
           <a:prstGeom prst="rect">
             <a:avLst/>
@@ -10495,7 +11544,7 @@
                 </a:solidFill>
                 <a:latin typeface="Georgia"/>
               </a:rPr>
-              <a:t>4. Validate the system</a:t>
+              <a:t>Evaluation</a:t>
             </a:r>
           </a:p>
         </p:txBody>
@@ -10508,8 +11557,8 @@
         </p:nvSpPr>
         <p:spPr>
           <a:xfrm>
-            <a:off x="804672" y="5449824"/>
-            <a:ext cx="6254496" cy="438912"/>
+            <a:off x="9125712" y="1975104"/>
+            <a:ext cx="2368296" cy="1335024"/>
           </a:xfrm>
           <a:prstGeom prst="rect">
             <a:avLst/>
@@ -10534,7 +11583,23 @@
                 </a:solidFill>
                 <a:latin typeface="Aptos"/>
               </a:rPr>
-              <a:t>Prepare datasets, clean data, integrate evaluation, and test the pipeline.</a:t>
+              <a:t>Ground truth is limited, so evaluation must be careful and realistic.</a:t>
+            </a:r>
+          </a:p>
+          <a:p>
+            <a:pPr>
+              <a:spcAft>
+                <a:spcPts val="700"/>
+              </a:spcAft>
+            </a:pPr>
+            <a:r>
+              <a:rPr sz="1150" b="0">
+                <a:solidFill>
+                  <a:srgbClr val="1F2A37"/>
+                </a:solidFill>
+                <a:latin typeface="Aptos"/>
+              </a:rPr>
+              <a:t>Metrics include precision, recall, F1, and ranking metrics if time permits.</a:t>
             </a:r>
           </a:p>
         </p:txBody>
@@ -10547,18 +11612,18 @@
         </p:nvSpPr>
         <p:spPr>
           <a:xfrm>
-            <a:off x="7635240" y="1664208"/>
-            <a:ext cx="3794760" cy="3566160"/>
+            <a:off x="658368" y="3913632"/>
+            <a:ext cx="10881360" cy="1234440"/>
           </a:xfrm>
           <a:prstGeom prst="roundRect">
             <a:avLst/>
           </a:prstGeom>
           <a:solidFill>
-            <a:srgbClr val="EAEEF3"/>
+            <a:srgbClr val="11213E"/>
           </a:solidFill>
           <a:ln>
             <a:solidFill>
-              <a:srgbClr val="EAEEF3"/>
+              <a:srgbClr val="11213E"/>
             </a:solidFill>
           </a:ln>
         </p:spPr>
@@ -10592,8 +11657,8 @@
         </p:nvSpPr>
         <p:spPr>
           <a:xfrm>
-            <a:off x="7744968" y="1755648"/>
-            <a:ext cx="3575304" cy="310896"/>
+            <a:off x="896112" y="4133087"/>
+            <a:ext cx="4572000" cy="228600"/>
           </a:xfrm>
           <a:prstGeom prst="rect">
             <a:avLst/>
@@ -10608,13 +11673,13 @@
           <a:p>
             <a:pPr algn="l"/>
             <a:r>
-              <a:rPr sz="1400" b="1">
-                <a:solidFill>
-                  <a:srgbClr val="11213E"/>
-                </a:solidFill>
-                <a:latin typeface="Georgia"/>
-              </a:rPr>
-              <a:t>Supporting work from the draft</a:t>
+              <a:rPr sz="1200" b="1">
+                <a:solidFill>
+                  <a:srgbClr val="F7EBC7"/>
+                </a:solidFill>
+                <a:latin typeface="Aptos"/>
+              </a:rPr>
+              <a:t>Why this is capstone-level work</a:t>
             </a:r>
           </a:p>
         </p:txBody>
@@ -10627,8 +11692,8 @@
         </p:nvSpPr>
         <p:spPr>
           <a:xfrm>
-            <a:off x="7708392" y="2084832"/>
-            <a:ext cx="3648456" cy="3072384"/>
+            <a:off x="868680" y="4389120"/>
+            <a:ext cx="10332720" cy="457200"/>
           </a:xfrm>
           <a:prstGeom prst="rect">
             <a:avLst/>
@@ -10647,61 +11712,13 @@
               </a:spcAft>
             </a:pPr>
             <a:r>
-              <a:rPr sz="1150" b="0">
-                <a:solidFill>
-                  <a:srgbClr val="1F2A37"/>
-                </a:solidFill>
-                <a:latin typeface="Aptos"/>
-              </a:rPr>
-              <a:t>Complete system models and diagrams that guide implementation.</a:t>
-            </a:r>
-          </a:p>
-          <a:p>
-            <a:pPr>
-              <a:spcAft>
-                <a:spcPts val="700"/>
-              </a:spcAft>
-            </a:pPr>
-            <a:r>
-              <a:rPr sz="1150" b="0">
-                <a:solidFill>
-                  <a:srgbClr val="1F2A37"/>
-                </a:solidFill>
-                <a:latin typeface="Aptos"/>
-              </a:rPr>
-              <a:t>Use Visual Paradigm and StarUML for structure, behavior, and interaction models.</a:t>
-            </a:r>
-          </a:p>
-          <a:p>
-            <a:pPr>
-              <a:spcAft>
-                <a:spcPts val="700"/>
-              </a:spcAft>
-            </a:pPr>
-            <a:r>
-              <a:rPr sz="1150" b="0">
-                <a:solidFill>
-                  <a:srgbClr val="1F2A37"/>
-                </a:solidFill>
-                <a:latin typeface="Aptos"/>
-              </a:rPr>
-              <a:t>Prepare and clean selected datasets.</a:t>
-            </a:r>
-          </a:p>
-          <a:p>
-            <a:pPr>
-              <a:spcAft>
-                <a:spcPts val="700"/>
-              </a:spcAft>
-            </a:pPr>
-            <a:r>
-              <a:rPr sz="1150" b="0">
-                <a:solidFill>
-                  <a:srgbClr val="1F2A37"/>
-                </a:solidFill>
-                <a:latin typeface="Aptos"/>
-              </a:rPr>
-              <a:t>Establish the evaluation setup for measuring performance.</a:t>
+              <a:rPr sz="1400" b="0">
+                <a:solidFill>
+                  <a:srgbClr val="FFFFFF"/>
+                </a:solidFill>
+                <a:latin typeface="Aptos"/>
+              </a:rPr>
+              <a:t>It combines web development, data representation, AI-style matching, evaluation design, and scalability concerns.</a:t>
             </a:r>
           </a:p>
         </p:txBody>
@@ -10736,341 +11753,7 @@
                 </a:solidFill>
                 <a:latin typeface="Aptos"/>
               </a:rPr>
-              <a:t>8</a:t>
-            </a:r>
-          </a:p>
-        </p:txBody>
-      </p:sp>
-    </p:spTree>
-  </p:cSld>
-  <p:clrMapOvr>
-    <a:masterClrMapping/>
-  </p:clrMapOvr>
-</p:sld>
-</file>
-
-<file path=ppt/slides/slide9.xml><?xml version="1.0" encoding="utf-8"?>
-<p:sld xmlns:a="http://schemas.openxmlformats.org/drawingml/2006/main" xmlns:p="http://schemas.openxmlformats.org/presentationml/2006/main" xmlns:r="http://schemas.openxmlformats.org/officeDocument/2006/relationships">
-  <p:cSld>
-    <p:bg>
-      <p:bgPr>
-        <a:solidFill>
-          <a:srgbClr val="FFFFFF"/>
-        </a:solidFill>
-        <a:effectLst/>
-      </p:bgPr>
-    </p:bg>
-    <p:spTree>
-      <p:nvGrpSpPr>
-        <p:cNvPr id="1" name=""/>
-        <p:cNvGrpSpPr/>
-        <p:nvPr/>
-      </p:nvGrpSpPr>
-      <p:grpSpPr/>
-      <p:sp>
-        <p:nvSpPr>
-          <p:cNvPr id="2" name="Rectangle 1"/>
-          <p:cNvSpPr/>
-          <p:nvPr/>
-        </p:nvSpPr>
-        <p:spPr>
-          <a:xfrm>
-            <a:off x="0" y="0"/>
-            <a:ext cx="12191695" cy="310896"/>
-          </a:xfrm>
-          <a:prstGeom prst="rect">
-            <a:avLst/>
-          </a:prstGeom>
-          <a:solidFill>
-            <a:srgbClr val="E0B44A"/>
-          </a:solidFill>
-          <a:ln>
-            <a:solidFill>
-              <a:srgbClr val="E0B44A"/>
-            </a:solidFill>
-          </a:ln>
-        </p:spPr>
-        <p:style>
-          <a:lnRef idx="1">
-            <a:schemeClr val="accent1"/>
-          </a:lnRef>
-          <a:fillRef idx="3">
-            <a:schemeClr val="accent1"/>
-          </a:fillRef>
-          <a:effectRef idx="2">
-            <a:schemeClr val="accent1"/>
-          </a:effectRef>
-          <a:fontRef idx="minor">
-            <a:schemeClr val="lt1"/>
-          </a:fontRef>
-        </p:style>
-        <p:txBody>
-          <a:bodyPr rtlCol="0" anchor="ctr"/>
-          <a:lstStyle/>
-          <a:p>
-            <a:pPr algn="ctr"/>
-          </a:p>
-        </p:txBody>
-      </p:sp>
-      <p:sp>
-        <p:nvSpPr>
-          <p:cNvPr id="3" name="TextBox 2"/>
-          <p:cNvSpPr txBox="1"/>
-          <p:nvPr/>
-        </p:nvSpPr>
-        <p:spPr>
-          <a:xfrm>
-            <a:off x="640080" y="502920"/>
-            <a:ext cx="8686800" cy="685800"/>
-          </a:xfrm>
-          <a:prstGeom prst="rect">
-            <a:avLst/>
-          </a:prstGeom>
-          <a:noFill/>
-        </p:spPr>
-        <p:txBody>
-          <a:bodyPr wrap="square" lIns="76200" rIns="76200" tIns="50800" bIns="50800" anchor="t">
-            <a:spAutoFit/>
-          </a:bodyPr>
-          <a:lstStyle/>
-          <a:p>
-            <a:pPr algn="l"/>
-            <a:r>
-              <a:rPr sz="2500" b="1">
-                <a:solidFill>
-                  <a:srgbClr val="11213E"/>
-                </a:solidFill>
-                <a:latin typeface="Georgia"/>
-              </a:rPr>
-              <a:t>Sitemap Showing User Interface Flow</a:t>
-            </a:r>
-          </a:p>
-        </p:txBody>
-      </p:sp>
-      <p:sp>
-        <p:nvSpPr>
-          <p:cNvPr id="4" name="TextBox 3"/>
-          <p:cNvSpPr txBox="1"/>
-          <p:nvPr/>
-        </p:nvSpPr>
-        <p:spPr>
-          <a:xfrm>
-            <a:off x="658368" y="1097280"/>
-            <a:ext cx="8869680" cy="347472"/>
-          </a:xfrm>
-          <a:prstGeom prst="rect">
-            <a:avLst/>
-          </a:prstGeom>
-          <a:noFill/>
-        </p:spPr>
-        <p:txBody>
-          <a:bodyPr wrap="square" lIns="76200" rIns="76200" tIns="50800" bIns="50800" anchor="t">
-            <a:spAutoFit/>
-          </a:bodyPr>
-          <a:lstStyle/>
-          <a:p>
-            <a:pPr algn="l"/>
-            <a:r>
-              <a:rPr sz="1100" b="1">
-                <a:solidFill>
-                  <a:srgbClr val="368A7F"/>
-                </a:solidFill>
-                <a:latin typeface="Aptos"/>
-              </a:rPr>
-              <a:t>Existing visual artifact from the project folder</a:t>
-            </a:r>
-          </a:p>
-        </p:txBody>
-      </p:sp>
-      <p:sp>
-        <p:nvSpPr>
-          <p:cNvPr id="5" name="Rounded Rectangle 4"/>
-          <p:cNvSpPr/>
-          <p:nvPr/>
-        </p:nvSpPr>
-        <p:spPr>
-          <a:xfrm>
-            <a:off x="9802368" y="566928"/>
-            <a:ext cx="1645920" cy="329184"/>
-          </a:xfrm>
-          <a:prstGeom prst="roundRect">
-            <a:avLst/>
-          </a:prstGeom>
-          <a:solidFill>
-            <a:srgbClr val="368A7F"/>
-          </a:solidFill>
-          <a:ln>
-            <a:solidFill>
-              <a:srgbClr val="368A7F"/>
-            </a:solidFill>
-          </a:ln>
-        </p:spPr>
-        <p:style>
-          <a:lnRef idx="1">
-            <a:schemeClr val="accent1"/>
-          </a:lnRef>
-          <a:fillRef idx="3">
-            <a:schemeClr val="accent1"/>
-          </a:fillRef>
-          <a:effectRef idx="2">
-            <a:schemeClr val="accent1"/>
-          </a:effectRef>
-          <a:fontRef idx="minor">
-            <a:schemeClr val="lt1"/>
-          </a:fontRef>
-        </p:style>
-        <p:txBody>
-          <a:bodyPr rtlCol="0" anchor="ctr"/>
-          <a:lstStyle/>
-          <a:p>
-            <a:pPr algn="ctr"/>
-            <a:r>
-              <a:rPr sz="1100" b="1">
-                <a:solidFill>
-                  <a:srgbClr val="FFFFFF"/>
-                </a:solidFill>
-                <a:latin typeface="Aptos"/>
-              </a:rPr>
-              <a:t>UI</a:t>
-            </a:r>
-          </a:p>
-        </p:txBody>
-      </p:sp>
-      <p:sp>
-        <p:nvSpPr>
-          <p:cNvPr id="6" name="Rounded Rectangle 5"/>
-          <p:cNvSpPr/>
-          <p:nvPr/>
-        </p:nvSpPr>
-        <p:spPr>
-          <a:xfrm>
-            <a:off x="594360" y="1371600"/>
-            <a:ext cx="11018520" cy="4983480"/>
-          </a:xfrm>
-          <a:prstGeom prst="roundRect">
-            <a:avLst/>
-          </a:prstGeom>
-          <a:solidFill>
-            <a:srgbClr val="EAEEF3"/>
-          </a:solidFill>
-          <a:ln>
-            <a:solidFill>
-              <a:srgbClr val="EAEEF3"/>
-            </a:solidFill>
-          </a:ln>
-        </p:spPr>
-        <p:style>
-          <a:lnRef idx="1">
-            <a:schemeClr val="accent1"/>
-          </a:lnRef>
-          <a:fillRef idx="3">
-            <a:schemeClr val="accent1"/>
-          </a:fillRef>
-          <a:effectRef idx="2">
-            <a:schemeClr val="accent1"/>
-          </a:effectRef>
-          <a:fontRef idx="minor">
-            <a:schemeClr val="lt1"/>
-          </a:fontRef>
-        </p:style>
-        <p:txBody>
-          <a:bodyPr rtlCol="0" anchor="ctr"/>
-          <a:lstStyle/>
-          <a:p>
-            <a:pPr algn="ctr"/>
-          </a:p>
-        </p:txBody>
-      </p:sp>
-      <p:pic>
-        <p:nvPicPr>
-          <p:cNvPr id="7" name="Picture 6" descr="Real Site Map.png"/>
-          <p:cNvPicPr>
-            <a:picLocks noChangeAspect="1"/>
-          </p:cNvPicPr>
-          <p:nvPr/>
-        </p:nvPicPr>
-        <p:blipFill>
-          <a:blip r:embed="rId2"/>
-          <a:stretch>
-            <a:fillRect/>
-          </a:stretch>
-        </p:blipFill>
-        <p:spPr>
-          <a:xfrm>
-            <a:off x="2575317" y="1572768"/>
-            <a:ext cx="7065749" cy="4434840"/>
-          </a:xfrm>
-          <a:prstGeom prst="rect">
-            <a:avLst/>
-          </a:prstGeom>
-        </p:spPr>
-      </p:pic>
-      <p:sp>
-        <p:nvSpPr>
-          <p:cNvPr id="8" name="TextBox 7"/>
-          <p:cNvSpPr txBox="1"/>
-          <p:nvPr/>
-        </p:nvSpPr>
-        <p:spPr>
-          <a:xfrm>
-            <a:off x="822960" y="6062472"/>
-            <a:ext cx="10058400" cy="228600"/>
-          </a:xfrm>
-          <a:prstGeom prst="rect">
-            <a:avLst/>
-          </a:prstGeom>
-          <a:noFill/>
-        </p:spPr>
-        <p:txBody>
-          <a:bodyPr wrap="square" lIns="76200" rIns="76200" tIns="50800" bIns="50800" anchor="t">
-            <a:spAutoFit/>
-          </a:bodyPr>
-          <a:lstStyle/>
-          <a:p>
-            <a:pPr algn="l"/>
-            <a:r>
-              <a:rPr sz="1200" b="0">
-                <a:solidFill>
-                  <a:srgbClr val="2D3E54"/>
-                </a:solidFill>
-                <a:latin typeface="Aptos"/>
-              </a:rPr>
-              <a:t>This flow captures the shared landing experience plus separate applicant and employer dashboards.</a:t>
-            </a:r>
-          </a:p>
-        </p:txBody>
-      </p:sp>
-      <p:sp>
-        <p:nvSpPr>
-          <p:cNvPr id="9" name="TextBox 8"/>
-          <p:cNvSpPr txBox="1"/>
-          <p:nvPr/>
-        </p:nvSpPr>
-        <p:spPr>
-          <a:xfrm>
-            <a:off x="11448288" y="6400800"/>
-            <a:ext cx="365760" cy="182880"/>
-          </a:xfrm>
-          <a:prstGeom prst="rect">
-            <a:avLst/>
-          </a:prstGeom>
-          <a:noFill/>
-        </p:spPr>
-        <p:txBody>
-          <a:bodyPr wrap="square" lIns="76200" rIns="76200" tIns="50800" bIns="50800" anchor="t">
-            <a:spAutoFit/>
-          </a:bodyPr>
-          <a:lstStyle/>
-          <a:p>
-            <a:pPr algn="r"/>
-            <a:r>
-              <a:rPr sz="1000" b="0">
-                <a:solidFill>
-                  <a:srgbClr val="2D3E54"/>
-                </a:solidFill>
-                <a:latin typeface="Aptos"/>
-              </a:rPr>
-              <a:t>9</a:t>
+              <a:t>7</a:t>
             </a:r>
           </a:p>
         </p:txBody>
